--- a/Customer Churn Prediction - PT ABC.pptx
+++ b/Customer Churn Prediction - PT ABC.pptx
@@ -4,6 +4,9 @@
   <p:sldMasterIdLst>
     <p:sldMasterId id="2147483648" r:id="rId1"/>
   </p:sldMasterIdLst>
+  <p:notesMasterIdLst>
+    <p:notesMasterId r:id="rId16"/>
+  </p:notesMasterIdLst>
   <p:sldIdLst>
     <p:sldId id="256" r:id="rId2"/>
     <p:sldId id="257" r:id="rId3"/>
@@ -20,9 +23,6 @@
     <p:sldId id="268" r:id="rId14"/>
     <p:sldId id="269" r:id="rId15"/>
   </p:sldIdLst>
-  <p:notesMasterIdLst>
-    <p:notesMasterId r:id="rId16"/>
-  </p:notesMasterIdLst>
   <p:sldSz cx="12192000" cy="6858000"/>
   <p:notesSz cx="6858000" cy="12192000"/>
   <p:defaultTextStyle>
@@ -117,13 +117,20 @@
       </a:defRPr>
     </a:lvl9pPr>
   </p:defaultTextStyle>
+  <p:extLst>
+    <p:ext uri="{EFAFB233-063F-42B5-8137-9DF3F51BA10A}">
+      <p15:sldGuideLst xmlns:p15="http://schemas.microsoft.com/office/powerpoint/2012/main"/>
+    </p:ext>
+  </p:extLst>
 </p:presentation>
 </file>
 
 <file path=ppt/charts/chart1.xml><?xml version="1.0" encoding="utf-8"?>
-<c:chartSpace xmlns:c="http://schemas.openxmlformats.org/drawingml/2006/chart" xmlns:a="http://schemas.openxmlformats.org/drawingml/2006/main" xmlns:r="http://schemas.openxmlformats.org/officeDocument/2006/relationships">
+<c:chartSpace xmlns:c="http://schemas.openxmlformats.org/drawingml/2006/chart" xmlns:a="http://schemas.openxmlformats.org/drawingml/2006/main" xmlns:r="http://schemas.openxmlformats.org/officeDocument/2006/relationships" xmlns:c16r2="http://schemas.microsoft.com/office/drawing/2015/06/chart">
   <c:date1904 val="0"/>
+  <c:lang val="en-US"/>
   <c:roundedCorners val="1"/>
+  <c:style val="2"/>
   <c:chart>
     <c:title>
       <c:tx>
@@ -140,7 +147,7 @@
               </a:defRPr>
             </a:pPr>
             <a:r>
-              <a:rPr sz="1200" b="0" i="0" u="none" strike="noStrike">
+              <a:rPr lang="en-US" sz="1200" b="0" i="0" u="none" strike="noStrike">
                 <a:solidFill>
                   <a:srgbClr val="1B2B3A"/>
                 </a:solidFill>
@@ -151,7 +158,6 @@
           </a:p>
         </c:rich>
       </c:tx>
-      <c:layout/>
       <c:overlay val="0"/>
     </c:title>
     <c:autoTitleDeleted val="0"/>
@@ -184,18 +190,26 @@
           <c:invertIfNegative val="0"/>
           <c:dLbls>
             <c:numFmt formatCode="#,##0" sourceLinked="0"/>
+            <c:spPr>
+              <a:noFill/>
+              <a:ln>
+                <a:noFill/>
+              </a:ln>
+              <a:effectLst/>
+            </c:spPr>
             <c:txPr>
               <a:bodyPr/>
               <a:lstStyle/>
               <a:p>
                 <a:pPr>
-                  <a:defRPr b="0" i="0" strike="noStrike" sz="1000" u="none">
+                  <a:defRPr sz="1000" b="0" i="0" u="none" strike="noStrike">
                     <a:solidFill>
                       <a:srgbClr val="1B2B3A"/>
                     </a:solidFill>
                     <a:latin typeface="Arial"/>
                   </a:defRPr>
                 </a:pPr>
+                <a:endParaRPr lang="en-US"/>
               </a:p>
             </c:txPr>
             <c:showLegendKey val="0"/>
@@ -205,25 +219,28 @@
             <c:showPercent val="0"/>
             <c:showBubbleSize val="0"/>
             <c:showLeaderLines val="0"/>
+            <c:extLst>
+              <c:ext xmlns:c15="http://schemas.microsoft.com/office/drawing/2012/chart" uri="{CE6537A1-D6FC-4f65-9D91-7224C49458BB}">
+                <c15:showLeaderLines val="0"/>
+              </c:ext>
+            </c:extLst>
           </c:dLbls>
           <c:cat>
-            <c:multiLvlStrRef>
+            <c:strRef>
               <c:f>Sheet1!$A$2:$A$4</c:f>
-              <c:multiLvlStrCache>
+              <c:strCache>
                 <c:ptCount val="3"/>
-                <c:lvl>
-                  <c:pt idx="0">
-                    <c:v>Monthly</c:v>
-                  </c:pt>
-                  <c:pt idx="1">
-                    <c:v>6-Month</c:v>
-                  </c:pt>
-                  <c:pt idx="2">
-                    <c:v>Annual</c:v>
-                  </c:pt>
-                </c:lvl>
-              </c:multiLvlStrCache>
-            </c:multiLvlStrRef>
+                <c:pt idx="0">
+                  <c:v>Monthly</c:v>
+                </c:pt>
+                <c:pt idx="1">
+                  <c:v>6-Month</c:v>
+                </c:pt>
+                <c:pt idx="2">
+                  <c:v>Annual</c:v>
+                </c:pt>
+              </c:strCache>
+            </c:strRef>
           </c:cat>
           <c:val>
             <c:numRef>
@@ -232,47 +249,34 @@
                 <c:formatCode>General</c:formatCode>
                 <c:ptCount val="3"/>
                 <c:pt idx="0">
-                  <c:v>32.38</c:v>
+                  <c:v>32.380000000000003</c:v>
                 </c:pt>
                 <c:pt idx="1">
                   <c:v>18.39</c:v>
                 </c:pt>
                 <c:pt idx="2">
-                  <c:v>16.67</c:v>
+                  <c:v>16.670000000000002</c:v>
                 </c:pt>
               </c:numCache>
             </c:numRef>
           </c:val>
+          <c:extLst>
+            <c:ext xmlns:c16="http://schemas.microsoft.com/office/drawing/2014/chart" uri="{C3380CC4-5D6E-409C-BE32-E72D297353CC}">
+              <c16:uniqueId val="{00000000-BB3C-4F86-9AB2-5BBEC7B63EEE}"/>
+            </c:ext>
+          </c:extLst>
         </c:ser>
         <c:dLbls>
-          <c:numFmt formatCode="#,##0" sourceLinked="0"/>
-          <c:txPr>
-            <a:bodyPr/>
-            <a:lstStyle/>
-            <a:p>
-              <a:pPr>
-                <a:defRPr b="0" i="0" strike="noStrike" sz="1000" u="none">
-                  <a:solidFill>
-                    <a:srgbClr val="1B2B3A"/>
-                  </a:solidFill>
-                  <a:latin typeface="Arial"/>
-                </a:defRPr>
-              </a:pPr>
-            </a:p>
-          </c:txPr>
           <c:showLegendKey val="0"/>
           <c:showVal val="1"/>
           <c:showCatName val="0"/>
           <c:showSerName val="0"/>
           <c:showPercent val="0"/>
           <c:showBubbleSize val="0"/>
-          <c:showLeaderLines val="0"/>
         </c:dLbls>
         <c:gapWidth val="150"/>
-        <c:overlap val="0"/>
         <c:axId val="2094734554"/>
         <c:axId val="2094734552"/>
-        <c:axId val="2094734556"/>
       </c:barChart>
       <c:catAx>
         <c:axId val="2094734554"/>
@@ -313,6 +317,7 @@
         <c:crosses val="autoZero"/>
         <c:auto val="1"/>
         <c:lblAlgn val="ctr"/>
+        <c:lblOffset val="100"/>
         <c:noMultiLvlLbl val="1"/>
       </c:catAx>
       <c:valAx>
@@ -375,6 +380,7 @@
     </c:plotArea>
     <c:plotVisOnly val="1"/>
     <c:dispBlanksAs val="span"/>
+    <c:showDLblsOverMax val="1"/>
   </c:chart>
   <c:spPr>
     <a:noFill/>
@@ -390,9 +396,11 @@
 </file>
 
 <file path=ppt/charts/chart2.xml><?xml version="1.0" encoding="utf-8"?>
-<c:chartSpace xmlns:c="http://schemas.openxmlformats.org/drawingml/2006/chart" xmlns:a="http://schemas.openxmlformats.org/drawingml/2006/main" xmlns:r="http://schemas.openxmlformats.org/officeDocument/2006/relationships">
+<c:chartSpace xmlns:c="http://schemas.openxmlformats.org/drawingml/2006/chart" xmlns:a="http://schemas.openxmlformats.org/drawingml/2006/main" xmlns:r="http://schemas.openxmlformats.org/officeDocument/2006/relationships" xmlns:c16r2="http://schemas.microsoft.com/office/drawing/2015/06/chart">
   <c:date1904 val="0"/>
+  <c:lang val="en-US"/>
   <c:roundedCorners val="1"/>
+  <c:style val="2"/>
   <c:chart>
     <c:title>
       <c:tx>
@@ -409,7 +417,7 @@
               </a:defRPr>
             </a:pPr>
             <a:r>
-              <a:rPr sz="1200" b="0" i="0" u="none" strike="noStrike">
+              <a:rPr lang="en-ID" sz="1200" b="0" i="0" u="none" strike="noStrike">
                 <a:solidFill>
                   <a:srgbClr val="1B2B3A"/>
                 </a:solidFill>
@@ -420,7 +428,6 @@
           </a:p>
         </c:rich>
       </c:tx>
-      <c:layout/>
       <c:overlay val="0"/>
     </c:title>
     <c:autoTitleDeleted val="0"/>
@@ -453,18 +460,26 @@
           <c:invertIfNegative val="0"/>
           <c:dLbls>
             <c:numFmt formatCode="#,##0" sourceLinked="0"/>
+            <c:spPr>
+              <a:noFill/>
+              <a:ln>
+                <a:noFill/>
+              </a:ln>
+              <a:effectLst/>
+            </c:spPr>
             <c:txPr>
               <a:bodyPr/>
               <a:lstStyle/>
               <a:p>
                 <a:pPr>
-                  <a:defRPr b="0" i="0" strike="noStrike" sz="1000" u="none">
+                  <a:defRPr sz="1000" b="0" i="0" u="none" strike="noStrike">
                     <a:solidFill>
                       <a:srgbClr val="1B2B3A"/>
                     </a:solidFill>
                     <a:latin typeface="Arial"/>
                   </a:defRPr>
                 </a:pPr>
+                <a:endParaRPr lang="en-US"/>
               </a:p>
             </c:txPr>
             <c:showLegendKey val="0"/>
@@ -474,22 +489,25 @@
             <c:showPercent val="0"/>
             <c:showBubbleSize val="0"/>
             <c:showLeaderLines val="0"/>
+            <c:extLst>
+              <c:ext xmlns:c15="http://schemas.microsoft.com/office/drawing/2012/chart" uri="{CE6537A1-D6FC-4f65-9D91-7224C49458BB}">
+                <c15:showLeaderLines val="0"/>
+              </c:ext>
+            </c:extLst>
           </c:dLbls>
           <c:cat>
-            <c:multiLvlStrRef>
+            <c:strRef>
               <c:f>Sheet1!$A$2:$A$3</c:f>
-              <c:multiLvlStrCache>
+              <c:strCache>
                 <c:ptCount val="2"/>
-                <c:lvl>
-                  <c:pt idx="0">
-                    <c:v>Autopay: Ya</c:v>
-                  </c:pt>
-                  <c:pt idx="1">
-                    <c:v>Autopay: Tidak</c:v>
-                  </c:pt>
-                </c:lvl>
-              </c:multiLvlStrCache>
-            </c:multiLvlStrRef>
+                <c:pt idx="0">
+                  <c:v>Autopay: Ya</c:v>
+                </c:pt>
+                <c:pt idx="1">
+                  <c:v>Autopay: Tidak</c:v>
+                </c:pt>
+              </c:strCache>
+            </c:strRef>
           </c:cat>
           <c:val>
             <c:numRef>
@@ -506,36 +524,23 @@
               </c:numCache>
             </c:numRef>
           </c:val>
+          <c:extLst>
+            <c:ext xmlns:c16="http://schemas.microsoft.com/office/drawing/2014/chart" uri="{C3380CC4-5D6E-409C-BE32-E72D297353CC}">
+              <c16:uniqueId val="{00000000-306D-4D88-8F28-6146E5C58B0E}"/>
+            </c:ext>
+          </c:extLst>
         </c:ser>
         <c:dLbls>
-          <c:numFmt formatCode="#,##0" sourceLinked="0"/>
-          <c:txPr>
-            <a:bodyPr/>
-            <a:lstStyle/>
-            <a:p>
-              <a:pPr>
-                <a:defRPr b="0" i="0" strike="noStrike" sz="1000" u="none">
-                  <a:solidFill>
-                    <a:srgbClr val="1B2B3A"/>
-                  </a:solidFill>
-                  <a:latin typeface="Arial"/>
-                </a:defRPr>
-              </a:pPr>
-            </a:p>
-          </c:txPr>
           <c:showLegendKey val="0"/>
           <c:showVal val="1"/>
           <c:showCatName val="0"/>
           <c:showSerName val="0"/>
           <c:showPercent val="0"/>
           <c:showBubbleSize val="0"/>
-          <c:showLeaderLines val="0"/>
         </c:dLbls>
         <c:gapWidth val="150"/>
-        <c:overlap val="0"/>
         <c:axId val="2094734554"/>
         <c:axId val="2094734552"/>
-        <c:axId val="2094734556"/>
       </c:barChart>
       <c:catAx>
         <c:axId val="2094734554"/>
@@ -576,6 +581,7 @@
         <c:crosses val="autoZero"/>
         <c:auto val="1"/>
         <c:lblAlgn val="ctr"/>
+        <c:lblOffset val="100"/>
         <c:noMultiLvlLbl val="1"/>
       </c:catAx>
       <c:valAx>
@@ -638,6 +644,7 @@
     </c:plotArea>
     <c:plotVisOnly val="1"/>
     <c:dispBlanksAs val="span"/>
+    <c:showDLblsOverMax val="1"/>
   </c:chart>
   <c:spPr>
     <a:noFill/>
@@ -653,9 +660,11 @@
 </file>
 
 <file path=ppt/charts/chart3.xml><?xml version="1.0" encoding="utf-8"?>
-<c:chartSpace xmlns:c="http://schemas.openxmlformats.org/drawingml/2006/chart" xmlns:a="http://schemas.openxmlformats.org/drawingml/2006/main" xmlns:r="http://schemas.openxmlformats.org/officeDocument/2006/relationships">
+<c:chartSpace xmlns:c="http://schemas.openxmlformats.org/drawingml/2006/chart" xmlns:a="http://schemas.openxmlformats.org/drawingml/2006/main" xmlns:r="http://schemas.openxmlformats.org/officeDocument/2006/relationships" xmlns:c16r2="http://schemas.microsoft.com/office/drawing/2015/06/chart">
   <c:date1904 val="0"/>
+  <c:lang val="en-US"/>
   <c:roundedCorners val="1"/>
+  <c:style val="2"/>
   <c:chart>
     <c:autoTitleDeleted val="1"/>
     <c:plotArea>
@@ -687,18 +696,26 @@
           <c:invertIfNegative val="0"/>
           <c:dLbls>
             <c:numFmt formatCode="#,##0" sourceLinked="0"/>
+            <c:spPr>
+              <a:noFill/>
+              <a:ln>
+                <a:noFill/>
+              </a:ln>
+              <a:effectLst/>
+            </c:spPr>
             <c:txPr>
               <a:bodyPr/>
               <a:lstStyle/>
               <a:p>
                 <a:pPr>
-                  <a:defRPr b="0" i="0" strike="noStrike" sz="1000" u="none">
+                  <a:defRPr sz="1000" b="0" i="0" u="none" strike="noStrike">
                     <a:solidFill>
                       <a:srgbClr val="1B2B3A"/>
                     </a:solidFill>
                     <a:latin typeface="Arial"/>
                   </a:defRPr>
                 </a:pPr>
+                <a:endParaRPr lang="en-US"/>
               </a:p>
             </c:txPr>
             <c:showLegendKey val="0"/>
@@ -708,37 +725,40 @@
             <c:showPercent val="0"/>
             <c:showBubbleSize val="0"/>
             <c:showLeaderLines val="0"/>
+            <c:extLst>
+              <c:ext xmlns:c15="http://schemas.microsoft.com/office/drawing/2012/chart" uri="{CE6537A1-D6FC-4f65-9D91-7224C49458BB}">
+                <c15:showLeaderLines val="0"/>
+              </c:ext>
+            </c:extLst>
           </c:dLbls>
           <c:cat>
-            <c:multiLvlStrRef>
+            <c:strRef>
               <c:f>Sheet1!$A$2:$A$8</c:f>
-              <c:multiLvlStrCache>
+              <c:strCache>
                 <c:ptCount val="7"/>
-                <c:lvl>
-                  <c:pt idx="0">
-                    <c:v>contract_type</c:v>
-                  </c:pt>
-                  <c:pt idx="1">
-                    <c:v>support_calls</c:v>
-                  </c:pt>
-                  <c:pt idx="2">
-                    <c:v>tenure_months</c:v>
-                  </c:pt>
-                  <c:pt idx="3">
-                    <c:v>support_per_tenure</c:v>
-                  </c:pt>
-                  <c:pt idx="4">
-                    <c:v>downtime_per_tenure</c:v>
-                  </c:pt>
-                  <c:pt idx="5">
-                    <c:v>monthly_charge</c:v>
-                  </c:pt>
-                  <c:pt idx="6">
-                    <c:v>region</c:v>
-                  </c:pt>
-                </c:lvl>
-              </c:multiLvlStrCache>
-            </c:multiLvlStrRef>
+                <c:pt idx="0">
+                  <c:v>contract_type</c:v>
+                </c:pt>
+                <c:pt idx="1">
+                  <c:v>support_calls</c:v>
+                </c:pt>
+                <c:pt idx="2">
+                  <c:v>tenure_months</c:v>
+                </c:pt>
+                <c:pt idx="3">
+                  <c:v>support_per_tenure</c:v>
+                </c:pt>
+                <c:pt idx="4">
+                  <c:v>downtime_per_tenure</c:v>
+                </c:pt>
+                <c:pt idx="5">
+                  <c:v>monthly_charge</c:v>
+                </c:pt>
+                <c:pt idx="6">
+                  <c:v>region</c:v>
+                </c:pt>
+              </c:strCache>
+            </c:strRef>
           </c:cat>
           <c:val>
             <c:numRef>
@@ -753,7 +773,7 @@
                   <c:v>0.17</c:v>
                 </c:pt>
                 <c:pt idx="2">
-                  <c:v>0.14</c:v>
+                  <c:v>0.14000000000000001</c:v>
                 </c:pt>
                 <c:pt idx="3">
                   <c:v>0.12</c:v>
@@ -762,7 +782,7 @@
                   <c:v>0.1</c:v>
                 </c:pt>
                 <c:pt idx="5">
-                  <c:v>0.07</c:v>
+                  <c:v>7.0000000000000007E-2</c:v>
                 </c:pt>
                 <c:pt idx="6">
                   <c:v>0.05</c:v>
@@ -770,36 +790,23 @@
               </c:numCache>
             </c:numRef>
           </c:val>
+          <c:extLst>
+            <c:ext xmlns:c16="http://schemas.microsoft.com/office/drawing/2014/chart" uri="{C3380CC4-5D6E-409C-BE32-E72D297353CC}">
+              <c16:uniqueId val="{00000000-04EE-4810-B618-BF92503D1D63}"/>
+            </c:ext>
+          </c:extLst>
         </c:ser>
         <c:dLbls>
-          <c:numFmt formatCode="#,##0" sourceLinked="0"/>
-          <c:txPr>
-            <a:bodyPr/>
-            <a:lstStyle/>
-            <a:p>
-              <a:pPr>
-                <a:defRPr b="0" i="0" strike="noStrike" sz="1000" u="none">
-                  <a:solidFill>
-                    <a:srgbClr val="1B2B3A"/>
-                  </a:solidFill>
-                  <a:latin typeface="Arial"/>
-                </a:defRPr>
-              </a:pPr>
-            </a:p>
-          </c:txPr>
           <c:showLegendKey val="0"/>
           <c:showVal val="1"/>
           <c:showCatName val="0"/>
           <c:showSerName val="0"/>
           <c:showPercent val="0"/>
           <c:showBubbleSize val="0"/>
-          <c:showLeaderLines val="0"/>
         </c:dLbls>
         <c:gapWidth val="150"/>
-        <c:overlap val="0"/>
         <c:axId val="2094734554"/>
         <c:axId val="2094734552"/>
-        <c:axId val="2094734556"/>
       </c:barChart>
       <c:catAx>
         <c:axId val="2094734554"/>
@@ -840,6 +847,7 @@
         <c:crosses val="autoZero"/>
         <c:auto val="1"/>
         <c:lblAlgn val="ctr"/>
+        <c:lblOffset val="100"/>
         <c:noMultiLvlLbl val="1"/>
       </c:catAx>
       <c:valAx>
@@ -864,30 +872,6 @@
         <c:majorTickMark val="out"/>
         <c:minorTickMark val="none"/>
         <c:tickLblPos val="low"/>
-        <c:spPr>
-          <a:ln w="12700" cap="flat">
-            <a:solidFill>
-              <a:srgbClr val="888888"/>
-            </a:solidFill>
-            <a:prstDash val="solid"/>
-            <a:round/>
-          </a:ln>
-        </c:spPr>
-        <c:txPr>
-          <a:bodyPr/>
-          <a:lstStyle/>
-          <a:p>
-            <a:pPr>
-              <a:defRPr sz="900" b="0" i="0" u="none" strike="noStrike">
-                <a:solidFill>
-                  <a:srgbClr val="5C7086"/>
-                </a:solidFill>
-                <a:latin typeface="Arial"/>
-              </a:defRPr>
-            </a:pPr>
-            <a:endParaRPr lang="en-US"/>
-          </a:p>
-        </c:txPr>
         <c:crossAx val="2094734554"/>
         <c:crosses val="autoZero"/>
         <c:crossBetween val="between"/>
@@ -902,6 +886,7 @@
     </c:plotArea>
     <c:plotVisOnly val="1"/>
     <c:dispBlanksAs val="span"/>
+    <c:showDLblsOverMax val="1"/>
   </c:chart>
   <c:spPr>
     <a:noFill/>
@@ -938,234 +923,10 @@
           <a:chExt cx="0" cy="0"/>
         </a:xfrm>
       </p:grpSpPr>
-      <p:sp>
-        <p:nvSpPr>
-          <p:cNvPr id="2" name="Header Placeholder 1"/>
-          <p:cNvSpPr>
-            <a:spLocks noGrp="1"/>
-          </p:cNvSpPr>
-          <p:nvPr>
-            <p:ph type="hdr" sz="quarter"/>
-          </p:nvPr>
-        </p:nvSpPr>
-        <p:spPr>
-          <a:xfrm>
-            <a:off x="0" y="0"/>
-            <a:ext cx="2971800" cy="458788"/>
-          </a:xfrm>
-          <a:prstGeom prst="rect">
-            <a:avLst/>
-          </a:prstGeom>
-        </p:spPr>
-        <p:txBody>
-          <a:bodyPr vert="horz" lIns="91440" tIns="45720" rIns="91440" bIns="45720" rtlCol="0"/>
-          <a:lstStyle>
-            <a:lvl1pPr algn="l">
-              <a:defRPr sz="1200"/>
-            </a:lvl1pPr>
-          </a:lstStyle>
-          <a:p>
-            <a:endParaRPr lang="en-US"/>
-          </a:p>
-        </p:txBody>
-      </p:sp>
-      <p:sp>
-        <p:nvSpPr>
-          <p:cNvPr id="3" name="Date Placeholder 2"/>
-          <p:cNvSpPr>
-            <a:spLocks noGrp="1"/>
-          </p:cNvSpPr>
-          <p:nvPr>
-            <p:ph type="dt" idx="1"/>
-          </p:nvPr>
-        </p:nvSpPr>
-        <p:spPr>
-          <a:xfrm>
-            <a:off x="3884613" y="0"/>
-            <a:ext cx="2971800" cy="458788"/>
-          </a:xfrm>
-          <a:prstGeom prst="rect">
-            <a:avLst/>
-          </a:prstGeom>
-        </p:spPr>
-        <p:txBody>
-          <a:bodyPr vert="horz" lIns="91440" tIns="45720" rIns="91440" bIns="45720" rtlCol="0"/>
-          <a:lstStyle>
-            <a:lvl1pPr algn="r">
-              <a:defRPr sz="1200"/>
-            </a:lvl1pPr>
-          </a:lstStyle>
-          <a:p>
-            <a:fld id="{5282F153-3F37-0F45-9E97-73ACFA13230C}" type="datetimeFigureOut">
-              <a:rPr lang="en-US"/>
-              <a:t>7/23/19</a:t>
-            </a:fld>
-            <a:endParaRPr lang="en-US"/>
-          </a:p>
-        </p:txBody>
-      </p:sp>
-      <p:sp>
-        <p:nvSpPr>
-          <p:cNvPr id="4" name="Slide Image Placeholder 3"/>
-          <p:cNvSpPr>
-            <a:spLocks noGrp="1" noRot="1" noChangeAspect="1"/>
-          </p:cNvSpPr>
-          <p:nvPr>
-            <p:ph type="sldImg" idx="2"/>
-          </p:nvPr>
-        </p:nvSpPr>
-        <p:spPr>
-          <a:xfrm>
-            <a:off x="685800" y="1143000"/>
-            <a:ext cx="5486400" cy="3086100"/>
-          </a:xfrm>
-          <a:prstGeom prst="rect">
-            <a:avLst/>
-          </a:prstGeom>
-          <a:noFill/>
-          <a:ln w="12700">
-            <a:solidFill>
-              <a:prstClr val="black"/>
-            </a:solidFill>
-          </a:ln>
-        </p:spPr>
-        <p:txBody>
-          <a:bodyPr vert="horz" lIns="91440" tIns="45720" rIns="91440" bIns="45720" rtlCol="0" anchor="ctr"/>
-          <a:lstStyle/>
-          <a:p>
-            <a:endParaRPr lang="en-US"/>
-          </a:p>
-        </p:txBody>
-      </p:sp>
-      <p:sp>
-        <p:nvSpPr>
-          <p:cNvPr id="5" name="Notes Placeholder 4"/>
-          <p:cNvSpPr>
-            <a:spLocks noGrp="1"/>
-          </p:cNvSpPr>
-          <p:nvPr>
-            <p:ph type="body" sz="quarter" idx="3"/>
-          </p:nvPr>
-        </p:nvSpPr>
-        <p:spPr>
-          <a:xfrm>
-            <a:off x="685800" y="4400550"/>
-            <a:ext cx="5486400" cy="3600450"/>
-          </a:xfrm>
-          <a:prstGeom prst="rect">
-            <a:avLst/>
-          </a:prstGeom>
-        </p:spPr>
-        <p:txBody>
-          <a:bodyPr vert="horz" lIns="91440" tIns="45720" rIns="91440" bIns="45720" rtlCol="0"/>
-          <a:lstStyle/>
-          <a:p>
-            <a:pPr lvl="0"/>
-            <a:r>
-              <a:rPr lang="en-US"/>
-              <a:t>Click to edit Master text styles</a:t>
-            </a:r>
-          </a:p>
-          <a:p>
-            <a:pPr lvl="1"/>
-            <a:r>
-              <a:rPr lang="en-US"/>
-              <a:t>Second level</a:t>
-            </a:r>
-          </a:p>
-          <a:p>
-            <a:pPr lvl="2"/>
-            <a:r>
-              <a:rPr lang="en-US"/>
-              <a:t>Third level</a:t>
-            </a:r>
-          </a:p>
-          <a:p>
-            <a:pPr lvl="3"/>
-            <a:r>
-              <a:rPr lang="en-US"/>
-              <a:t>Fourth level</a:t>
-            </a:r>
-          </a:p>
-          <a:p>
-            <a:pPr lvl="4"/>
-            <a:r>
-              <a:rPr lang="en-US"/>
-              <a:t>Fifth level</a:t>
-            </a:r>
-          </a:p>
-        </p:txBody>
-      </p:sp>
-      <p:sp>
-        <p:nvSpPr>
-          <p:cNvPr id="6" name="Footer Placeholder 5"/>
-          <p:cNvSpPr>
-            <a:spLocks noGrp="1"/>
-          </p:cNvSpPr>
-          <p:nvPr>
-            <p:ph type="ftr" sz="quarter" idx="4"/>
-          </p:nvPr>
-        </p:nvSpPr>
-        <p:spPr>
-          <a:xfrm>
-            <a:off x="0" y="8685213"/>
-            <a:ext cx="2971800" cy="458787"/>
-          </a:xfrm>
-          <a:prstGeom prst="rect">
-            <a:avLst/>
-          </a:prstGeom>
-        </p:spPr>
-        <p:txBody>
-          <a:bodyPr vert="horz" lIns="91440" tIns="45720" rIns="91440" bIns="45720" rtlCol="0" anchor="b"/>
-          <a:lstStyle>
-            <a:lvl1pPr algn="l">
-              <a:defRPr sz="1200"/>
-            </a:lvl1pPr>
-          </a:lstStyle>
-          <a:p>
-            <a:endParaRPr lang="en-US"/>
-          </a:p>
-        </p:txBody>
-      </p:sp>
-      <p:sp>
-        <p:nvSpPr>
-          <p:cNvPr id="7" name="Slide Number Placeholder 6"/>
-          <p:cNvSpPr>
-            <a:spLocks noGrp="1"/>
-          </p:cNvSpPr>
-          <p:nvPr>
-            <p:ph type="sldNum" sz="quarter" idx="5"/>
-          </p:nvPr>
-        </p:nvSpPr>
-        <p:spPr>
-          <a:xfrm>
-            <a:off x="3884613" y="8685213"/>
-            <a:ext cx="2971800" cy="458787"/>
-          </a:xfrm>
-          <a:prstGeom prst="rect">
-            <a:avLst/>
-          </a:prstGeom>
-        </p:spPr>
-        <p:txBody>
-          <a:bodyPr vert="horz" lIns="91440" tIns="45720" rIns="91440" bIns="45720" rtlCol="0" anchor="b"/>
-          <a:lstStyle>
-            <a:lvl1pPr algn="r">
-              <a:defRPr sz="1200"/>
-            </a:lvl1pPr>
-          </a:lstStyle>
-          <a:p>
-            <a:fld id="{CE5E9CC1-C706-0F49-92D6-E571CC5EEA8F}" type="slidenum">
-              <a:rPr lang="en-US"/>
-              <a:t>‹#›</a:t>
-            </a:fld>
-            <a:endParaRPr lang="en-US"/>
-          </a:p>
-        </p:txBody>
-      </p:sp>
     </p:spTree>
     <p:extLst>
       <p:ext uri="{BB962C8B-B14F-4D97-AF65-F5344CB8AC3E}">
-        <p14:creationId xmlns:p14="http://schemas.microsoft.com/office/powerpoint/2010/main" val="1024086991"/>
+        <p14:creationId xmlns:p14="http://schemas.microsoft.com/office/powerpoint/2010/main" val="89617397"/>
       </p:ext>
     </p:extLst>
   </p:cSld>
@@ -1309,10 +1070,6 @@
           <a:bodyPr/>
           <a:lstStyle/>
           <a:p>
-            <a:r>
-              <a:rPr lang="en-US" dirty="0"/>
-              <a:t/>
-            </a:r>
             <a:endParaRPr lang="en-US" dirty="0"/>
           </a:p>
         </p:txBody>
@@ -1397,10 +1154,6 @@
           <a:bodyPr/>
           <a:lstStyle/>
           <a:p>
-            <a:r>
-              <a:rPr lang="en-US" dirty="0"/>
-              <a:t/>
-            </a:r>
             <a:endParaRPr lang="en-US" dirty="0"/>
           </a:p>
         </p:txBody>
@@ -1485,10 +1238,6 @@
           <a:bodyPr/>
           <a:lstStyle/>
           <a:p>
-            <a:r>
-              <a:rPr lang="en-US" dirty="0"/>
-              <a:t/>
-            </a:r>
             <a:endParaRPr lang="en-US" dirty="0"/>
           </a:p>
         </p:txBody>
@@ -1573,10 +1322,6 @@
           <a:bodyPr/>
           <a:lstStyle/>
           <a:p>
-            <a:r>
-              <a:rPr lang="en-US" dirty="0"/>
-              <a:t/>
-            </a:r>
             <a:endParaRPr lang="en-US" dirty="0"/>
           </a:p>
         </p:txBody>
@@ -1661,10 +1406,6 @@
           <a:bodyPr/>
           <a:lstStyle/>
           <a:p>
-            <a:r>
-              <a:rPr lang="en-US" dirty="0"/>
-              <a:t/>
-            </a:r>
             <a:endParaRPr lang="en-US" dirty="0"/>
           </a:p>
         </p:txBody>
@@ -1749,10 +1490,6 @@
           <a:bodyPr/>
           <a:lstStyle/>
           <a:p>
-            <a:r>
-              <a:rPr lang="en-US" dirty="0"/>
-              <a:t/>
-            </a:r>
             <a:endParaRPr lang="en-US" dirty="0"/>
           </a:p>
         </p:txBody>
@@ -1837,10 +1574,6 @@
           <a:bodyPr/>
           <a:lstStyle/>
           <a:p>
-            <a:r>
-              <a:rPr lang="en-US" dirty="0"/>
-              <a:t/>
-            </a:r>
             <a:endParaRPr lang="en-US" dirty="0"/>
           </a:p>
         </p:txBody>
@@ -1925,10 +1658,6 @@
           <a:bodyPr/>
           <a:lstStyle/>
           <a:p>
-            <a:r>
-              <a:rPr lang="en-US" dirty="0"/>
-              <a:t/>
-            </a:r>
             <a:endParaRPr lang="en-US" dirty="0"/>
           </a:p>
         </p:txBody>
@@ -2013,10 +1742,6 @@
           <a:bodyPr/>
           <a:lstStyle/>
           <a:p>
-            <a:r>
-              <a:rPr lang="en-US" dirty="0"/>
-              <a:t/>
-            </a:r>
             <a:endParaRPr lang="en-US" dirty="0"/>
           </a:p>
         </p:txBody>
@@ -2101,10 +1826,6 @@
           <a:bodyPr/>
           <a:lstStyle/>
           <a:p>
-            <a:r>
-              <a:rPr lang="en-US" dirty="0"/>
-              <a:t/>
-            </a:r>
             <a:endParaRPr lang="en-US" dirty="0"/>
           </a:p>
         </p:txBody>
@@ -2189,10 +1910,6 @@
           <a:bodyPr/>
           <a:lstStyle/>
           <a:p>
-            <a:r>
-              <a:rPr lang="en-US" dirty="0"/>
-              <a:t/>
-            </a:r>
             <a:endParaRPr lang="en-US" dirty="0"/>
           </a:p>
         </p:txBody>
@@ -2277,10 +1994,6 @@
           <a:bodyPr/>
           <a:lstStyle/>
           <a:p>
-            <a:r>
-              <a:rPr lang="en-US" dirty="0"/>
-              <a:t/>
-            </a:r>
             <a:endParaRPr lang="en-US" dirty="0"/>
           </a:p>
         </p:txBody>
@@ -2365,10 +2078,6 @@
           <a:bodyPr/>
           <a:lstStyle/>
           <a:p>
-            <a:r>
-              <a:rPr lang="en-US" dirty="0"/>
-              <a:t/>
-            </a:r>
             <a:endParaRPr lang="en-US" dirty="0"/>
           </a:p>
         </p:txBody>
@@ -2453,10 +2162,6 @@
           <a:bodyPr/>
           <a:lstStyle/>
           <a:p>
-            <a:r>
-              <a:rPr lang="en-US" dirty="0"/>
-              <a:t/>
-            </a:r>
             <a:endParaRPr lang="en-US" dirty="0"/>
           </a:p>
         </p:txBody>
@@ -2530,6 +2235,11 @@
 <file path=ppt/slideMasters/slideMaster1.xml><?xml version="1.0" encoding="utf-8"?>
 <p:sldMaster xmlns:a="http://schemas.openxmlformats.org/drawingml/2006/main" xmlns:r="http://schemas.openxmlformats.org/officeDocument/2006/relationships" xmlns:p="http://schemas.openxmlformats.org/presentationml/2006/main">
   <p:cSld>
+    <p:bg>
+      <p:bgRef idx="1001">
+        <a:schemeClr val="bg1"/>
+      </p:bgRef>
+    </p:bg>
     <p:spTree>
       <p:nvGrpSpPr>
         <p:cNvPr id="1" name=""/>
@@ -2812,6 +2522,7 @@
         <a:solidFill>
           <a:srgbClr val="12314F"/>
         </a:solidFill>
+        <a:effectLst/>
       </p:bgPr>
     </p:bg>
     <p:spTree>
@@ -2893,14 +2604,14 @@
           <a:bodyPr wrap="square" rtlCol="0" anchor="ctr"/>
           <a:lstStyle/>
           <a:p>
-            <a:pPr algn="l" indent="0" marL="0">
+            <a:pPr marL="0" indent="0" algn="l">
               <a:lnSpc>
                 <a:spcPts val="4400"/>
               </a:lnSpc>
               <a:buNone/>
             </a:pPr>
             <a:r>
-              <a:rPr lang="en-US" sz="4000" b="1" spc="50" kern="0" dirty="0">
+              <a:rPr lang="en-US" sz="4000" b="1" kern="0" spc="50" dirty="0">
                 <a:solidFill>
                   <a:srgbClr val="FFFFFF"/>
                 </a:solidFill>
@@ -2935,7 +2646,7 @@
           <a:bodyPr wrap="square" rtlCol="0" anchor="ctr"/>
           <a:lstStyle/>
           <a:p>
-            <a:pPr algn="l" indent="0" marL="0">
+            <a:pPr marL="0" indent="0" algn="l">
               <a:buNone/>
             </a:pPr>
             <a:r>
@@ -2974,7 +2685,7 @@
           <a:bodyPr wrap="square" rtlCol="0" anchor="ctr"/>
           <a:lstStyle/>
           <a:p>
-            <a:pPr indent="0" marL="0">
+            <a:pPr marL="0" indent="0">
               <a:buNone/>
             </a:pPr>
             <a:r>
@@ -2989,45 +2700,6 @@
               <a:t>Ahmad Miftahul Farohi</a:t>
             </a:r>
             <a:endParaRPr lang="en-US" sz="1400" dirty="0"/>
-          </a:p>
-        </p:txBody>
-      </p:sp>
-      <p:sp>
-        <p:nvSpPr>
-          <p:cNvPr id="7" name="Text 5"/>
-          <p:cNvSpPr/>
-          <p:nvPr/>
-        </p:nvSpPr>
-        <p:spPr>
-          <a:xfrm>
-            <a:off x="822960" y="6108192"/>
-            <a:ext cx="5486400" cy="320040"/>
-          </a:xfrm>
-          <a:prstGeom prst="rect">
-            <a:avLst/>
-          </a:prstGeom>
-          <a:noFill/>
-          <a:ln/>
-        </p:spPr>
-        <p:txBody>
-          <a:bodyPr wrap="square" rtlCol="0" anchor="ctr"/>
-          <a:lstStyle/>
-          <a:p>
-            <a:pPr indent="0" marL="0">
-              <a:buNone/>
-            </a:pPr>
-            <a:r>
-              <a:rPr lang="en-US" sz="1100" dirty="0">
-                <a:solidFill>
-                  <a:srgbClr val="8FA7BE"/>
-                </a:solidFill>
-                <a:latin typeface="Calibri" pitchFamily="34" charset="0"/>
-                <a:ea typeface="Calibri" pitchFamily="34" charset="-122"/>
-                <a:cs typeface="Calibri" pitchFamily="34" charset="-120"/>
-              </a:rPr>
-              <a:t>Data Analyst / Data Science Portfolio Project</a:t>
-            </a:r>
-            <a:endParaRPr lang="en-US" sz="1100" dirty="0"/>
           </a:p>
         </p:txBody>
       </p:sp>
@@ -3047,6 +2719,7 @@
         <a:solidFill>
           <a:srgbClr val="FFFFFF"/>
         </a:solidFill>
+        <a:effectLst/>
       </p:bgPr>
     </p:bg>
     <p:spTree>
@@ -3084,7 +2757,7 @@
           <a:bodyPr wrap="square" rtlCol="0" anchor="ctr"/>
           <a:lstStyle/>
           <a:p>
-            <a:pPr indent="0" marL="0">
+            <a:pPr marL="0" indent="0">
               <a:buNone/>
             </a:pPr>
             <a:r>
@@ -3123,7 +2796,7 @@
           <a:bodyPr wrap="square" rtlCol="0" anchor="ctr"/>
           <a:lstStyle/>
           <a:p>
-            <a:pPr indent="0" marL="0">
+            <a:pPr marL="0" indent="0">
               <a:buNone/>
             </a:pPr>
             <a:r>
@@ -3184,7 +2857,7 @@
           <a:bodyPr wrap="square" rtlCol="0" anchor="ctr"/>
           <a:lstStyle/>
           <a:p>
-            <a:pPr algn="ctr" indent="0" marL="0">
+            <a:pPr marL="0" indent="0" algn="ctr">
               <a:buNone/>
             </a:pPr>
             <a:r>
@@ -3223,7 +2896,7 @@
           <a:bodyPr wrap="square" rtlCol="0" anchor="ctr"/>
           <a:lstStyle/>
           <a:p>
-            <a:pPr algn="ctr" indent="0" marL="0">
+            <a:pPr marL="0" indent="0" algn="ctr">
               <a:buNone/>
             </a:pPr>
             <a:r>
@@ -3284,7 +2957,7 @@
           <a:bodyPr wrap="square" rtlCol="0" anchor="ctr"/>
           <a:lstStyle/>
           <a:p>
-            <a:pPr algn="ctr" indent="0" marL="0">
+            <a:pPr marL="0" indent="0" algn="ctr">
               <a:buNone/>
             </a:pPr>
             <a:r>
@@ -3323,7 +2996,7 @@
           <a:bodyPr wrap="square" rtlCol="0" anchor="ctr"/>
           <a:lstStyle/>
           <a:p>
-            <a:pPr algn="ctr" indent="0" marL="0">
+            <a:pPr marL="0" indent="0" algn="ctr">
               <a:buNone/>
             </a:pPr>
             <a:r>
@@ -3384,7 +3057,7 @@
           <a:bodyPr wrap="square" rtlCol="0" anchor="ctr"/>
           <a:lstStyle/>
           <a:p>
-            <a:pPr algn="ctr" indent="0" marL="0">
+            <a:pPr marL="0" indent="0" algn="ctr">
               <a:buNone/>
             </a:pPr>
             <a:r>
@@ -3423,7 +3096,7 @@
           <a:bodyPr wrap="square" rtlCol="0" anchor="ctr"/>
           <a:lstStyle/>
           <a:p>
-            <a:pPr algn="ctr" indent="0" marL="0">
+            <a:pPr marL="0" indent="0" algn="ctr">
               <a:buNone/>
             </a:pPr>
             <a:r>
@@ -3484,7 +3157,7 @@
           <a:bodyPr wrap="square" rtlCol="0" anchor="ctr"/>
           <a:lstStyle/>
           <a:p>
-            <a:pPr algn="ctr" indent="0" marL="0">
+            <a:pPr marL="0" indent="0" algn="ctr">
               <a:buNone/>
             </a:pPr>
             <a:r>
@@ -3523,7 +3196,7 @@
           <a:bodyPr wrap="square" rtlCol="0" anchor="ctr"/>
           <a:lstStyle/>
           <a:p>
-            <a:pPr algn="ctr" indent="0" marL="0">
+            <a:pPr marL="0" indent="0" algn="ctr">
               <a:buNone/>
             </a:pPr>
             <a:r>
@@ -3584,7 +3257,7 @@
           <a:bodyPr wrap="square" rtlCol="0" anchor="ctr"/>
           <a:lstStyle/>
           <a:p>
-            <a:pPr algn="ctr" indent="0" marL="0">
+            <a:pPr marL="0" indent="0" algn="ctr">
               <a:buNone/>
             </a:pPr>
             <a:r>
@@ -3623,7 +3296,7 @@
           <a:bodyPr wrap="square" rtlCol="0" anchor="ctr"/>
           <a:lstStyle/>
           <a:p>
-            <a:pPr algn="ctr" indent="0" marL="0">
+            <a:pPr marL="0" indent="0" algn="ctr">
               <a:buNone/>
             </a:pPr>
             <a:r>
@@ -3662,11 +3335,11 @@
           <a:bodyPr wrap="square" rtlCol="0" anchor="ctr"/>
           <a:lstStyle/>
           <a:p>
-            <a:pPr indent="0" marL="0">
-              <a:buNone/>
-            </a:pPr>
-            <a:r>
-              <a:rPr lang="en-US" sz="1050" b="1" spc="120" kern="0" dirty="0">
+            <a:pPr marL="0" indent="0">
+              <a:buNone/>
+            </a:pPr>
+            <a:r>
+              <a:rPr lang="en-US" sz="1050" b="1" kern="0" spc="120" dirty="0">
                 <a:solidFill>
                   <a:srgbClr val="5C7086"/>
                 </a:solidFill>
@@ -3723,7 +3396,7 @@
           <a:bodyPr wrap="square" rtlCol="0" anchor="ctr"/>
           <a:lstStyle/>
           <a:p>
-            <a:pPr indent="0" marL="0">
+            <a:pPr marL="0" indent="0">
               <a:buNone/>
             </a:pPr>
             <a:r>
@@ -3762,7 +3435,7 @@
           <a:bodyPr wrap="square" rtlCol="0" anchor="ctr"/>
           <a:lstStyle/>
           <a:p>
-            <a:pPr indent="0" marL="0">
+            <a:pPr marL="0" indent="0">
               <a:lnSpc>
                 <a:spcPts val="1200"/>
               </a:lnSpc>
@@ -3826,7 +3499,7 @@
           <a:bodyPr wrap="square" rtlCol="0" anchor="ctr"/>
           <a:lstStyle/>
           <a:p>
-            <a:pPr indent="0" marL="0">
+            <a:pPr marL="0" indent="0">
               <a:buNone/>
             </a:pPr>
             <a:r>
@@ -3865,7 +3538,7 @@
           <a:bodyPr wrap="square" rtlCol="0" anchor="ctr"/>
           <a:lstStyle/>
           <a:p>
-            <a:pPr indent="0" marL="0">
+            <a:pPr marL="0" indent="0">
               <a:lnSpc>
                 <a:spcPts val="1200"/>
               </a:lnSpc>
@@ -3929,7 +3602,7 @@
           <a:bodyPr wrap="square" rtlCol="0" anchor="ctr"/>
           <a:lstStyle/>
           <a:p>
-            <a:pPr indent="0" marL="0">
+            <a:pPr marL="0" indent="0">
               <a:buNone/>
             </a:pPr>
             <a:r>
@@ -3968,7 +3641,7 @@
           <a:bodyPr wrap="square" rtlCol="0" anchor="ctr"/>
           <a:lstStyle/>
           <a:p>
-            <a:pPr indent="0" marL="0">
+            <a:pPr marL="0" indent="0">
               <a:lnSpc>
                 <a:spcPts val="1200"/>
               </a:lnSpc>
@@ -4032,7 +3705,7 @@
           <a:bodyPr wrap="square" rtlCol="0" anchor="ctr"/>
           <a:lstStyle/>
           <a:p>
-            <a:pPr indent="0" marL="0">
+            <a:pPr marL="0" indent="0">
               <a:buNone/>
             </a:pPr>
             <a:r>
@@ -4071,7 +3744,7 @@
           <a:bodyPr wrap="square" rtlCol="0" anchor="ctr"/>
           <a:lstStyle/>
           <a:p>
-            <a:pPr indent="0" marL="0">
+            <a:pPr marL="0" indent="0">
               <a:lnSpc>
                 <a:spcPts val="1200"/>
               </a:lnSpc>
@@ -4136,14 +3809,14 @@
       </p:sp>
       <p:pic>
         <p:nvPicPr>
-          <p:cNvPr id="34" name="Image 0" descr="/home/claude/churn_ppt/icons/warning.png">    </p:cNvPr>
+          <p:cNvPr id="34" name="Image 0" descr="/home/claude/churn_ppt/icons/warning.png"/>
           <p:cNvPicPr>
             <a:picLocks noChangeAspect="1"/>
           </p:cNvPicPr>
           <p:nvPr/>
         </p:nvPicPr>
         <p:blipFill>
-          <a:blip r:embed="rId1"/>
+          <a:blip r:embed="rId3"/>
           <a:stretch>
             <a:fillRect/>
           </a:stretch>
@@ -4179,7 +3852,7 @@
           <a:bodyPr wrap="square" rtlCol="0" anchor="ctr"/>
           <a:lstStyle/>
           <a:p>
-            <a:pPr indent="0" marL="0">
+            <a:pPr marL="0" indent="0">
               <a:buNone/>
             </a:pPr>
             <a:r>
@@ -4218,7 +3891,7 @@
           <a:bodyPr wrap="square" rtlCol="0" anchor="ctr"/>
           <a:lstStyle/>
           <a:p>
-            <a:pPr indent="0" marL="0">
+            <a:pPr marL="0" indent="0">
               <a:lnSpc>
                 <a:spcPts val="1800"/>
               </a:lnSpc>
@@ -4233,7 +3906,51 @@
                 <a:ea typeface="Calibri" pitchFamily="34" charset="-122"/>
                 <a:cs typeface="Calibri" pitchFamily="34" charset="-120"/>
               </a:rPr>
-              <a:t>Dari 59 pelanggan yang benar-benar churn, model hanya berhasil mengidentifikasi 15 pelanggan — 44 pelanggan churn tidak terdeteksi. ROC-AUC 0,581 menunjukkan kemampuan membedakan churn vs non-churn masih terbatas, hanya sedikit lebih baik dari tebakan acak (0,50).</a:t>
+              <a:t>Dari 59 pelanggan yang benar-benar churn, model hanya berhasil mengidentifikasi 15 </a:t>
+            </a:r>
+            <a:r>
+              <a:rPr lang="en-US" sz="1200" dirty="0" err="1">
+                <a:solidFill>
+                  <a:srgbClr val="C7D8E6"/>
+                </a:solidFill>
+                <a:latin typeface="Calibri" pitchFamily="34" charset="0"/>
+                <a:ea typeface="Calibri" pitchFamily="34" charset="-122"/>
+                <a:cs typeface="Calibri" pitchFamily="34" charset="-120"/>
+              </a:rPr>
+              <a:t>pelanggan</a:t>
+            </a:r>
+            <a:r>
+              <a:rPr lang="en-US" sz="1200" dirty="0">
+                <a:solidFill>
+                  <a:srgbClr val="C7D8E6"/>
+                </a:solidFill>
+                <a:latin typeface="Calibri" pitchFamily="34" charset="0"/>
+                <a:ea typeface="Calibri" pitchFamily="34" charset="-122"/>
+                <a:cs typeface="Calibri" pitchFamily="34" charset="-120"/>
+              </a:rPr>
+              <a:t>, </a:t>
+            </a:r>
+            <a:r>
+              <a:rPr lang="en-US" sz="1200" dirty="0" err="1">
+                <a:solidFill>
+                  <a:srgbClr val="C7D8E6"/>
+                </a:solidFill>
+                <a:latin typeface="Calibri" pitchFamily="34" charset="0"/>
+                <a:ea typeface="Calibri" pitchFamily="34" charset="-122"/>
+                <a:cs typeface="Calibri" pitchFamily="34" charset="-120"/>
+              </a:rPr>
+              <a:t>sementara</a:t>
+            </a:r>
+            <a:r>
+              <a:rPr lang="en-US" sz="1200" dirty="0">
+                <a:solidFill>
+                  <a:srgbClr val="C7D8E6"/>
+                </a:solidFill>
+                <a:latin typeface="Calibri" pitchFamily="34" charset="0"/>
+                <a:ea typeface="Calibri" pitchFamily="34" charset="-122"/>
+                <a:cs typeface="Calibri" pitchFamily="34" charset="-120"/>
+              </a:rPr>
+              <a:t> 44 pelanggan churn tidak terdeteksi. ROC-AUC 0,581 menunjukkan kemampuan membedakan churn vs non-churn masih terbatas, hanya sedikit lebih baik dari tebakan acak (0,50).</a:t>
             </a:r>
             <a:endParaRPr lang="en-US" sz="1200" dirty="0"/>
           </a:p>
@@ -4260,7 +3977,7 @@
           <a:bodyPr wrap="square" rtlCol="0" anchor="ctr"/>
           <a:lstStyle/>
           <a:p>
-            <a:pPr algn="l" indent="0" marL="0">
+            <a:pPr marL="0" indent="0" algn="l">
               <a:buNone/>
             </a:pPr>
             <a:r>
@@ -4299,7 +4016,7 @@
           <a:bodyPr wrap="square" rtlCol="0" anchor="ctr"/>
           <a:lstStyle/>
           <a:p>
-            <a:pPr algn="r" indent="0" marL="0">
+            <a:pPr marL="0" indent="0" algn="r">
               <a:buNone/>
             </a:pPr>
             <a:r>
@@ -4333,6 +4050,7 @@
         <a:solidFill>
           <a:srgbClr val="FFFFFF"/>
         </a:solidFill>
+        <a:effectLst/>
       </p:bgPr>
     </p:bg>
     <p:spTree>
@@ -4370,7 +4088,7 @@
           <a:bodyPr wrap="square" rtlCol="0" anchor="ctr"/>
           <a:lstStyle/>
           <a:p>
-            <a:pPr indent="0" marL="0">
+            <a:pPr marL="0" indent="0">
               <a:buNone/>
             </a:pPr>
             <a:r>
@@ -4409,7 +4127,7 @@
           <a:bodyPr wrap="square" rtlCol="0" anchor="ctr"/>
           <a:lstStyle/>
           <a:p>
-            <a:pPr indent="0" marL="0">
+            <a:pPr marL="0" indent="0">
               <a:buNone/>
             </a:pPr>
             <a:r>
@@ -4429,7 +4147,7 @@
       </p:sp>
       <p:graphicFrame>
         <p:nvGraphicFramePr>
-          <p:cNvPr id="4" name="Chart 0" descr=""/>
+          <p:cNvPr id="4" name="Chart 0"/>
           <p:cNvGraphicFramePr/>
           <p:nvPr/>
         </p:nvGraphicFramePr>
@@ -4437,9 +4155,9 @@
           <a:off x="548640" y="1554480"/>
           <a:ext cx="6400800" cy="4114800"/>
         </p:xfrm>
-        <a:graphic xmlns:a="http://schemas.openxmlformats.org/drawingml/2006/main">
+        <a:graphic>
           <a:graphicData uri="http://schemas.openxmlformats.org/drawingml/2006/chart">
-            <c:chart xmlns:c="http://schemas.openxmlformats.org/drawingml/2006/chart" r:id="rId1"/>
+            <c:chart xmlns:c="http://schemas.openxmlformats.org/drawingml/2006/chart" xmlns:r="http://schemas.openxmlformats.org/officeDocument/2006/relationships" r:id="rId3"/>
           </a:graphicData>
         </a:graphic>
       </p:graphicFrame>
@@ -4465,257 +4183,7 @@
       </p:sp>
       <p:pic>
         <p:nvPicPr>
-          <p:cNvPr id="6" name="Image 0" descr="/home/claude/churn_ppt/icons/contract.png">    </p:cNvPr>
-          <p:cNvPicPr>
-            <a:picLocks noChangeAspect="1"/>
-          </p:cNvPicPr>
-          <p:nvPr/>
-        </p:nvPicPr>
-        <p:blipFill>
-          <a:blip r:embed="rId2"/>
-          <a:stretch>
-            <a:fillRect/>
-          </a:stretch>
-        </p:blipFill>
-        <p:spPr>
-          <a:xfrm>
-            <a:off x="7418070" y="1657350"/>
-            <a:ext cx="251460" cy="251460"/>
-          </a:xfrm>
-          <a:prstGeom prst="rect">
-            <a:avLst/>
-          </a:prstGeom>
-        </p:spPr>
-      </p:pic>
-      <p:sp>
-        <p:nvSpPr>
-          <p:cNvPr id="7" name="Text 3"/>
-          <p:cNvSpPr/>
-          <p:nvPr/>
-        </p:nvSpPr>
-        <p:spPr>
-          <a:xfrm>
-            <a:off x="7909560" y="1536192"/>
-            <a:ext cx="3566160" cy="320040"/>
-          </a:xfrm>
-          <a:prstGeom prst="rect">
-            <a:avLst/>
-          </a:prstGeom>
-          <a:noFill/>
-          <a:ln/>
-        </p:spPr>
-        <p:txBody>
-          <a:bodyPr wrap="square" rtlCol="0" anchor="ctr"/>
-          <a:lstStyle/>
-          <a:p>
-            <a:pPr indent="0" marL="0">
-              <a:buNone/>
-            </a:pPr>
-            <a:r>
-              <a:rPr lang="en-US" sz="1250" b="1" dirty="0">
-                <a:solidFill>
-                  <a:srgbClr val="12314F"/>
-                </a:solidFill>
-                <a:latin typeface="Calibri" pitchFamily="34" charset="0"/>
-                <a:ea typeface="Calibri" pitchFamily="34" charset="-122"/>
-                <a:cs typeface="Calibri" pitchFamily="34" charset="-120"/>
-              </a:rPr>
-              <a:t>contract_type</a:t>
-            </a:r>
-            <a:endParaRPr lang="en-US" sz="1250" dirty="0"/>
-          </a:p>
-        </p:txBody>
-      </p:sp>
-      <p:sp>
-        <p:nvSpPr>
-          <p:cNvPr id="8" name="Text 4"/>
-          <p:cNvSpPr/>
-          <p:nvPr/>
-        </p:nvSpPr>
-        <p:spPr>
-          <a:xfrm>
-            <a:off x="7909560" y="1874520"/>
-            <a:ext cx="3566160" cy="777240"/>
-          </a:xfrm>
-          <a:prstGeom prst="rect">
-            <a:avLst/>
-          </a:prstGeom>
-          <a:noFill/>
-          <a:ln/>
-        </p:spPr>
-        <p:txBody>
-          <a:bodyPr wrap="square" rtlCol="0" anchor="ctr"/>
-          <a:lstStyle/>
-          <a:p>
-            <a:pPr indent="0" marL="0">
-              <a:lnSpc>
-                <a:spcPts val="1400"/>
-              </a:lnSpc>
-              <a:buNone/>
-            </a:pPr>
-            <a:r>
-              <a:rPr lang="en-US" sz="1050" dirty="0">
-                <a:solidFill>
-                  <a:srgbClr val="1B2B3A"/>
-                </a:solidFill>
-                <a:latin typeface="Calibri" pitchFamily="34" charset="0"/>
-                <a:ea typeface="Calibri" pitchFamily="34" charset="-122"/>
-                <a:cs typeface="Calibri" pitchFamily="34" charset="-120"/>
-              </a:rPr>
-              <a:t>Faktor paling berpengaruh — jenis kontrak menentukan komitmen pelanggan.</a:t>
-            </a:r>
-            <a:endParaRPr lang="en-US" sz="1050" dirty="0"/>
-          </a:p>
-        </p:txBody>
-      </p:sp>
-      <p:sp>
-        <p:nvSpPr>
-          <p:cNvPr id="9" name="Shape 5"/>
-          <p:cNvSpPr/>
-          <p:nvPr/>
-        </p:nvSpPr>
-        <p:spPr>
-          <a:xfrm>
-            <a:off x="7315200" y="2926080"/>
-            <a:ext cx="457200" cy="457200"/>
-          </a:xfrm>
-          <a:prstGeom prst="ellipse">
-            <a:avLst/>
-          </a:prstGeom>
-          <a:solidFill>
-            <a:srgbClr val="E1562B"/>
-          </a:solidFill>
-          <a:ln/>
-        </p:spPr>
-      </p:sp>
-      <p:pic>
-        <p:nvPicPr>
-          <p:cNvPr id="10" name="Image 1" descr="/home/claude/churn_ppt/icons/headset.png">    </p:cNvPr>
-          <p:cNvPicPr>
-            <a:picLocks noChangeAspect="1"/>
-          </p:cNvPicPr>
-          <p:nvPr/>
-        </p:nvPicPr>
-        <p:blipFill>
-          <a:blip r:embed="rId3"/>
-          <a:stretch>
-            <a:fillRect/>
-          </a:stretch>
-        </p:blipFill>
-        <p:spPr>
-          <a:xfrm>
-            <a:off x="7418070" y="3028950"/>
-            <a:ext cx="251460" cy="251460"/>
-          </a:xfrm>
-          <a:prstGeom prst="rect">
-            <a:avLst/>
-          </a:prstGeom>
-        </p:spPr>
-      </p:pic>
-      <p:sp>
-        <p:nvSpPr>
-          <p:cNvPr id="11" name="Text 6"/>
-          <p:cNvSpPr/>
-          <p:nvPr/>
-        </p:nvSpPr>
-        <p:spPr>
-          <a:xfrm>
-            <a:off x="7909560" y="2907792"/>
-            <a:ext cx="3566160" cy="320040"/>
-          </a:xfrm>
-          <a:prstGeom prst="rect">
-            <a:avLst/>
-          </a:prstGeom>
-          <a:noFill/>
-          <a:ln/>
-        </p:spPr>
-        <p:txBody>
-          <a:bodyPr wrap="square" rtlCol="0" anchor="ctr"/>
-          <a:lstStyle/>
-          <a:p>
-            <a:pPr indent="0" marL="0">
-              <a:buNone/>
-            </a:pPr>
-            <a:r>
-              <a:rPr lang="en-US" sz="1250" b="1" dirty="0">
-                <a:solidFill>
-                  <a:srgbClr val="12314F"/>
-                </a:solidFill>
-                <a:latin typeface="Calibri" pitchFamily="34" charset="0"/>
-                <a:ea typeface="Calibri" pitchFamily="34" charset="-122"/>
-                <a:cs typeface="Calibri" pitchFamily="34" charset="-120"/>
-              </a:rPr>
-              <a:t>support_calls</a:t>
-            </a:r>
-            <a:endParaRPr lang="en-US" sz="1250" dirty="0"/>
-          </a:p>
-        </p:txBody>
-      </p:sp>
-      <p:sp>
-        <p:nvSpPr>
-          <p:cNvPr id="12" name="Text 7"/>
-          <p:cNvSpPr/>
-          <p:nvPr/>
-        </p:nvSpPr>
-        <p:spPr>
-          <a:xfrm>
-            <a:off x="7909560" y="3246120"/>
-            <a:ext cx="3566160" cy="777240"/>
-          </a:xfrm>
-          <a:prstGeom prst="rect">
-            <a:avLst/>
-          </a:prstGeom>
-          <a:noFill/>
-          <a:ln/>
-        </p:spPr>
-        <p:txBody>
-          <a:bodyPr wrap="square" rtlCol="0" anchor="ctr"/>
-          <a:lstStyle/>
-          <a:p>
-            <a:pPr indent="0" marL="0">
-              <a:lnSpc>
-                <a:spcPts val="1400"/>
-              </a:lnSpc>
-              <a:buNone/>
-            </a:pPr>
-            <a:r>
-              <a:rPr lang="en-US" sz="1050" dirty="0">
-                <a:solidFill>
-                  <a:srgbClr val="1B2B3A"/>
-                </a:solidFill>
-                <a:latin typeface="Calibri" pitchFamily="34" charset="0"/>
-                <a:ea typeface="Calibri" pitchFamily="34" charset="-122"/>
-                <a:cs typeface="Calibri" pitchFamily="34" charset="-120"/>
-              </a:rPr>
-              <a:t>Semakin sering menghubungi CS, semakin besar pengaruhnya terhadap churn.</a:t>
-            </a:r>
-            <a:endParaRPr lang="en-US" sz="1050" dirty="0"/>
-          </a:p>
-        </p:txBody>
-      </p:sp>
-      <p:sp>
-        <p:nvSpPr>
-          <p:cNvPr id="13" name="Shape 8"/>
-          <p:cNvSpPr/>
-          <p:nvPr/>
-        </p:nvSpPr>
-        <p:spPr>
-          <a:xfrm>
-            <a:off x="7315200" y="4297680"/>
-            <a:ext cx="457200" cy="457200"/>
-          </a:xfrm>
-          <a:prstGeom prst="ellipse">
-            <a:avLst/>
-          </a:prstGeom>
-          <a:solidFill>
-            <a:srgbClr val="E1562B"/>
-          </a:solidFill>
-          <a:ln/>
-        </p:spPr>
-      </p:sp>
-      <p:pic>
-        <p:nvPicPr>
-          <p:cNvPr id="14" name="Image 2" descr="/home/claude/churn_ppt/icons/clock.png">    </p:cNvPr>
+          <p:cNvPr id="6" name="Image 0" descr="/home/claude/churn_ppt/icons/contract.png"/>
           <p:cNvPicPr>
             <a:picLocks noChangeAspect="1"/>
           </p:cNvPicPr>
@@ -4729,7 +4197,7 @@
         </p:blipFill>
         <p:spPr>
           <a:xfrm>
-            <a:off x="7418070" y="4400550"/>
+            <a:off x="7418070" y="1657350"/>
             <a:ext cx="251460" cy="251460"/>
           </a:xfrm>
           <a:prstGeom prst="rect">
@@ -4739,13 +4207,13 @@
       </p:pic>
       <p:sp>
         <p:nvSpPr>
-          <p:cNvPr id="15" name="Text 9"/>
-          <p:cNvSpPr/>
-          <p:nvPr/>
-        </p:nvSpPr>
-        <p:spPr>
-          <a:xfrm>
-            <a:off x="7909560" y="4279392"/>
+          <p:cNvPr id="7" name="Text 3"/>
+          <p:cNvSpPr/>
+          <p:nvPr/>
+        </p:nvSpPr>
+        <p:spPr>
+          <a:xfrm>
+            <a:off x="7909560" y="1536192"/>
             <a:ext cx="3566160" cy="320040"/>
           </a:xfrm>
           <a:prstGeom prst="rect">
@@ -4758,7 +4226,7 @@
           <a:bodyPr wrap="square" rtlCol="0" anchor="ctr"/>
           <a:lstStyle/>
           <a:p>
-            <a:pPr indent="0" marL="0">
+            <a:pPr marL="0" indent="0">
               <a:buNone/>
             </a:pPr>
             <a:r>
@@ -4770,7 +4238,7 @@
                 <a:ea typeface="Calibri" pitchFamily="34" charset="-122"/>
                 <a:cs typeface="Calibri" pitchFamily="34" charset="-120"/>
               </a:rPr>
-              <a:t>tenure_months</a:t>
+              <a:t>contract_type</a:t>
             </a:r>
             <a:endParaRPr lang="en-US" sz="1250" dirty="0"/>
           </a:p>
@@ -4778,13 +4246,13 @@
       </p:sp>
       <p:sp>
         <p:nvSpPr>
-          <p:cNvPr id="16" name="Text 10"/>
-          <p:cNvSpPr/>
-          <p:nvPr/>
-        </p:nvSpPr>
-        <p:spPr>
-          <a:xfrm>
-            <a:off x="7909560" y="4617720"/>
+          <p:cNvPr id="8" name="Text 4"/>
+          <p:cNvSpPr/>
+          <p:nvPr/>
+        </p:nvSpPr>
+        <p:spPr>
+          <a:xfrm>
+            <a:off x="7909560" y="1874520"/>
             <a:ext cx="3566160" cy="777240"/>
           </a:xfrm>
           <a:prstGeom prst="rect">
@@ -4797,7 +4265,7 @@
           <a:bodyPr wrap="square" rtlCol="0" anchor="ctr"/>
           <a:lstStyle/>
           <a:p>
-            <a:pPr indent="0" marL="0">
+            <a:pPr marL="0" indent="0">
               <a:lnSpc>
                 <a:spcPts val="1400"/>
               </a:lnSpc>
@@ -4812,6 +4280,278 @@
                 <a:ea typeface="Calibri" pitchFamily="34" charset="-122"/>
                 <a:cs typeface="Calibri" pitchFamily="34" charset="-120"/>
               </a:rPr>
+              <a:t>Faktor paling </a:t>
+            </a:r>
+            <a:r>
+              <a:rPr lang="en-US" sz="1050" dirty="0" err="1">
+                <a:solidFill>
+                  <a:srgbClr val="1B2B3A"/>
+                </a:solidFill>
+                <a:latin typeface="Calibri" pitchFamily="34" charset="0"/>
+                <a:ea typeface="Calibri" pitchFamily="34" charset="-122"/>
+                <a:cs typeface="Calibri" pitchFamily="34" charset="-120"/>
+              </a:rPr>
+              <a:t>berpengaruh</a:t>
+            </a:r>
+            <a:r>
+              <a:rPr lang="en-US" sz="1050" dirty="0">
+                <a:solidFill>
+                  <a:srgbClr val="1B2B3A"/>
+                </a:solidFill>
+                <a:latin typeface="Calibri" pitchFamily="34" charset="0"/>
+                <a:ea typeface="Calibri" pitchFamily="34" charset="-122"/>
+                <a:cs typeface="Calibri" pitchFamily="34" charset="-120"/>
+              </a:rPr>
+              <a:t>, jenis kontrak menentukan komitmen pelanggan.</a:t>
+            </a:r>
+            <a:endParaRPr lang="en-US" sz="1050" dirty="0"/>
+          </a:p>
+        </p:txBody>
+      </p:sp>
+      <p:sp>
+        <p:nvSpPr>
+          <p:cNvPr id="9" name="Shape 5"/>
+          <p:cNvSpPr/>
+          <p:nvPr/>
+        </p:nvSpPr>
+        <p:spPr>
+          <a:xfrm>
+            <a:off x="7315200" y="2926080"/>
+            <a:ext cx="457200" cy="457200"/>
+          </a:xfrm>
+          <a:prstGeom prst="ellipse">
+            <a:avLst/>
+          </a:prstGeom>
+          <a:solidFill>
+            <a:srgbClr val="E1562B"/>
+          </a:solidFill>
+          <a:ln/>
+        </p:spPr>
+      </p:sp>
+      <p:pic>
+        <p:nvPicPr>
+          <p:cNvPr id="10" name="Image 1" descr="/home/claude/churn_ppt/icons/headset.png"/>
+          <p:cNvPicPr>
+            <a:picLocks noChangeAspect="1"/>
+          </p:cNvPicPr>
+          <p:nvPr/>
+        </p:nvPicPr>
+        <p:blipFill>
+          <a:blip r:embed="rId5"/>
+          <a:stretch>
+            <a:fillRect/>
+          </a:stretch>
+        </p:blipFill>
+        <p:spPr>
+          <a:xfrm>
+            <a:off x="7418070" y="3028950"/>
+            <a:ext cx="251460" cy="251460"/>
+          </a:xfrm>
+          <a:prstGeom prst="rect">
+            <a:avLst/>
+          </a:prstGeom>
+        </p:spPr>
+      </p:pic>
+      <p:sp>
+        <p:nvSpPr>
+          <p:cNvPr id="11" name="Text 6"/>
+          <p:cNvSpPr/>
+          <p:nvPr/>
+        </p:nvSpPr>
+        <p:spPr>
+          <a:xfrm>
+            <a:off x="7909560" y="2907792"/>
+            <a:ext cx="3566160" cy="320040"/>
+          </a:xfrm>
+          <a:prstGeom prst="rect">
+            <a:avLst/>
+          </a:prstGeom>
+          <a:noFill/>
+          <a:ln/>
+        </p:spPr>
+        <p:txBody>
+          <a:bodyPr wrap="square" rtlCol="0" anchor="ctr"/>
+          <a:lstStyle/>
+          <a:p>
+            <a:pPr marL="0" indent="0">
+              <a:buNone/>
+            </a:pPr>
+            <a:r>
+              <a:rPr lang="en-US" sz="1250" b="1" dirty="0">
+                <a:solidFill>
+                  <a:srgbClr val="12314F"/>
+                </a:solidFill>
+                <a:latin typeface="Calibri" pitchFamily="34" charset="0"/>
+                <a:ea typeface="Calibri" pitchFamily="34" charset="-122"/>
+                <a:cs typeface="Calibri" pitchFamily="34" charset="-120"/>
+              </a:rPr>
+              <a:t>support_calls</a:t>
+            </a:r>
+            <a:endParaRPr lang="en-US" sz="1250" dirty="0"/>
+          </a:p>
+        </p:txBody>
+      </p:sp>
+      <p:sp>
+        <p:nvSpPr>
+          <p:cNvPr id="12" name="Text 7"/>
+          <p:cNvSpPr/>
+          <p:nvPr/>
+        </p:nvSpPr>
+        <p:spPr>
+          <a:xfrm>
+            <a:off x="7909560" y="3246120"/>
+            <a:ext cx="3566160" cy="777240"/>
+          </a:xfrm>
+          <a:prstGeom prst="rect">
+            <a:avLst/>
+          </a:prstGeom>
+          <a:noFill/>
+          <a:ln/>
+        </p:spPr>
+        <p:txBody>
+          <a:bodyPr wrap="square" rtlCol="0" anchor="ctr"/>
+          <a:lstStyle/>
+          <a:p>
+            <a:pPr marL="0" indent="0">
+              <a:lnSpc>
+                <a:spcPts val="1400"/>
+              </a:lnSpc>
+              <a:buNone/>
+            </a:pPr>
+            <a:r>
+              <a:rPr lang="en-US" sz="1050" dirty="0">
+                <a:solidFill>
+                  <a:srgbClr val="1B2B3A"/>
+                </a:solidFill>
+                <a:latin typeface="Calibri" pitchFamily="34" charset="0"/>
+                <a:ea typeface="Calibri" pitchFamily="34" charset="-122"/>
+                <a:cs typeface="Calibri" pitchFamily="34" charset="-120"/>
+              </a:rPr>
+              <a:t>Semakin sering menghubungi CS, semakin besar pengaruhnya terhadap churn.</a:t>
+            </a:r>
+            <a:endParaRPr lang="en-US" sz="1050" dirty="0"/>
+          </a:p>
+        </p:txBody>
+      </p:sp>
+      <p:sp>
+        <p:nvSpPr>
+          <p:cNvPr id="13" name="Shape 8"/>
+          <p:cNvSpPr/>
+          <p:nvPr/>
+        </p:nvSpPr>
+        <p:spPr>
+          <a:xfrm>
+            <a:off x="7315200" y="4297680"/>
+            <a:ext cx="457200" cy="457200"/>
+          </a:xfrm>
+          <a:prstGeom prst="ellipse">
+            <a:avLst/>
+          </a:prstGeom>
+          <a:solidFill>
+            <a:srgbClr val="E1562B"/>
+          </a:solidFill>
+          <a:ln/>
+        </p:spPr>
+      </p:sp>
+      <p:pic>
+        <p:nvPicPr>
+          <p:cNvPr id="14" name="Image 2" descr="/home/claude/churn_ppt/icons/clock.png"/>
+          <p:cNvPicPr>
+            <a:picLocks noChangeAspect="1"/>
+          </p:cNvPicPr>
+          <p:nvPr/>
+        </p:nvPicPr>
+        <p:blipFill>
+          <a:blip r:embed="rId6"/>
+          <a:stretch>
+            <a:fillRect/>
+          </a:stretch>
+        </p:blipFill>
+        <p:spPr>
+          <a:xfrm>
+            <a:off x="7418070" y="4400550"/>
+            <a:ext cx="251460" cy="251460"/>
+          </a:xfrm>
+          <a:prstGeom prst="rect">
+            <a:avLst/>
+          </a:prstGeom>
+        </p:spPr>
+      </p:pic>
+      <p:sp>
+        <p:nvSpPr>
+          <p:cNvPr id="15" name="Text 9"/>
+          <p:cNvSpPr/>
+          <p:nvPr/>
+        </p:nvSpPr>
+        <p:spPr>
+          <a:xfrm>
+            <a:off x="7909560" y="4279392"/>
+            <a:ext cx="3566160" cy="320040"/>
+          </a:xfrm>
+          <a:prstGeom prst="rect">
+            <a:avLst/>
+          </a:prstGeom>
+          <a:noFill/>
+          <a:ln/>
+        </p:spPr>
+        <p:txBody>
+          <a:bodyPr wrap="square" rtlCol="0" anchor="ctr"/>
+          <a:lstStyle/>
+          <a:p>
+            <a:pPr marL="0" indent="0">
+              <a:buNone/>
+            </a:pPr>
+            <a:r>
+              <a:rPr lang="en-US" sz="1250" b="1" dirty="0">
+                <a:solidFill>
+                  <a:srgbClr val="12314F"/>
+                </a:solidFill>
+                <a:latin typeface="Calibri" pitchFamily="34" charset="0"/>
+                <a:ea typeface="Calibri" pitchFamily="34" charset="-122"/>
+                <a:cs typeface="Calibri" pitchFamily="34" charset="-120"/>
+              </a:rPr>
+              <a:t>tenure_months</a:t>
+            </a:r>
+            <a:endParaRPr lang="en-US" sz="1250" dirty="0"/>
+          </a:p>
+        </p:txBody>
+      </p:sp>
+      <p:sp>
+        <p:nvSpPr>
+          <p:cNvPr id="16" name="Text 10"/>
+          <p:cNvSpPr/>
+          <p:nvPr/>
+        </p:nvSpPr>
+        <p:spPr>
+          <a:xfrm>
+            <a:off x="7909560" y="4617720"/>
+            <a:ext cx="3566160" cy="777240"/>
+          </a:xfrm>
+          <a:prstGeom prst="rect">
+            <a:avLst/>
+          </a:prstGeom>
+          <a:noFill/>
+          <a:ln/>
+        </p:spPr>
+        <p:txBody>
+          <a:bodyPr wrap="square" rtlCol="0" anchor="ctr"/>
+          <a:lstStyle/>
+          <a:p>
+            <a:pPr marL="0" indent="0">
+              <a:lnSpc>
+                <a:spcPts val="1400"/>
+              </a:lnSpc>
+              <a:buNone/>
+            </a:pPr>
+            <a:r>
+              <a:rPr lang="en-US" sz="1050" dirty="0">
+                <a:solidFill>
+                  <a:srgbClr val="1B2B3A"/>
+                </a:solidFill>
+                <a:latin typeface="Calibri" pitchFamily="34" charset="0"/>
+                <a:ea typeface="Calibri" pitchFamily="34" charset="-122"/>
+                <a:cs typeface="Calibri" pitchFamily="34" charset="-120"/>
+              </a:rPr>
               <a:t>Pelanggan baru (tenure pendek) berisiko churn lebih tinggi.</a:t>
             </a:r>
             <a:endParaRPr lang="en-US" sz="1050" dirty="0"/>
@@ -4839,7 +4579,7 @@
           <a:bodyPr wrap="square" rtlCol="0" anchor="ctr"/>
           <a:lstStyle/>
           <a:p>
-            <a:pPr algn="l" indent="0" marL="0">
+            <a:pPr marL="0" indent="0" algn="l">
               <a:buNone/>
             </a:pPr>
             <a:r>
@@ -4878,7 +4618,7 @@
           <a:bodyPr wrap="square" rtlCol="0" anchor="ctr"/>
           <a:lstStyle/>
           <a:p>
-            <a:pPr algn="r" indent="0" marL="0">
+            <a:pPr marL="0" indent="0" algn="r">
               <a:buNone/>
             </a:pPr>
             <a:r>
@@ -4912,6 +4652,7 @@
         <a:solidFill>
           <a:srgbClr val="12314F"/>
         </a:solidFill>
+        <a:effectLst/>
       </p:bgPr>
     </p:bg>
     <p:spTree>
@@ -4949,7 +4690,7 @@
           <a:bodyPr wrap="square" rtlCol="0" anchor="ctr"/>
           <a:lstStyle/>
           <a:p>
-            <a:pPr indent="0" marL="0">
+            <a:pPr marL="0" indent="0">
               <a:buNone/>
             </a:pPr>
             <a:r>
@@ -5011,307 +4752,7 @@
       </p:sp>
       <p:pic>
         <p:nvPicPr>
-          <p:cNvPr id="5" name="Image 0" descr="/home/claude/churn_ppt/icons/contract.png">    </p:cNvPr>
-          <p:cNvPicPr>
-            <a:picLocks noChangeAspect="1"/>
-          </p:cNvPicPr>
-          <p:nvPr/>
-        </p:nvPicPr>
-        <p:blipFill>
-          <a:blip r:embed="rId1"/>
-          <a:stretch>
-            <a:fillRect/>
-          </a:stretch>
-        </p:blipFill>
-        <p:spPr>
-          <a:xfrm>
-            <a:off x="936117" y="1621917"/>
-            <a:ext cx="276606" cy="276606"/>
-          </a:xfrm>
-          <a:prstGeom prst="rect">
-            <a:avLst/>
-          </a:prstGeom>
-        </p:spPr>
-      </p:pic>
-      <p:sp>
-        <p:nvSpPr>
-          <p:cNvPr id="6" name="Text 3"/>
-          <p:cNvSpPr/>
-          <p:nvPr/>
-        </p:nvSpPr>
-        <p:spPr>
-          <a:xfrm>
-            <a:off x="1691640" y="1307592"/>
-            <a:ext cx="3931920" cy="914400"/>
-          </a:xfrm>
-          <a:prstGeom prst="rect">
-            <a:avLst/>
-          </a:prstGeom>
-          <a:noFill/>
-          <a:ln/>
-        </p:spPr>
-        <p:txBody>
-          <a:bodyPr wrap="square" rtlCol="0" anchor="ctr"/>
-          <a:lstStyle/>
-          <a:p>
-            <a:pPr indent="0" marL="0">
-              <a:lnSpc>
-                <a:spcPts val="1600"/>
-              </a:lnSpc>
-              <a:buNone/>
-            </a:pPr>
-            <a:r>
-              <a:rPr lang="en-US" sz="1300" b="1" dirty="0">
-                <a:solidFill>
-                  <a:srgbClr val="FFFFFF"/>
-                </a:solidFill>
-                <a:latin typeface="Calibri" pitchFamily="34" charset="0"/>
-                <a:ea typeface="Calibri" pitchFamily="34" charset="-122"/>
-                <a:cs typeface="Calibri" pitchFamily="34" charset="-120"/>
-              </a:rPr>
-              <a:t>Kontrak Monthly = churn 32,4%</a:t>
-            </a:r>
-            <a:endParaRPr lang="en-US" sz="1300" dirty="0"/>
-          </a:p>
-        </p:txBody>
-      </p:sp>
-      <p:sp>
-        <p:nvSpPr>
-          <p:cNvPr id="7" name="Text 4"/>
-          <p:cNvSpPr/>
-          <p:nvPr/>
-        </p:nvSpPr>
-        <p:spPr>
-          <a:xfrm>
-            <a:off x="5760720" y="1307592"/>
-            <a:ext cx="5669280" cy="914400"/>
-          </a:xfrm>
-          <a:prstGeom prst="rect">
-            <a:avLst/>
-          </a:prstGeom>
-          <a:noFill/>
-          <a:ln/>
-        </p:spPr>
-        <p:txBody>
-          <a:bodyPr wrap="square" rtlCol="0" anchor="ctr"/>
-          <a:lstStyle/>
-          <a:p>
-            <a:pPr indent="0" marL="0">
-              <a:lnSpc>
-                <a:spcPts val="1600"/>
-              </a:lnSpc>
-              <a:buNone/>
-            </a:pPr>
-            <a:r>
-              <a:rPr lang="en-US" sz="1200" dirty="0">
-                <a:solidFill>
-                  <a:srgbClr val="C7D8E6"/>
-                </a:solidFill>
-                <a:latin typeface="Calibri" pitchFamily="34" charset="0"/>
-                <a:ea typeface="Calibri" pitchFamily="34" charset="-122"/>
-                <a:cs typeface="Calibri" pitchFamily="34" charset="-120"/>
-              </a:rPr>
-              <a:t>Promo upgrade ke kontrak 6-bulan/Annual (diskon atau bonus 1 bulan).</a:t>
-            </a:r>
-            <a:endParaRPr lang="en-US" sz="1200" dirty="0"/>
-          </a:p>
-        </p:txBody>
-      </p:sp>
-      <p:sp>
-        <p:nvSpPr>
-          <p:cNvPr id="8" name="Shape 5"/>
-          <p:cNvSpPr/>
-          <p:nvPr/>
-        </p:nvSpPr>
-        <p:spPr>
-          <a:xfrm>
-            <a:off x="548640" y="2514600"/>
-            <a:ext cx="11064240" cy="1170432"/>
-          </a:xfrm>
-          <a:prstGeom prst="roundRect">
-            <a:avLst>
-              <a:gd name="adj" fmla="val 6250"/>
-            </a:avLst>
-          </a:prstGeom>
-          <a:solidFill>
-            <a:srgbClr val="1A3E60"/>
-          </a:solidFill>
-          <a:ln/>
-        </p:spPr>
-      </p:sp>
-      <p:sp>
-        <p:nvSpPr>
-          <p:cNvPr id="9" name="Shape 6"/>
-          <p:cNvSpPr/>
-          <p:nvPr/>
-        </p:nvSpPr>
-        <p:spPr>
-          <a:xfrm>
-            <a:off x="822960" y="2834640"/>
-            <a:ext cx="502920" cy="502920"/>
-          </a:xfrm>
-          <a:prstGeom prst="ellipse">
-            <a:avLst/>
-          </a:prstGeom>
-          <a:solidFill>
-            <a:srgbClr val="E1562B"/>
-          </a:solidFill>
-          <a:ln/>
-        </p:spPr>
-      </p:sp>
-      <p:pic>
-        <p:nvPicPr>
-          <p:cNvPr id="10" name="Image 1" descr="/home/claude/churn_ppt/icons/headset.png">    </p:cNvPr>
-          <p:cNvPicPr>
-            <a:picLocks noChangeAspect="1"/>
-          </p:cNvPicPr>
-          <p:nvPr/>
-        </p:nvPicPr>
-        <p:blipFill>
-          <a:blip r:embed="rId2"/>
-          <a:stretch>
-            <a:fillRect/>
-          </a:stretch>
-        </p:blipFill>
-        <p:spPr>
-          <a:xfrm>
-            <a:off x="936117" y="2947797"/>
-            <a:ext cx="276606" cy="276606"/>
-          </a:xfrm>
-          <a:prstGeom prst="rect">
-            <a:avLst/>
-          </a:prstGeom>
-        </p:spPr>
-      </p:pic>
-      <p:sp>
-        <p:nvSpPr>
-          <p:cNvPr id="11" name="Text 7"/>
-          <p:cNvSpPr/>
-          <p:nvPr/>
-        </p:nvSpPr>
-        <p:spPr>
-          <a:xfrm>
-            <a:off x="1691640" y="2633472"/>
-            <a:ext cx="3931920" cy="914400"/>
-          </a:xfrm>
-          <a:prstGeom prst="rect">
-            <a:avLst/>
-          </a:prstGeom>
-          <a:noFill/>
-          <a:ln/>
-        </p:spPr>
-        <p:txBody>
-          <a:bodyPr wrap="square" rtlCol="0" anchor="ctr"/>
-          <a:lstStyle/>
-          <a:p>
-            <a:pPr indent="0" marL="0">
-              <a:lnSpc>
-                <a:spcPts val="1600"/>
-              </a:lnSpc>
-              <a:buNone/>
-            </a:pPr>
-            <a:r>
-              <a:rPr lang="en-US" sz="1300" b="1" dirty="0">
-                <a:solidFill>
-                  <a:srgbClr val="FFFFFF"/>
-                </a:solidFill>
-                <a:latin typeface="Calibri" pitchFamily="34" charset="0"/>
-                <a:ea typeface="Calibri" pitchFamily="34" charset="-122"/>
-                <a:cs typeface="Calibri" pitchFamily="34" charset="-120"/>
-              </a:rPr>
-              <a:t>Support calls tinggi = sinyal churn</a:t>
-            </a:r>
-            <a:endParaRPr lang="en-US" sz="1300" dirty="0"/>
-          </a:p>
-        </p:txBody>
-      </p:sp>
-      <p:sp>
-        <p:nvSpPr>
-          <p:cNvPr id="12" name="Text 8"/>
-          <p:cNvSpPr/>
-          <p:nvPr/>
-        </p:nvSpPr>
-        <p:spPr>
-          <a:xfrm>
-            <a:off x="5760720" y="2633472"/>
-            <a:ext cx="5669280" cy="914400"/>
-          </a:xfrm>
-          <a:prstGeom prst="rect">
-            <a:avLst/>
-          </a:prstGeom>
-          <a:noFill/>
-          <a:ln/>
-        </p:spPr>
-        <p:txBody>
-          <a:bodyPr wrap="square" rtlCol="0" anchor="ctr"/>
-          <a:lstStyle/>
-          <a:p>
-            <a:pPr indent="0" marL="0">
-              <a:lnSpc>
-                <a:spcPts val="1600"/>
-              </a:lnSpc>
-              <a:buNone/>
-            </a:pPr>
-            <a:r>
-              <a:rPr lang="en-US" sz="1200" dirty="0">
-                <a:solidFill>
-                  <a:srgbClr val="C7D8E6"/>
-                </a:solidFill>
-                <a:latin typeface="Calibri" pitchFamily="34" charset="0"/>
-                <a:ea typeface="Calibri" pitchFamily="34" charset="-122"/>
-                <a:cs typeface="Calibri" pitchFamily="34" charset="-120"/>
-              </a:rPr>
-              <a:t>Prioritaskan priority support untuk pelanggan dengan keluhan tinggi.</a:t>
-            </a:r>
-            <a:endParaRPr lang="en-US" sz="1200" dirty="0"/>
-          </a:p>
-        </p:txBody>
-      </p:sp>
-      <p:sp>
-        <p:nvSpPr>
-          <p:cNvPr id="13" name="Shape 9"/>
-          <p:cNvSpPr/>
-          <p:nvPr/>
-        </p:nvSpPr>
-        <p:spPr>
-          <a:xfrm>
-            <a:off x="548640" y="3840480"/>
-            <a:ext cx="11064240" cy="1170432"/>
-          </a:xfrm>
-          <a:prstGeom prst="roundRect">
-            <a:avLst>
-              <a:gd name="adj" fmla="val 6250"/>
-            </a:avLst>
-          </a:prstGeom>
-          <a:solidFill>
-            <a:srgbClr val="1A3E60"/>
-          </a:solidFill>
-          <a:ln/>
-        </p:spPr>
-      </p:sp>
-      <p:sp>
-        <p:nvSpPr>
-          <p:cNvPr id="14" name="Shape 10"/>
-          <p:cNvSpPr/>
-          <p:nvPr/>
-        </p:nvSpPr>
-        <p:spPr>
-          <a:xfrm>
-            <a:off x="822960" y="4160520"/>
-            <a:ext cx="502920" cy="502920"/>
-          </a:xfrm>
-          <a:prstGeom prst="ellipse">
-            <a:avLst/>
-          </a:prstGeom>
-          <a:solidFill>
-            <a:srgbClr val="E1562B"/>
-          </a:solidFill>
-          <a:ln/>
-        </p:spPr>
-      </p:sp>
-      <p:pic>
-        <p:nvPicPr>
-          <p:cNvPr id="15" name="Image 2" descr="/home/claude/churn_ppt/icons/creditcard.png">    </p:cNvPr>
+          <p:cNvPr id="5" name="Image 0" descr="/home/claude/churn_ppt/icons/contract.png"/>
           <p:cNvPicPr>
             <a:picLocks noChangeAspect="1"/>
           </p:cNvPicPr>
@@ -5325,7 +4766,7 @@
         </p:blipFill>
         <p:spPr>
           <a:xfrm>
-            <a:off x="936117" y="4273677"/>
+            <a:off x="936117" y="1621917"/>
             <a:ext cx="276606" cy="276606"/>
           </a:xfrm>
           <a:prstGeom prst="rect">
@@ -5335,13 +4776,13 @@
       </p:pic>
       <p:sp>
         <p:nvSpPr>
-          <p:cNvPr id="16" name="Text 11"/>
-          <p:cNvSpPr/>
-          <p:nvPr/>
-        </p:nvSpPr>
-        <p:spPr>
-          <a:xfrm>
-            <a:off x="1691640" y="3959352"/>
+          <p:cNvPr id="6" name="Text 3"/>
+          <p:cNvSpPr/>
+          <p:nvPr/>
+        </p:nvSpPr>
+        <p:spPr>
+          <a:xfrm>
+            <a:off x="1691640" y="1307592"/>
             <a:ext cx="3931920" cy="914400"/>
           </a:xfrm>
           <a:prstGeom prst="rect">
@@ -5354,7 +4795,7 @@
           <a:bodyPr wrap="square" rtlCol="0" anchor="ctr"/>
           <a:lstStyle/>
           <a:p>
-            <a:pPr indent="0" marL="0">
+            <a:pPr marL="0" indent="0">
               <a:lnSpc>
                 <a:spcPts val="1600"/>
               </a:lnSpc>
@@ -5369,7 +4810,7 @@
                 <a:ea typeface="Calibri" pitchFamily="34" charset="-122"/>
                 <a:cs typeface="Calibri" pitchFamily="34" charset="-120"/>
               </a:rPr>
-              <a:t>Non-Autopay lebih rentan churn</a:t>
+              <a:t>Kontrak Monthly = churn 32,4%</a:t>
             </a:r>
             <a:endParaRPr lang="en-US" sz="1300" dirty="0"/>
           </a:p>
@@ -5377,13 +4818,13 @@
       </p:sp>
       <p:sp>
         <p:nvSpPr>
-          <p:cNvPr id="17" name="Text 12"/>
-          <p:cNvSpPr/>
-          <p:nvPr/>
-        </p:nvSpPr>
-        <p:spPr>
-          <a:xfrm>
-            <a:off x="5760720" y="3959352"/>
+          <p:cNvPr id="7" name="Text 4"/>
+          <p:cNvSpPr/>
+          <p:nvPr/>
+        </p:nvSpPr>
+        <p:spPr>
+          <a:xfrm>
+            <a:off x="5760720" y="1307592"/>
             <a:ext cx="5669280" cy="914400"/>
           </a:xfrm>
           <a:prstGeom prst="rect">
@@ -5396,7 +4837,7 @@
           <a:bodyPr wrap="square" rtlCol="0" anchor="ctr"/>
           <a:lstStyle/>
           <a:p>
-            <a:pPr indent="0" marL="0">
+            <a:pPr marL="0" indent="0">
               <a:lnSpc>
                 <a:spcPts val="1600"/>
               </a:lnSpc>
@@ -5411,7 +4852,7 @@
                 <a:ea typeface="Calibri" pitchFamily="34" charset="-122"/>
                 <a:cs typeface="Calibri" pitchFamily="34" charset="-120"/>
               </a:rPr>
-              <a:t>Dorong adopsi Autopay lewat cashback / diskon tagihan.</a:t>
+              <a:t>Promo upgrade ke kontrak 6-bulan/Annual (diskon atau bonus 1 bulan).</a:t>
             </a:r>
             <a:endParaRPr lang="en-US" sz="1200" dirty="0"/>
           </a:p>
@@ -5419,13 +4860,13 @@
       </p:sp>
       <p:sp>
         <p:nvSpPr>
-          <p:cNvPr id="18" name="Shape 13"/>
-          <p:cNvSpPr/>
-          <p:nvPr/>
-        </p:nvSpPr>
-        <p:spPr>
-          <a:xfrm>
-            <a:off x="548640" y="5166360"/>
+          <p:cNvPr id="8" name="Shape 5"/>
+          <p:cNvSpPr/>
+          <p:nvPr/>
+        </p:nvSpPr>
+        <p:spPr>
+          <a:xfrm>
+            <a:off x="548640" y="2514600"/>
             <a:ext cx="11064240" cy="1170432"/>
           </a:xfrm>
           <a:prstGeom prst="roundRect">
@@ -5441,13 +4882,13 @@
       </p:sp>
       <p:sp>
         <p:nvSpPr>
-          <p:cNvPr id="19" name="Shape 14"/>
-          <p:cNvSpPr/>
-          <p:nvPr/>
-        </p:nvSpPr>
-        <p:spPr>
-          <a:xfrm>
-            <a:off x="822960" y="5486400"/>
+          <p:cNvPr id="9" name="Shape 6"/>
+          <p:cNvSpPr/>
+          <p:nvPr/>
+        </p:nvSpPr>
+        <p:spPr>
+          <a:xfrm>
+            <a:off x="822960" y="2834640"/>
             <a:ext cx="502920" cy="502920"/>
           </a:xfrm>
           <a:prstGeom prst="ellipse">
@@ -5461,7 +4902,7 @@
       </p:sp>
       <p:pic>
         <p:nvPicPr>
-          <p:cNvPr id="20" name="Image 3" descr="/home/claude/churn_ppt/icons/clock.png">    </p:cNvPr>
+          <p:cNvPr id="10" name="Image 1" descr="/home/claude/churn_ppt/icons/headset.png"/>
           <p:cNvPicPr>
             <a:picLocks noChangeAspect="1"/>
           </p:cNvPicPr>
@@ -5475,7 +4916,7 @@
         </p:blipFill>
         <p:spPr>
           <a:xfrm>
-            <a:off x="936117" y="5599557"/>
+            <a:off x="936117" y="2947797"/>
             <a:ext cx="276606" cy="276606"/>
           </a:xfrm>
           <a:prstGeom prst="rect">
@@ -5485,13 +4926,13 @@
       </p:pic>
       <p:sp>
         <p:nvSpPr>
-          <p:cNvPr id="21" name="Text 15"/>
-          <p:cNvSpPr/>
-          <p:nvPr/>
-        </p:nvSpPr>
-        <p:spPr>
-          <a:xfrm>
-            <a:off x="1691640" y="5285232"/>
+          <p:cNvPr id="11" name="Text 7"/>
+          <p:cNvSpPr/>
+          <p:nvPr/>
+        </p:nvSpPr>
+        <p:spPr>
+          <a:xfrm>
+            <a:off x="1691640" y="2633472"/>
             <a:ext cx="3931920" cy="914400"/>
           </a:xfrm>
           <a:prstGeom prst="rect">
@@ -5504,7 +4945,7 @@
           <a:bodyPr wrap="square" rtlCol="0" anchor="ctr"/>
           <a:lstStyle/>
           <a:p>
-            <a:pPr indent="0" marL="0">
+            <a:pPr marL="0" indent="0">
               <a:lnSpc>
                 <a:spcPts val="1600"/>
               </a:lnSpc>
@@ -5519,7 +4960,7 @@
                 <a:ea typeface="Calibri" pitchFamily="34" charset="-122"/>
                 <a:cs typeface="Calibri" pitchFamily="34" charset="-120"/>
               </a:rPr>
-              <a:t>Tenure pendek = risiko tinggi</a:t>
+              <a:t>Support calls tinggi = sinyal churn</a:t>
             </a:r>
             <a:endParaRPr lang="en-US" sz="1300" dirty="0"/>
           </a:p>
@@ -5527,13 +4968,13 @@
       </p:sp>
       <p:sp>
         <p:nvSpPr>
-          <p:cNvPr id="22" name="Text 16"/>
-          <p:cNvSpPr/>
-          <p:nvPr/>
-        </p:nvSpPr>
-        <p:spPr>
-          <a:xfrm>
-            <a:off x="5760720" y="5285232"/>
+          <p:cNvPr id="12" name="Text 8"/>
+          <p:cNvSpPr/>
+          <p:nvPr/>
+        </p:nvSpPr>
+        <p:spPr>
+          <a:xfrm>
+            <a:off x="5760720" y="2633472"/>
             <a:ext cx="5669280" cy="914400"/>
           </a:xfrm>
           <a:prstGeom prst="rect">
@@ -5546,7 +4987,7 @@
           <a:bodyPr wrap="square" rtlCol="0" anchor="ctr"/>
           <a:lstStyle/>
           <a:p>
-            <a:pPr indent="0" marL="0">
+            <a:pPr marL="0" indent="0">
               <a:lnSpc>
                 <a:spcPts val="1600"/>
               </a:lnSpc>
@@ -5561,6 +5002,306 @@
                 <a:ea typeface="Calibri" pitchFamily="34" charset="-122"/>
                 <a:cs typeface="Calibri" pitchFamily="34" charset="-120"/>
               </a:rPr>
+              <a:t>Prioritaskan priority support untuk pelanggan dengan keluhan tinggi.</a:t>
+            </a:r>
+            <a:endParaRPr lang="en-US" sz="1200" dirty="0"/>
+          </a:p>
+        </p:txBody>
+      </p:sp>
+      <p:sp>
+        <p:nvSpPr>
+          <p:cNvPr id="13" name="Shape 9"/>
+          <p:cNvSpPr/>
+          <p:nvPr/>
+        </p:nvSpPr>
+        <p:spPr>
+          <a:xfrm>
+            <a:off x="548640" y="3840480"/>
+            <a:ext cx="11064240" cy="1170432"/>
+          </a:xfrm>
+          <a:prstGeom prst="roundRect">
+            <a:avLst>
+              <a:gd name="adj" fmla="val 6250"/>
+            </a:avLst>
+          </a:prstGeom>
+          <a:solidFill>
+            <a:srgbClr val="1A3E60"/>
+          </a:solidFill>
+          <a:ln/>
+        </p:spPr>
+      </p:sp>
+      <p:sp>
+        <p:nvSpPr>
+          <p:cNvPr id="14" name="Shape 10"/>
+          <p:cNvSpPr/>
+          <p:nvPr/>
+        </p:nvSpPr>
+        <p:spPr>
+          <a:xfrm>
+            <a:off x="822960" y="4160520"/>
+            <a:ext cx="502920" cy="502920"/>
+          </a:xfrm>
+          <a:prstGeom prst="ellipse">
+            <a:avLst/>
+          </a:prstGeom>
+          <a:solidFill>
+            <a:srgbClr val="E1562B"/>
+          </a:solidFill>
+          <a:ln/>
+        </p:spPr>
+      </p:sp>
+      <p:pic>
+        <p:nvPicPr>
+          <p:cNvPr id="15" name="Image 2" descr="/home/claude/churn_ppt/icons/creditcard.png"/>
+          <p:cNvPicPr>
+            <a:picLocks noChangeAspect="1"/>
+          </p:cNvPicPr>
+          <p:nvPr/>
+        </p:nvPicPr>
+        <p:blipFill>
+          <a:blip r:embed="rId5"/>
+          <a:stretch>
+            <a:fillRect/>
+          </a:stretch>
+        </p:blipFill>
+        <p:spPr>
+          <a:xfrm>
+            <a:off x="936117" y="4273677"/>
+            <a:ext cx="276606" cy="276606"/>
+          </a:xfrm>
+          <a:prstGeom prst="rect">
+            <a:avLst/>
+          </a:prstGeom>
+        </p:spPr>
+      </p:pic>
+      <p:sp>
+        <p:nvSpPr>
+          <p:cNvPr id="16" name="Text 11"/>
+          <p:cNvSpPr/>
+          <p:nvPr/>
+        </p:nvSpPr>
+        <p:spPr>
+          <a:xfrm>
+            <a:off x="1691640" y="3959352"/>
+            <a:ext cx="3931920" cy="914400"/>
+          </a:xfrm>
+          <a:prstGeom prst="rect">
+            <a:avLst/>
+          </a:prstGeom>
+          <a:noFill/>
+          <a:ln/>
+        </p:spPr>
+        <p:txBody>
+          <a:bodyPr wrap="square" rtlCol="0" anchor="ctr"/>
+          <a:lstStyle/>
+          <a:p>
+            <a:pPr marL="0" indent="0">
+              <a:lnSpc>
+                <a:spcPts val="1600"/>
+              </a:lnSpc>
+              <a:buNone/>
+            </a:pPr>
+            <a:r>
+              <a:rPr lang="en-US" sz="1300" b="1" dirty="0">
+                <a:solidFill>
+                  <a:srgbClr val="FFFFFF"/>
+                </a:solidFill>
+                <a:latin typeface="Calibri" pitchFamily="34" charset="0"/>
+                <a:ea typeface="Calibri" pitchFamily="34" charset="-122"/>
+                <a:cs typeface="Calibri" pitchFamily="34" charset="-120"/>
+              </a:rPr>
+              <a:t>Non-Autopay lebih rentan churn</a:t>
+            </a:r>
+            <a:endParaRPr lang="en-US" sz="1300" dirty="0"/>
+          </a:p>
+        </p:txBody>
+      </p:sp>
+      <p:sp>
+        <p:nvSpPr>
+          <p:cNvPr id="17" name="Text 12"/>
+          <p:cNvSpPr/>
+          <p:nvPr/>
+        </p:nvSpPr>
+        <p:spPr>
+          <a:xfrm>
+            <a:off x="5760720" y="3959352"/>
+            <a:ext cx="5669280" cy="914400"/>
+          </a:xfrm>
+          <a:prstGeom prst="rect">
+            <a:avLst/>
+          </a:prstGeom>
+          <a:noFill/>
+          <a:ln/>
+        </p:spPr>
+        <p:txBody>
+          <a:bodyPr wrap="square" rtlCol="0" anchor="ctr"/>
+          <a:lstStyle/>
+          <a:p>
+            <a:pPr marL="0" indent="0">
+              <a:lnSpc>
+                <a:spcPts val="1600"/>
+              </a:lnSpc>
+              <a:buNone/>
+            </a:pPr>
+            <a:r>
+              <a:rPr lang="en-US" sz="1200" dirty="0">
+                <a:solidFill>
+                  <a:srgbClr val="C7D8E6"/>
+                </a:solidFill>
+                <a:latin typeface="Calibri" pitchFamily="34" charset="0"/>
+                <a:ea typeface="Calibri" pitchFamily="34" charset="-122"/>
+                <a:cs typeface="Calibri" pitchFamily="34" charset="-120"/>
+              </a:rPr>
+              <a:t>Dorong adopsi Autopay lewat cashback / diskon tagihan.</a:t>
+            </a:r>
+            <a:endParaRPr lang="en-US" sz="1200" dirty="0"/>
+          </a:p>
+        </p:txBody>
+      </p:sp>
+      <p:sp>
+        <p:nvSpPr>
+          <p:cNvPr id="18" name="Shape 13"/>
+          <p:cNvSpPr/>
+          <p:nvPr/>
+        </p:nvSpPr>
+        <p:spPr>
+          <a:xfrm>
+            <a:off x="548640" y="5166360"/>
+            <a:ext cx="11064240" cy="1170432"/>
+          </a:xfrm>
+          <a:prstGeom prst="roundRect">
+            <a:avLst>
+              <a:gd name="adj" fmla="val 6250"/>
+            </a:avLst>
+          </a:prstGeom>
+          <a:solidFill>
+            <a:srgbClr val="1A3E60"/>
+          </a:solidFill>
+          <a:ln/>
+        </p:spPr>
+      </p:sp>
+      <p:sp>
+        <p:nvSpPr>
+          <p:cNvPr id="19" name="Shape 14"/>
+          <p:cNvSpPr/>
+          <p:nvPr/>
+        </p:nvSpPr>
+        <p:spPr>
+          <a:xfrm>
+            <a:off x="822960" y="5486400"/>
+            <a:ext cx="502920" cy="502920"/>
+          </a:xfrm>
+          <a:prstGeom prst="ellipse">
+            <a:avLst/>
+          </a:prstGeom>
+          <a:solidFill>
+            <a:srgbClr val="E1562B"/>
+          </a:solidFill>
+          <a:ln/>
+        </p:spPr>
+      </p:sp>
+      <p:pic>
+        <p:nvPicPr>
+          <p:cNvPr id="20" name="Image 3" descr="/home/claude/churn_ppt/icons/clock.png"/>
+          <p:cNvPicPr>
+            <a:picLocks noChangeAspect="1"/>
+          </p:cNvPicPr>
+          <p:nvPr/>
+        </p:nvPicPr>
+        <p:blipFill>
+          <a:blip r:embed="rId6"/>
+          <a:stretch>
+            <a:fillRect/>
+          </a:stretch>
+        </p:blipFill>
+        <p:spPr>
+          <a:xfrm>
+            <a:off x="936117" y="5599557"/>
+            <a:ext cx="276606" cy="276606"/>
+          </a:xfrm>
+          <a:prstGeom prst="rect">
+            <a:avLst/>
+          </a:prstGeom>
+        </p:spPr>
+      </p:pic>
+      <p:sp>
+        <p:nvSpPr>
+          <p:cNvPr id="21" name="Text 15"/>
+          <p:cNvSpPr/>
+          <p:nvPr/>
+        </p:nvSpPr>
+        <p:spPr>
+          <a:xfrm>
+            <a:off x="1691640" y="5285232"/>
+            <a:ext cx="3931920" cy="914400"/>
+          </a:xfrm>
+          <a:prstGeom prst="rect">
+            <a:avLst/>
+          </a:prstGeom>
+          <a:noFill/>
+          <a:ln/>
+        </p:spPr>
+        <p:txBody>
+          <a:bodyPr wrap="square" rtlCol="0" anchor="ctr"/>
+          <a:lstStyle/>
+          <a:p>
+            <a:pPr marL="0" indent="0">
+              <a:lnSpc>
+                <a:spcPts val="1600"/>
+              </a:lnSpc>
+              <a:buNone/>
+            </a:pPr>
+            <a:r>
+              <a:rPr lang="en-US" sz="1300" b="1" dirty="0">
+                <a:solidFill>
+                  <a:srgbClr val="FFFFFF"/>
+                </a:solidFill>
+                <a:latin typeface="Calibri" pitchFamily="34" charset="0"/>
+                <a:ea typeface="Calibri" pitchFamily="34" charset="-122"/>
+                <a:cs typeface="Calibri" pitchFamily="34" charset="-120"/>
+              </a:rPr>
+              <a:t>Tenure pendek = risiko tinggi</a:t>
+            </a:r>
+            <a:endParaRPr lang="en-US" sz="1300" dirty="0"/>
+          </a:p>
+        </p:txBody>
+      </p:sp>
+      <p:sp>
+        <p:nvSpPr>
+          <p:cNvPr id="22" name="Text 16"/>
+          <p:cNvSpPr/>
+          <p:nvPr/>
+        </p:nvSpPr>
+        <p:spPr>
+          <a:xfrm>
+            <a:off x="5760720" y="5285232"/>
+            <a:ext cx="5669280" cy="914400"/>
+          </a:xfrm>
+          <a:prstGeom prst="rect">
+            <a:avLst/>
+          </a:prstGeom>
+          <a:noFill/>
+          <a:ln/>
+        </p:spPr>
+        <p:txBody>
+          <a:bodyPr wrap="square" rtlCol="0" anchor="ctr"/>
+          <a:lstStyle/>
+          <a:p>
+            <a:pPr marL="0" indent="0">
+              <a:lnSpc>
+                <a:spcPts val="1600"/>
+              </a:lnSpc>
+              <a:buNone/>
+            </a:pPr>
+            <a:r>
+              <a:rPr lang="en-US" sz="1200" dirty="0">
+                <a:solidFill>
+                  <a:srgbClr val="C7D8E6"/>
+                </a:solidFill>
+                <a:latin typeface="Calibri" pitchFamily="34" charset="0"/>
+                <a:ea typeface="Calibri" pitchFamily="34" charset="-122"/>
+                <a:cs typeface="Calibri" pitchFamily="34" charset="-120"/>
+              </a:rPr>
               <a:t>Perkuat onboarding &amp; follow-up di bulan-bulan awal berlangganan.</a:t>
             </a:r>
             <a:endParaRPr lang="en-US" sz="1200" dirty="0"/>
@@ -5588,7 +5329,7 @@
           <a:bodyPr wrap="square" rtlCol="0" anchor="ctr"/>
           <a:lstStyle/>
           <a:p>
-            <a:pPr algn="l" indent="0" marL="0">
+            <a:pPr marL="0" indent="0" algn="l">
               <a:buNone/>
             </a:pPr>
             <a:r>
@@ -5627,7 +5368,7 @@
           <a:bodyPr wrap="square" rtlCol="0" anchor="ctr"/>
           <a:lstStyle/>
           <a:p>
-            <a:pPr algn="r" indent="0" marL="0">
+            <a:pPr marL="0" indent="0" algn="r">
               <a:buNone/>
             </a:pPr>
             <a:r>
@@ -5661,6 +5402,7 @@
         <a:solidFill>
           <a:srgbClr val="FFFFFF"/>
         </a:solidFill>
+        <a:effectLst/>
       </p:bgPr>
     </p:bg>
     <p:spTree>
@@ -5699,14 +5441,14 @@
       </p:sp>
       <p:pic>
         <p:nvPicPr>
-          <p:cNvPr id="3" name="Image 0" descr="/home/claude/churn_ppt/icons/warning.png">    </p:cNvPr>
+          <p:cNvPr id="3" name="Image 0" descr="/home/claude/churn_ppt/icons/warning.png"/>
           <p:cNvPicPr>
             <a:picLocks noChangeAspect="1"/>
           </p:cNvPicPr>
           <p:nvPr/>
         </p:nvPicPr>
         <p:blipFill>
-          <a:blip r:embed="rId1"/>
+          <a:blip r:embed="rId3"/>
           <a:stretch>
             <a:fillRect/>
           </a:stretch>
@@ -5742,7 +5484,7 @@
           <a:bodyPr wrap="square" rtlCol="0" anchor="ctr"/>
           <a:lstStyle/>
           <a:p>
-            <a:pPr indent="0" marL="0">
+            <a:pPr marL="0" indent="0">
               <a:buNone/>
             </a:pPr>
             <a:r>
@@ -5781,7 +5523,7 @@
           <a:bodyPr wrap="square" rtlCol="0" anchor="ctr"/>
           <a:lstStyle/>
           <a:p>
-            <a:pPr indent="0" marL="0">
+            <a:pPr marL="0" indent="0">
               <a:lnSpc>
                 <a:spcPts val="2200"/>
               </a:lnSpc>
@@ -5796,7 +5538,29 @@
                 <a:ea typeface="Calibri" pitchFamily="34" charset="-122"/>
                 <a:cs typeface="Calibri" pitchFamily="34" charset="-120"/>
               </a:rPr>
-              <a:t>Model pada proyek ini berfungsi sebagai proof of concept (PoC) untuk menunjukkan proses end-to-end pembangunan model prediksi churn — mulai dari data preparation, EDA, feature engineering, model development, hingga rekomendasi bisnis. Pada implementasi produksi, performa model masih dapat ditingkatkan melalui data yang lebih representatif, penambahan fitur relevan, dan optimasi model lebih lanjut.</a:t>
+              <a:t>Model pada proyek ini berfungsi sebagai proof of concept (PoC) untuk menunjukkan proses end-to-end pembangunan model </a:t>
+            </a:r>
+            <a:r>
+              <a:rPr lang="en-US" sz="1400" dirty="0" err="1">
+                <a:solidFill>
+                  <a:srgbClr val="1B2B3A"/>
+                </a:solidFill>
+                <a:latin typeface="Calibri" pitchFamily="34" charset="0"/>
+                <a:ea typeface="Calibri" pitchFamily="34" charset="-122"/>
+                <a:cs typeface="Calibri" pitchFamily="34" charset="-120"/>
+              </a:rPr>
+              <a:t>prediksi</a:t>
+            </a:r>
+            <a:r>
+              <a:rPr lang="en-US" sz="1400" dirty="0">
+                <a:solidFill>
+                  <a:srgbClr val="1B2B3A"/>
+                </a:solidFill>
+                <a:latin typeface="Calibri" pitchFamily="34" charset="0"/>
+                <a:ea typeface="Calibri" pitchFamily="34" charset="-122"/>
+                <a:cs typeface="Calibri" pitchFamily="34" charset="-120"/>
+              </a:rPr>
+              <a:t> churn, mulai dari data preparation, EDA, feature engineering, model development, hingga rekomendasi bisnis. Pada implementasi produksi, performa model masih dapat ditingkatkan melalui data yang lebih representatif, penambahan fitur relevan, dan optimasi model lebih lanjut.</a:t>
             </a:r>
             <a:endParaRPr lang="en-US" sz="1400" dirty="0"/>
           </a:p>
@@ -5823,7 +5587,7 @@
           <a:bodyPr wrap="square" rtlCol="0" anchor="ctr"/>
           <a:lstStyle/>
           <a:p>
-            <a:pPr algn="l" indent="0" marL="0">
+            <a:pPr marL="0" indent="0" algn="l">
               <a:buNone/>
             </a:pPr>
             <a:r>
@@ -5862,7 +5626,7 @@
           <a:bodyPr wrap="square" rtlCol="0" anchor="ctr"/>
           <a:lstStyle/>
           <a:p>
-            <a:pPr algn="r" indent="0" marL="0">
+            <a:pPr marL="0" indent="0" algn="r">
               <a:buNone/>
             </a:pPr>
             <a:r>
@@ -5896,6 +5660,7 @@
         <a:solidFill>
           <a:srgbClr val="12314F"/>
         </a:solidFill>
+        <a:effectLst/>
       </p:bgPr>
     </p:bg>
     <p:spTree>
@@ -5977,7 +5742,7 @@
           <a:bodyPr wrap="square" rtlCol="0" anchor="ctr"/>
           <a:lstStyle/>
           <a:p>
-            <a:pPr algn="ctr" indent="0" marL="0">
+            <a:pPr marL="0" indent="0" algn="ctr">
               <a:buNone/>
             </a:pPr>
             <a:r>
@@ -5997,45 +5762,6 @@
       </p:sp>
       <p:sp>
         <p:nvSpPr>
-          <p:cNvPr id="5" name="Text 3"/>
-          <p:cNvSpPr/>
-          <p:nvPr/>
-        </p:nvSpPr>
-        <p:spPr>
-          <a:xfrm>
-            <a:off x="0" y="2743200"/>
-            <a:ext cx="12161520" cy="457200"/>
-          </a:xfrm>
-          <a:prstGeom prst="rect">
-            <a:avLst/>
-          </a:prstGeom>
-          <a:noFill/>
-          <a:ln/>
-        </p:spPr>
-        <p:txBody>
-          <a:bodyPr wrap="square" rtlCol="0" anchor="ctr"/>
-          <a:lstStyle/>
-          <a:p>
-            <a:pPr algn="ctr" indent="0" marL="0">
-              <a:buNone/>
-            </a:pPr>
-            <a:r>
-              <a:rPr lang="en-US" sz="1500" i="1" dirty="0">
-                <a:solidFill>
-                  <a:srgbClr val="C7D8E6"/>
-                </a:solidFill>
-                <a:latin typeface="Calibri" pitchFamily="34" charset="0"/>
-                <a:ea typeface="Calibri" pitchFamily="34" charset="-122"/>
-                <a:cs typeface="Calibri" pitchFamily="34" charset="-120"/>
-              </a:rPr>
-              <a:t>Terima kasih — mari berdiskusi tentang data &amp; analitik lebih lanjut.</a:t>
-            </a:r>
-            <a:endParaRPr lang="en-US" sz="1500" dirty="0"/>
-          </a:p>
-        </p:txBody>
-      </p:sp>
-      <p:sp>
-        <p:nvSpPr>
           <p:cNvPr id="6" name="Shape 4"/>
           <p:cNvSpPr/>
           <p:nvPr/>
@@ -6056,14 +5782,14 @@
       </p:sp>
       <p:pic>
         <p:nvPicPr>
-          <p:cNvPr id="7" name="Image 0" descr="/home/claude/churn_ppt/icons/envelope.png">    </p:cNvPr>
+          <p:cNvPr id="7" name="Image 0" descr="/home/claude/churn_ppt/icons/envelope.png"/>
           <p:cNvPicPr>
             <a:picLocks noChangeAspect="1"/>
           </p:cNvPicPr>
           <p:nvPr/>
         </p:nvPicPr>
         <p:blipFill>
-          <a:blip r:embed="rId1"/>
+          <a:blip r:embed="rId3"/>
           <a:stretch>
             <a:fillRect/>
           </a:stretch>
@@ -6099,7 +5825,7 @@
           <a:bodyPr wrap="square" rtlCol="0" anchor="ctr"/>
           <a:lstStyle/>
           <a:p>
-            <a:pPr indent="0" marL="0">
+            <a:pPr marL="0" indent="0">
               <a:buNone/>
             </a:pPr>
             <a:r>
@@ -6139,14 +5865,14 @@
       </p:sp>
       <p:pic>
         <p:nvPicPr>
-          <p:cNvPr id="10" name="Image 1" descr="/home/claude/churn_ppt/icons/linkedin.png">    </p:cNvPr>
+          <p:cNvPr id="10" name="Image 1" descr="/home/claude/churn_ppt/icons/linkedin.png"/>
           <p:cNvPicPr>
             <a:picLocks noChangeAspect="1"/>
           </p:cNvPicPr>
           <p:nvPr/>
         </p:nvPicPr>
         <p:blipFill>
-          <a:blip r:embed="rId2"/>
+          <a:blip r:embed="rId4"/>
           <a:stretch>
             <a:fillRect/>
           </a:stretch>
@@ -6182,7 +5908,7 @@
           <a:bodyPr wrap="square" rtlCol="0" anchor="ctr"/>
           <a:lstStyle/>
           <a:p>
-            <a:pPr indent="0" marL="0">
+            <a:pPr marL="0" indent="0">
               <a:buNone/>
             </a:pPr>
             <a:r>
@@ -6221,7 +5947,7 @@
           <a:bodyPr wrap="square" rtlCol="0" anchor="ctr"/>
           <a:lstStyle/>
           <a:p>
-            <a:pPr algn="ctr" indent="0" marL="0">
+            <a:pPr marL="0" indent="0" algn="ctr">
               <a:buNone/>
             </a:pPr>
             <a:r>
@@ -6255,6 +5981,7 @@
         <a:solidFill>
           <a:srgbClr val="FFFFFF"/>
         </a:solidFill>
+        <a:effectLst/>
       </p:bgPr>
     </p:bg>
     <p:spTree>
@@ -6273,115 +6000,37 @@
       </p:grpSpPr>
       <p:sp>
         <p:nvSpPr>
-          <p:cNvPr id="2" name="Text 0"/>
-          <p:cNvSpPr/>
-          <p:nvPr/>
-        </p:nvSpPr>
-        <p:spPr>
-          <a:xfrm>
-            <a:off x="548640" y="457200"/>
-            <a:ext cx="1097280" cy="1097280"/>
-          </a:xfrm>
-          <a:prstGeom prst="rect">
-            <a:avLst/>
-          </a:prstGeom>
-          <a:noFill/>
-          <a:ln/>
-        </p:spPr>
-        <p:txBody>
-          <a:bodyPr wrap="square" rtlCol="0" anchor="ctr"/>
-          <a:lstStyle/>
-          <a:p>
-            <a:pPr algn="l" indent="0" marL="0">
-              <a:buNone/>
-            </a:pPr>
-            <a:r>
-              <a:rPr lang="en-US" sz="5400" b="1" dirty="0">
-                <a:solidFill>
-                  <a:srgbClr val="EAF1F7"/>
+          <p:cNvPr id="4" name="Text 2"/>
+          <p:cNvSpPr/>
+          <p:nvPr/>
+        </p:nvSpPr>
+        <p:spPr>
+          <a:xfrm>
+            <a:off x="822960" y="868680"/>
+            <a:ext cx="9144000" cy="640080"/>
+          </a:xfrm>
+          <a:prstGeom prst="rect">
+            <a:avLst/>
+          </a:prstGeom>
+          <a:noFill/>
+          <a:ln/>
+        </p:spPr>
+        <p:txBody>
+          <a:bodyPr wrap="square" rtlCol="0" anchor="ctr"/>
+          <a:lstStyle/>
+          <a:p>
+            <a:pPr marL="0" indent="0">
+              <a:buNone/>
+            </a:pPr>
+            <a:r>
+              <a:rPr lang="en-US" sz="3000" b="1" dirty="0">
+                <a:solidFill>
+                  <a:srgbClr val="12314F"/>
                 </a:solidFill>
                 <a:latin typeface="Cambria" pitchFamily="34" charset="0"/>
                 <a:ea typeface="Cambria" pitchFamily="34" charset="-122"/>
                 <a:cs typeface="Cambria" pitchFamily="34" charset="-120"/>
               </a:rPr>
-              <a:t>S</a:t>
-            </a:r>
-            <a:endParaRPr lang="en-US" sz="5400" dirty="0"/>
-          </a:p>
-        </p:txBody>
-      </p:sp>
-      <p:sp>
-        <p:nvSpPr>
-          <p:cNvPr id="3" name="Text 1"/>
-          <p:cNvSpPr/>
-          <p:nvPr/>
-        </p:nvSpPr>
-        <p:spPr>
-          <a:xfrm>
-            <a:off x="822960" y="502920"/>
-            <a:ext cx="3657600" cy="365760"/>
-          </a:xfrm>
-          <a:prstGeom prst="rect">
-            <a:avLst/>
-          </a:prstGeom>
-          <a:noFill/>
-          <a:ln/>
-        </p:spPr>
-        <p:txBody>
-          <a:bodyPr wrap="square" rtlCol="0" anchor="ctr"/>
-          <a:lstStyle/>
-          <a:p>
-            <a:pPr indent="0" marL="0">
-              <a:buNone/>
-            </a:pPr>
-            <a:r>
-              <a:rPr lang="en-US" sz="1300" b="1" spc="200" kern="0" dirty="0">
-                <a:solidFill>
-                  <a:srgbClr val="E1562B"/>
-                </a:solidFill>
-                <a:latin typeface="Calibri" pitchFamily="34" charset="0"/>
-                <a:ea typeface="Calibri" pitchFamily="34" charset="-122"/>
-                <a:cs typeface="Calibri" pitchFamily="34" charset="-120"/>
-              </a:rPr>
-              <a:t>SITUATION</a:t>
-            </a:r>
-            <a:endParaRPr lang="en-US" sz="1300" dirty="0"/>
-          </a:p>
-        </p:txBody>
-      </p:sp>
-      <p:sp>
-        <p:nvSpPr>
-          <p:cNvPr id="4" name="Text 2"/>
-          <p:cNvSpPr/>
-          <p:nvPr/>
-        </p:nvSpPr>
-        <p:spPr>
-          <a:xfrm>
-            <a:off x="822960" y="868680"/>
-            <a:ext cx="9144000" cy="640080"/>
-          </a:xfrm>
-          <a:prstGeom prst="rect">
-            <a:avLst/>
-          </a:prstGeom>
-          <a:noFill/>
-          <a:ln/>
-        </p:spPr>
-        <p:txBody>
-          <a:bodyPr wrap="square" rtlCol="0" anchor="ctr"/>
-          <a:lstStyle/>
-          <a:p>
-            <a:pPr indent="0" marL="0">
-              <a:buNone/>
-            </a:pPr>
-            <a:r>
-              <a:rPr lang="en-US" sz="3000" b="1" dirty="0">
-                <a:solidFill>
-                  <a:srgbClr val="12314F"/>
-                </a:solidFill>
-                <a:latin typeface="Cambria" pitchFamily="34" charset="0"/>
-                <a:ea typeface="Cambria" pitchFamily="34" charset="-122"/>
-                <a:cs typeface="Cambria" pitchFamily="34" charset="-120"/>
-              </a:rPr>
               <a:t>PT ABC &amp; Layanan Fixed Broadband</a:t>
             </a:r>
             <a:endParaRPr lang="en-US" sz="3000" dirty="0"/>
@@ -6409,7 +6058,7 @@
           <a:bodyPr wrap="square" rtlCol="0" anchor="ctr"/>
           <a:lstStyle/>
           <a:p>
-            <a:pPr indent="0" marL="0">
+            <a:pPr marL="0" indent="0">
               <a:lnSpc>
                 <a:spcPts val="2400"/>
               </a:lnSpc>
@@ -6451,11 +6100,11 @@
           <a:bodyPr wrap="square" rtlCol="0" anchor="ctr"/>
           <a:lstStyle/>
           <a:p>
-            <a:pPr indent="0" marL="0">
-              <a:buNone/>
-            </a:pPr>
-            <a:r>
-              <a:rPr lang="en-US" sz="1100" b="1" spc="150" kern="0" dirty="0">
+            <a:pPr marL="0" indent="0">
+              <a:buNone/>
+            </a:pPr>
+            <a:r>
+              <a:rPr lang="en-US" sz="1100" b="1" kern="0" spc="150" dirty="0">
                 <a:solidFill>
                   <a:srgbClr val="5C7086"/>
                 </a:solidFill>
@@ -6491,179 +6140,7 @@
       </p:sp>
       <p:pic>
         <p:nvPicPr>
-          <p:cNvPr id="8" name="Image 0" descr="/home/claude/churn_ppt/icons/search.png">    </p:cNvPr>
-          <p:cNvPicPr>
-            <a:picLocks noChangeAspect="1"/>
-          </p:cNvPicPr>
-          <p:nvPr/>
-        </p:nvPicPr>
-        <p:blipFill>
-          <a:blip r:embed="rId1"/>
-          <a:stretch>
-            <a:fillRect/>
-          </a:stretch>
-        </p:blipFill>
-        <p:spPr>
-          <a:xfrm>
-            <a:off x="936117" y="3907917"/>
-            <a:ext cx="276606" cy="276606"/>
-          </a:xfrm>
-          <a:prstGeom prst="rect">
-            <a:avLst/>
-          </a:prstGeom>
-        </p:spPr>
-      </p:pic>
-      <p:sp>
-        <p:nvSpPr>
-          <p:cNvPr id="9" name="Text 6"/>
-          <p:cNvSpPr/>
-          <p:nvPr/>
-        </p:nvSpPr>
-        <p:spPr>
-          <a:xfrm>
-            <a:off x="1463040" y="3813048"/>
-            <a:ext cx="1554480" cy="502920"/>
-          </a:xfrm>
-          <a:prstGeom prst="rect">
-            <a:avLst/>
-          </a:prstGeom>
-          <a:noFill/>
-          <a:ln/>
-        </p:spPr>
-        <p:txBody>
-          <a:bodyPr wrap="square" rtlCol="0" anchor="ctr"/>
-          <a:lstStyle/>
-          <a:p>
-            <a:pPr indent="0" marL="0">
-              <a:lnSpc>
-                <a:spcPts val="1300"/>
-              </a:lnSpc>
-              <a:buNone/>
-            </a:pPr>
-            <a:r>
-              <a:rPr lang="en-US" sz="1150" dirty="0">
-                <a:solidFill>
-                  <a:srgbClr val="1B2B3A"/>
-                </a:solidFill>
-                <a:latin typeface="Calibri" pitchFamily="34" charset="0"/>
-                <a:ea typeface="Calibri" pitchFamily="34" charset="-122"/>
-                <a:cs typeface="Calibri" pitchFamily="34" charset="-120"/>
-              </a:rPr>
-              <a:t>Exploratory Data Analysis</a:t>
-            </a:r>
-            <a:endParaRPr lang="en-US" sz="1150" dirty="0"/>
-          </a:p>
-        </p:txBody>
-      </p:sp>
-      <p:sp>
-        <p:nvSpPr>
-          <p:cNvPr id="10" name="Shape 7"/>
-          <p:cNvSpPr/>
-          <p:nvPr/>
-        </p:nvSpPr>
-        <p:spPr>
-          <a:xfrm>
-            <a:off x="3108960" y="3794760"/>
-            <a:ext cx="502920" cy="502920"/>
-          </a:xfrm>
-          <a:prstGeom prst="ellipse">
-            <a:avLst/>
-          </a:prstGeom>
-          <a:solidFill>
-            <a:srgbClr val="12314F"/>
-          </a:solidFill>
-          <a:ln/>
-        </p:spPr>
-      </p:sp>
-      <p:pic>
-        <p:nvPicPr>
-          <p:cNvPr id="11" name="Image 1" descr="/home/claude/churn_ppt/icons/cogs.png">    </p:cNvPr>
-          <p:cNvPicPr>
-            <a:picLocks noChangeAspect="1"/>
-          </p:cNvPicPr>
-          <p:nvPr/>
-        </p:nvPicPr>
-        <p:blipFill>
-          <a:blip r:embed="rId2"/>
-          <a:stretch>
-            <a:fillRect/>
-          </a:stretch>
-        </p:blipFill>
-        <p:spPr>
-          <a:xfrm>
-            <a:off x="3222117" y="3907917"/>
-            <a:ext cx="276606" cy="276606"/>
-          </a:xfrm>
-          <a:prstGeom prst="rect">
-            <a:avLst/>
-          </a:prstGeom>
-        </p:spPr>
-      </p:pic>
-      <p:sp>
-        <p:nvSpPr>
-          <p:cNvPr id="12" name="Text 8"/>
-          <p:cNvSpPr/>
-          <p:nvPr/>
-        </p:nvSpPr>
-        <p:spPr>
-          <a:xfrm>
-            <a:off x="3749040" y="3813048"/>
-            <a:ext cx="1554480" cy="502920"/>
-          </a:xfrm>
-          <a:prstGeom prst="rect">
-            <a:avLst/>
-          </a:prstGeom>
-          <a:noFill/>
-          <a:ln/>
-        </p:spPr>
-        <p:txBody>
-          <a:bodyPr wrap="square" rtlCol="0" anchor="ctr"/>
-          <a:lstStyle/>
-          <a:p>
-            <a:pPr indent="0" marL="0">
-              <a:lnSpc>
-                <a:spcPts val="1300"/>
-              </a:lnSpc>
-              <a:buNone/>
-            </a:pPr>
-            <a:r>
-              <a:rPr lang="en-US" sz="1150" dirty="0">
-                <a:solidFill>
-                  <a:srgbClr val="1B2B3A"/>
-                </a:solidFill>
-                <a:latin typeface="Calibri" pitchFamily="34" charset="0"/>
-                <a:ea typeface="Calibri" pitchFamily="34" charset="-122"/>
-                <a:cs typeface="Calibri" pitchFamily="34" charset="-120"/>
-              </a:rPr>
-              <a:t>Feature Engineering</a:t>
-            </a:r>
-            <a:endParaRPr lang="en-US" sz="1150" dirty="0"/>
-          </a:p>
-        </p:txBody>
-      </p:sp>
-      <p:sp>
-        <p:nvSpPr>
-          <p:cNvPr id="13" name="Shape 9"/>
-          <p:cNvSpPr/>
-          <p:nvPr/>
-        </p:nvSpPr>
-        <p:spPr>
-          <a:xfrm>
-            <a:off x="5394960" y="3794760"/>
-            <a:ext cx="502920" cy="502920"/>
-          </a:xfrm>
-          <a:prstGeom prst="ellipse">
-            <a:avLst/>
-          </a:prstGeom>
-          <a:solidFill>
-            <a:srgbClr val="12314F"/>
-          </a:solidFill>
-          <a:ln/>
-        </p:spPr>
-      </p:sp>
-      <p:pic>
-        <p:nvPicPr>
-          <p:cNvPr id="14" name="Image 2" descr="/home/claude/churn_ppt/icons/brain.png">    </p:cNvPr>
+          <p:cNvPr id="8" name="Image 0" descr="/home/claude/churn_ppt/icons/search.png"/>
           <p:cNvPicPr>
             <a:picLocks noChangeAspect="1"/>
           </p:cNvPicPr>
@@ -6677,7 +6154,7 @@
         </p:blipFill>
         <p:spPr>
           <a:xfrm>
-            <a:off x="5508117" y="3907917"/>
+            <a:off x="936117" y="3907917"/>
             <a:ext cx="276606" cy="276606"/>
           </a:xfrm>
           <a:prstGeom prst="rect">
@@ -6687,13 +6164,13 @@
       </p:pic>
       <p:sp>
         <p:nvSpPr>
-          <p:cNvPr id="15" name="Text 10"/>
-          <p:cNvSpPr/>
-          <p:nvPr/>
-        </p:nvSpPr>
-        <p:spPr>
-          <a:xfrm>
-            <a:off x="6035040" y="3813048"/>
+          <p:cNvPr id="9" name="Text 6"/>
+          <p:cNvSpPr/>
+          <p:nvPr/>
+        </p:nvSpPr>
+        <p:spPr>
+          <a:xfrm>
+            <a:off x="1463040" y="3813048"/>
             <a:ext cx="1554480" cy="502920"/>
           </a:xfrm>
           <a:prstGeom prst="rect">
@@ -6706,7 +6183,7 @@
           <a:bodyPr wrap="square" rtlCol="0" anchor="ctr"/>
           <a:lstStyle/>
           <a:p>
-            <a:pPr indent="0" marL="0">
+            <a:pPr marL="0" indent="0">
               <a:lnSpc>
                 <a:spcPts val="1300"/>
               </a:lnSpc>
@@ -6721,7 +6198,7 @@
                 <a:ea typeface="Calibri" pitchFamily="34" charset="-122"/>
                 <a:cs typeface="Calibri" pitchFamily="34" charset="-120"/>
               </a:rPr>
-              <a:t>Model Training &amp; Tuning</a:t>
+              <a:t>Exploratory Data Analysis</a:t>
             </a:r>
             <a:endParaRPr lang="en-US" sz="1150" dirty="0"/>
           </a:p>
@@ -6729,13 +6206,13 @@
       </p:sp>
       <p:sp>
         <p:nvSpPr>
-          <p:cNvPr id="16" name="Shape 11"/>
-          <p:cNvSpPr/>
-          <p:nvPr/>
-        </p:nvSpPr>
-        <p:spPr>
-          <a:xfrm>
-            <a:off x="822960" y="4800600"/>
+          <p:cNvPr id="10" name="Shape 7"/>
+          <p:cNvSpPr/>
+          <p:nvPr/>
+        </p:nvSpPr>
+        <p:spPr>
+          <a:xfrm>
+            <a:off x="3108960" y="3794760"/>
             <a:ext cx="502920" cy="502920"/>
           </a:xfrm>
           <a:prstGeom prst="ellipse">
@@ -6749,7 +6226,7 @@
       </p:sp>
       <p:pic>
         <p:nvPicPr>
-          <p:cNvPr id="17" name="Image 3" descr="/home/claude/churn_ppt/icons/chartbar.png">    </p:cNvPr>
+          <p:cNvPr id="11" name="Image 1" descr="/home/claude/churn_ppt/icons/cogs.png"/>
           <p:cNvPicPr>
             <a:picLocks noChangeAspect="1"/>
           </p:cNvPicPr>
@@ -6763,7 +6240,7 @@
         </p:blipFill>
         <p:spPr>
           <a:xfrm>
-            <a:off x="936117" y="4913757"/>
+            <a:off x="3222117" y="3907917"/>
             <a:ext cx="276606" cy="276606"/>
           </a:xfrm>
           <a:prstGeom prst="rect">
@@ -6773,13 +6250,13 @@
       </p:pic>
       <p:sp>
         <p:nvSpPr>
-          <p:cNvPr id="18" name="Text 12"/>
-          <p:cNvSpPr/>
-          <p:nvPr/>
-        </p:nvSpPr>
-        <p:spPr>
-          <a:xfrm>
-            <a:off x="1463040" y="4818888"/>
+          <p:cNvPr id="12" name="Text 8"/>
+          <p:cNvSpPr/>
+          <p:nvPr/>
+        </p:nvSpPr>
+        <p:spPr>
+          <a:xfrm>
+            <a:off x="3749040" y="3813048"/>
             <a:ext cx="1554480" cy="502920"/>
           </a:xfrm>
           <a:prstGeom prst="rect">
@@ -6792,7 +6269,7 @@
           <a:bodyPr wrap="square" rtlCol="0" anchor="ctr"/>
           <a:lstStyle/>
           <a:p>
-            <a:pPr indent="0" marL="0">
+            <a:pPr marL="0" indent="0">
               <a:lnSpc>
                 <a:spcPts val="1300"/>
               </a:lnSpc>
@@ -6807,7 +6284,7 @@
                 <a:ea typeface="Calibri" pitchFamily="34" charset="-122"/>
                 <a:cs typeface="Calibri" pitchFamily="34" charset="-120"/>
               </a:rPr>
-              <a:t>Model Evaluation</a:t>
+              <a:t>Feature Engineering</a:t>
             </a:r>
             <a:endParaRPr lang="en-US" sz="1150" dirty="0"/>
           </a:p>
@@ -6815,13 +6292,13 @@
       </p:sp>
       <p:sp>
         <p:nvSpPr>
-          <p:cNvPr id="19" name="Shape 13"/>
-          <p:cNvSpPr/>
-          <p:nvPr/>
-        </p:nvSpPr>
-        <p:spPr>
-          <a:xfrm>
-            <a:off x="3108960" y="4800600"/>
+          <p:cNvPr id="13" name="Shape 9"/>
+          <p:cNvSpPr/>
+          <p:nvPr/>
+        </p:nvSpPr>
+        <p:spPr>
+          <a:xfrm>
+            <a:off x="5394960" y="3794760"/>
             <a:ext cx="502920" cy="502920"/>
           </a:xfrm>
           <a:prstGeom prst="ellipse">
@@ -6835,7 +6312,7 @@
       </p:sp>
       <p:pic>
         <p:nvPicPr>
-          <p:cNvPr id="20" name="Image 4" descr="/home/claude/churn_ppt/icons/bulb.png">    </p:cNvPr>
+          <p:cNvPr id="14" name="Image 2" descr="/home/claude/churn_ppt/icons/brain.png"/>
           <p:cNvPicPr>
             <a:picLocks noChangeAspect="1"/>
           </p:cNvPicPr>
@@ -6849,7 +6326,7 @@
         </p:blipFill>
         <p:spPr>
           <a:xfrm>
-            <a:off x="3222117" y="4913757"/>
+            <a:off x="5508117" y="3907917"/>
             <a:ext cx="276606" cy="276606"/>
           </a:xfrm>
           <a:prstGeom prst="rect">
@@ -6859,13 +6336,13 @@
       </p:pic>
       <p:sp>
         <p:nvSpPr>
-          <p:cNvPr id="21" name="Text 14"/>
-          <p:cNvSpPr/>
-          <p:nvPr/>
-        </p:nvSpPr>
-        <p:spPr>
-          <a:xfrm>
-            <a:off x="3749040" y="4818888"/>
+          <p:cNvPr id="15" name="Text 10"/>
+          <p:cNvSpPr/>
+          <p:nvPr/>
+        </p:nvSpPr>
+        <p:spPr>
+          <a:xfrm>
+            <a:off x="6035040" y="3813048"/>
             <a:ext cx="1554480" cy="502920"/>
           </a:xfrm>
           <a:prstGeom prst="rect">
@@ -6878,7 +6355,7 @@
           <a:bodyPr wrap="square" rtlCol="0" anchor="ctr"/>
           <a:lstStyle/>
           <a:p>
-            <a:pPr indent="0" marL="0">
+            <a:pPr marL="0" indent="0">
               <a:lnSpc>
                 <a:spcPts val="1300"/>
               </a:lnSpc>
@@ -6893,7 +6370,7 @@
                 <a:ea typeface="Calibri" pitchFamily="34" charset="-122"/>
                 <a:cs typeface="Calibri" pitchFamily="34" charset="-120"/>
               </a:rPr>
-              <a:t>Business Insight</a:t>
+              <a:t>Model Training &amp; Tuning</a:t>
             </a:r>
             <a:endParaRPr lang="en-US" sz="1150" dirty="0"/>
           </a:p>
@@ -6901,36 +6378,14 @@
       </p:sp>
       <p:sp>
         <p:nvSpPr>
-          <p:cNvPr id="22" name="Shape 15"/>
-          <p:cNvSpPr/>
-          <p:nvPr/>
-        </p:nvSpPr>
-        <p:spPr>
-          <a:xfrm>
-            <a:off x="7589520" y="1783080"/>
-            <a:ext cx="3749040" cy="4206240"/>
-          </a:xfrm>
-          <a:prstGeom prst="roundRect">
-            <a:avLst>
-              <a:gd name="adj" fmla="val 1951"/>
-            </a:avLst>
-          </a:prstGeom>
-          <a:solidFill>
-            <a:srgbClr val="EAF1F7"/>
-          </a:solidFill>
-          <a:ln/>
-        </p:spPr>
-      </p:sp>
-      <p:sp>
-        <p:nvSpPr>
-          <p:cNvPr id="23" name="Shape 16"/>
-          <p:cNvSpPr/>
-          <p:nvPr/>
-        </p:nvSpPr>
-        <p:spPr>
-          <a:xfrm>
-            <a:off x="7909560" y="2103120"/>
-            <a:ext cx="548640" cy="548640"/>
+          <p:cNvPr id="16" name="Shape 11"/>
+          <p:cNvSpPr/>
+          <p:nvPr/>
+        </p:nvSpPr>
+        <p:spPr>
+          <a:xfrm>
+            <a:off x="822960" y="4800600"/>
+            <a:ext cx="502920" cy="502920"/>
           </a:xfrm>
           <a:prstGeom prst="ellipse">
             <a:avLst/>
@@ -6943,7 +6398,7 @@
       </p:sp>
       <p:pic>
         <p:nvPicPr>
-          <p:cNvPr id="24" name="Image 5" descr="/home/claude/churn_ppt/icons/database.png">    </p:cNvPr>
+          <p:cNvPr id="17" name="Image 3" descr="/home/claude/churn_ppt/icons/chartbar.png"/>
           <p:cNvPicPr>
             <a:picLocks noChangeAspect="1"/>
           </p:cNvPicPr>
@@ -6957,6 +6412,200 @@
         </p:blipFill>
         <p:spPr>
           <a:xfrm>
+            <a:off x="936117" y="4913757"/>
+            <a:ext cx="276606" cy="276606"/>
+          </a:xfrm>
+          <a:prstGeom prst="rect">
+            <a:avLst/>
+          </a:prstGeom>
+        </p:spPr>
+      </p:pic>
+      <p:sp>
+        <p:nvSpPr>
+          <p:cNvPr id="18" name="Text 12"/>
+          <p:cNvSpPr/>
+          <p:nvPr/>
+        </p:nvSpPr>
+        <p:spPr>
+          <a:xfrm>
+            <a:off x="1463040" y="4818888"/>
+            <a:ext cx="1554480" cy="502920"/>
+          </a:xfrm>
+          <a:prstGeom prst="rect">
+            <a:avLst/>
+          </a:prstGeom>
+          <a:noFill/>
+          <a:ln/>
+        </p:spPr>
+        <p:txBody>
+          <a:bodyPr wrap="square" rtlCol="0" anchor="ctr"/>
+          <a:lstStyle/>
+          <a:p>
+            <a:pPr marL="0" indent="0">
+              <a:lnSpc>
+                <a:spcPts val="1300"/>
+              </a:lnSpc>
+              <a:buNone/>
+            </a:pPr>
+            <a:r>
+              <a:rPr lang="en-US" sz="1150" dirty="0">
+                <a:solidFill>
+                  <a:srgbClr val="1B2B3A"/>
+                </a:solidFill>
+                <a:latin typeface="Calibri" pitchFamily="34" charset="0"/>
+                <a:ea typeface="Calibri" pitchFamily="34" charset="-122"/>
+                <a:cs typeface="Calibri" pitchFamily="34" charset="-120"/>
+              </a:rPr>
+              <a:t>Model Evaluation</a:t>
+            </a:r>
+            <a:endParaRPr lang="en-US" sz="1150" dirty="0"/>
+          </a:p>
+        </p:txBody>
+      </p:sp>
+      <p:sp>
+        <p:nvSpPr>
+          <p:cNvPr id="19" name="Shape 13"/>
+          <p:cNvSpPr/>
+          <p:nvPr/>
+        </p:nvSpPr>
+        <p:spPr>
+          <a:xfrm>
+            <a:off x="3108960" y="4800600"/>
+            <a:ext cx="502920" cy="502920"/>
+          </a:xfrm>
+          <a:prstGeom prst="ellipse">
+            <a:avLst/>
+          </a:prstGeom>
+          <a:solidFill>
+            <a:srgbClr val="12314F"/>
+          </a:solidFill>
+          <a:ln/>
+        </p:spPr>
+      </p:sp>
+      <p:pic>
+        <p:nvPicPr>
+          <p:cNvPr id="20" name="Image 4" descr="/home/claude/churn_ppt/icons/bulb.png"/>
+          <p:cNvPicPr>
+            <a:picLocks noChangeAspect="1"/>
+          </p:cNvPicPr>
+          <p:nvPr/>
+        </p:nvPicPr>
+        <p:blipFill>
+          <a:blip r:embed="rId7"/>
+          <a:stretch>
+            <a:fillRect/>
+          </a:stretch>
+        </p:blipFill>
+        <p:spPr>
+          <a:xfrm>
+            <a:off x="3222117" y="4913757"/>
+            <a:ext cx="276606" cy="276606"/>
+          </a:xfrm>
+          <a:prstGeom prst="rect">
+            <a:avLst/>
+          </a:prstGeom>
+        </p:spPr>
+      </p:pic>
+      <p:sp>
+        <p:nvSpPr>
+          <p:cNvPr id="21" name="Text 14"/>
+          <p:cNvSpPr/>
+          <p:nvPr/>
+        </p:nvSpPr>
+        <p:spPr>
+          <a:xfrm>
+            <a:off x="3749040" y="4818888"/>
+            <a:ext cx="1554480" cy="502920"/>
+          </a:xfrm>
+          <a:prstGeom prst="rect">
+            <a:avLst/>
+          </a:prstGeom>
+          <a:noFill/>
+          <a:ln/>
+        </p:spPr>
+        <p:txBody>
+          <a:bodyPr wrap="square" rtlCol="0" anchor="ctr"/>
+          <a:lstStyle/>
+          <a:p>
+            <a:pPr marL="0" indent="0">
+              <a:lnSpc>
+                <a:spcPts val="1300"/>
+              </a:lnSpc>
+              <a:buNone/>
+            </a:pPr>
+            <a:r>
+              <a:rPr lang="en-US" sz="1150" dirty="0">
+                <a:solidFill>
+                  <a:srgbClr val="1B2B3A"/>
+                </a:solidFill>
+                <a:latin typeface="Calibri" pitchFamily="34" charset="0"/>
+                <a:ea typeface="Calibri" pitchFamily="34" charset="-122"/>
+                <a:cs typeface="Calibri" pitchFamily="34" charset="-120"/>
+              </a:rPr>
+              <a:t>Business Insight</a:t>
+            </a:r>
+            <a:endParaRPr lang="en-US" sz="1150" dirty="0"/>
+          </a:p>
+        </p:txBody>
+      </p:sp>
+      <p:sp>
+        <p:nvSpPr>
+          <p:cNvPr id="22" name="Shape 15"/>
+          <p:cNvSpPr/>
+          <p:nvPr/>
+        </p:nvSpPr>
+        <p:spPr>
+          <a:xfrm>
+            <a:off x="7589520" y="1783080"/>
+            <a:ext cx="3749040" cy="4206240"/>
+          </a:xfrm>
+          <a:prstGeom prst="roundRect">
+            <a:avLst>
+              <a:gd name="adj" fmla="val 1951"/>
+            </a:avLst>
+          </a:prstGeom>
+          <a:solidFill>
+            <a:srgbClr val="EAF1F7"/>
+          </a:solidFill>
+          <a:ln/>
+        </p:spPr>
+      </p:sp>
+      <p:sp>
+        <p:nvSpPr>
+          <p:cNvPr id="23" name="Shape 16"/>
+          <p:cNvSpPr/>
+          <p:nvPr/>
+        </p:nvSpPr>
+        <p:spPr>
+          <a:xfrm>
+            <a:off x="7909560" y="2103120"/>
+            <a:ext cx="548640" cy="548640"/>
+          </a:xfrm>
+          <a:prstGeom prst="ellipse">
+            <a:avLst/>
+          </a:prstGeom>
+          <a:solidFill>
+            <a:srgbClr val="12314F"/>
+          </a:solidFill>
+          <a:ln/>
+        </p:spPr>
+      </p:sp>
+      <p:pic>
+        <p:nvPicPr>
+          <p:cNvPr id="24" name="Image 5" descr="/home/claude/churn_ppt/icons/database.png"/>
+          <p:cNvPicPr>
+            <a:picLocks noChangeAspect="1"/>
+          </p:cNvPicPr>
+          <p:nvPr/>
+        </p:nvPicPr>
+        <p:blipFill>
+          <a:blip r:embed="rId8"/>
+          <a:stretch>
+            <a:fillRect/>
+          </a:stretch>
+        </p:blipFill>
+        <p:spPr>
+          <a:xfrm>
             <a:off x="8033004" y="2226564"/>
             <a:ext cx="301752" cy="301752"/>
           </a:xfrm>
@@ -6986,7 +6635,7 @@
           <a:bodyPr wrap="square" rtlCol="0" anchor="ctr"/>
           <a:lstStyle/>
           <a:p>
-            <a:pPr indent="0" marL="0">
+            <a:pPr marL="0" indent="0">
               <a:buNone/>
             </a:pPr>
             <a:r>
@@ -7025,7 +6674,7 @@
           <a:bodyPr wrap="square" rtlCol="0" anchor="ctr"/>
           <a:lstStyle/>
           <a:p>
-            <a:pPr indent="0" marL="0">
+            <a:pPr marL="0" indent="0">
               <a:buNone/>
             </a:pPr>
             <a:r>
@@ -7064,7 +6713,7 @@
           <a:bodyPr wrap="square" rtlCol="0" anchor="ctr"/>
           <a:lstStyle/>
           <a:p>
-            <a:pPr indent="0" marL="0">
+            <a:pPr marL="0" indent="0">
               <a:buNone/>
             </a:pPr>
             <a:r>
@@ -7103,7 +6752,7 @@
           <a:bodyPr wrap="square" rtlCol="0" anchor="ctr"/>
           <a:lstStyle/>
           <a:p>
-            <a:pPr indent="0" marL="0">
+            <a:pPr marL="0" indent="0">
               <a:buNone/>
             </a:pPr>
             <a:r>
@@ -7142,7 +6791,7 @@
           <a:bodyPr wrap="square" rtlCol="0" anchor="ctr"/>
           <a:lstStyle/>
           <a:p>
-            <a:pPr indent="0" marL="0">
+            <a:pPr marL="0" indent="0">
               <a:buNone/>
             </a:pPr>
             <a:r>
@@ -7181,7 +6830,7 @@
           <a:bodyPr wrap="square" rtlCol="0" anchor="ctr"/>
           <a:lstStyle/>
           <a:p>
-            <a:pPr indent="0" marL="0">
+            <a:pPr marL="0" indent="0">
               <a:buNone/>
             </a:pPr>
             <a:r>
@@ -7220,7 +6869,7 @@
           <a:bodyPr wrap="square" rtlCol="0" anchor="ctr"/>
           <a:lstStyle/>
           <a:p>
-            <a:pPr indent="0" marL="0">
+            <a:pPr marL="0" indent="0">
               <a:buNone/>
             </a:pPr>
             <a:r>
@@ -7259,7 +6908,7 @@
           <a:bodyPr wrap="square" rtlCol="0" anchor="ctr"/>
           <a:lstStyle/>
           <a:p>
-            <a:pPr algn="l" indent="0" marL="0">
+            <a:pPr marL="0" indent="0" algn="l">
               <a:buNone/>
             </a:pPr>
             <a:r>
@@ -7298,7 +6947,7 @@
           <a:bodyPr wrap="square" rtlCol="0" anchor="ctr"/>
           <a:lstStyle/>
           <a:p>
-            <a:pPr algn="r" indent="0" marL="0">
+            <a:pPr marL="0" indent="0" algn="r">
               <a:buNone/>
             </a:pPr>
             <a:r>
@@ -7332,6 +6981,7 @@
         <a:solidFill>
           <a:srgbClr val="12314F"/>
         </a:solidFill>
+        <a:effectLst/>
       </p:bgPr>
     </p:bg>
     <p:spTree>
@@ -7350,118 +7000,40 @@
       </p:grpSpPr>
       <p:sp>
         <p:nvSpPr>
-          <p:cNvPr id="2" name="Text 0"/>
-          <p:cNvSpPr/>
-          <p:nvPr/>
-        </p:nvSpPr>
-        <p:spPr>
-          <a:xfrm>
-            <a:off x="548640" y="457200"/>
-            <a:ext cx="1097280" cy="1097280"/>
-          </a:xfrm>
-          <a:prstGeom prst="rect">
-            <a:avLst/>
-          </a:prstGeom>
-          <a:noFill/>
-          <a:ln/>
-        </p:spPr>
-        <p:txBody>
-          <a:bodyPr wrap="square" rtlCol="0" anchor="ctr"/>
-          <a:lstStyle/>
-          <a:p>
-            <a:pPr algn="l" indent="0" marL="0">
-              <a:buNone/>
-            </a:pPr>
-            <a:r>
-              <a:rPr lang="en-US" sz="5400" b="1" dirty="0">
-                <a:solidFill>
-                  <a:srgbClr val="1E4A73"/>
+          <p:cNvPr id="4" name="Text 2"/>
+          <p:cNvSpPr/>
+          <p:nvPr/>
+        </p:nvSpPr>
+        <p:spPr>
+          <a:xfrm>
+            <a:off x="822960" y="868680"/>
+            <a:ext cx="10332720" cy="822960"/>
+          </a:xfrm>
+          <a:prstGeom prst="rect">
+            <a:avLst/>
+          </a:prstGeom>
+          <a:noFill/>
+          <a:ln/>
+        </p:spPr>
+        <p:txBody>
+          <a:bodyPr wrap="square" rtlCol="0" anchor="ctr"/>
+          <a:lstStyle/>
+          <a:p>
+            <a:pPr marL="0" indent="0">
+              <a:lnSpc>
+                <a:spcPts val="3200"/>
+              </a:lnSpc>
+              <a:buNone/>
+            </a:pPr>
+            <a:r>
+              <a:rPr lang="en-US" sz="2800" b="1" dirty="0">
+                <a:solidFill>
+                  <a:srgbClr val="FFFFFF"/>
                 </a:solidFill>
                 <a:latin typeface="Cambria" pitchFamily="34" charset="0"/>
                 <a:ea typeface="Cambria" pitchFamily="34" charset="-122"/>
                 <a:cs typeface="Cambria" pitchFamily="34" charset="-120"/>
               </a:rPr>
-              <a:t>C</a:t>
-            </a:r>
-            <a:endParaRPr lang="en-US" sz="5400" dirty="0"/>
-          </a:p>
-        </p:txBody>
-      </p:sp>
-      <p:sp>
-        <p:nvSpPr>
-          <p:cNvPr id="3" name="Text 1"/>
-          <p:cNvSpPr/>
-          <p:nvPr/>
-        </p:nvSpPr>
-        <p:spPr>
-          <a:xfrm>
-            <a:off x="822960" y="502920"/>
-            <a:ext cx="3657600" cy="365760"/>
-          </a:xfrm>
-          <a:prstGeom prst="rect">
-            <a:avLst/>
-          </a:prstGeom>
-          <a:noFill/>
-          <a:ln/>
-        </p:spPr>
-        <p:txBody>
-          <a:bodyPr wrap="square" rtlCol="0" anchor="ctr"/>
-          <a:lstStyle/>
-          <a:p>
-            <a:pPr indent="0" marL="0">
-              <a:buNone/>
-            </a:pPr>
-            <a:r>
-              <a:rPr lang="en-US" sz="1300" b="1" spc="200" kern="0" dirty="0">
-                <a:solidFill>
-                  <a:srgbClr val="E1562B"/>
-                </a:solidFill>
-                <a:latin typeface="Calibri" pitchFamily="34" charset="0"/>
-                <a:ea typeface="Calibri" pitchFamily="34" charset="-122"/>
-                <a:cs typeface="Calibri" pitchFamily="34" charset="-120"/>
-              </a:rPr>
-              <a:t>COMPLICATION</a:t>
-            </a:r>
-            <a:endParaRPr lang="en-US" sz="1300" dirty="0"/>
-          </a:p>
-        </p:txBody>
-      </p:sp>
-      <p:sp>
-        <p:nvSpPr>
-          <p:cNvPr id="4" name="Text 2"/>
-          <p:cNvSpPr/>
-          <p:nvPr/>
-        </p:nvSpPr>
-        <p:spPr>
-          <a:xfrm>
-            <a:off x="822960" y="868680"/>
-            <a:ext cx="10332720" cy="822960"/>
-          </a:xfrm>
-          <a:prstGeom prst="rect">
-            <a:avLst/>
-          </a:prstGeom>
-          <a:noFill/>
-          <a:ln/>
-        </p:spPr>
-        <p:txBody>
-          <a:bodyPr wrap="square" rtlCol="0" anchor="ctr"/>
-          <a:lstStyle/>
-          <a:p>
-            <a:pPr indent="0" marL="0">
-              <a:lnSpc>
-                <a:spcPts val="3200"/>
-              </a:lnSpc>
-              <a:buNone/>
-            </a:pPr>
-            <a:r>
-              <a:rPr lang="en-US" sz="2800" b="1" dirty="0">
-                <a:solidFill>
-                  <a:srgbClr val="FFFFFF"/>
-                </a:solidFill>
-                <a:latin typeface="Cambria" pitchFamily="34" charset="0"/>
-                <a:ea typeface="Cambria" pitchFamily="34" charset="-122"/>
-                <a:cs typeface="Cambria" pitchFamily="34" charset="-120"/>
-              </a:rPr>
               <a:t>Kerugian Akibat Customer Churn Meningkat</a:t>
             </a:r>
             <a:endParaRPr lang="en-US" sz="2800" dirty="0"/>
@@ -7489,7 +7061,7 @@
           <a:bodyPr wrap="square" rtlCol="0" anchor="ctr"/>
           <a:lstStyle/>
           <a:p>
-            <a:pPr indent="0" marL="0">
+            <a:pPr marL="0" indent="0">
               <a:lnSpc>
                 <a:spcPts val="2400"/>
               </a:lnSpc>
@@ -7504,7 +7076,73 @@
                 <a:ea typeface="Calibri" pitchFamily="34" charset="-122"/>
                 <a:cs typeface="Calibri" pitchFamily="34" charset="-120"/>
               </a:rPr>
-              <a:t>Perusahaan mengalami peningkatan kerugian akibat customer churn pada layanan Fixed Broadband. Tim retention perlu bertindak sebelum pelanggan benar-benar berhenti berlangganan — bukan sesudahnya.</a:t>
+              <a:t>Perusahaan mengalami peningkatan kerugian akibat customer churn pada layanan Fixed Broadband. Tim retention perlu bertindak sebelum pelanggan benar-benar </a:t>
+            </a:r>
+            <a:r>
+              <a:rPr lang="en-US" sz="1550" dirty="0" err="1">
+                <a:solidFill>
+                  <a:srgbClr val="C7D8E6"/>
+                </a:solidFill>
+                <a:latin typeface="Calibri" pitchFamily="34" charset="0"/>
+                <a:ea typeface="Calibri" pitchFamily="34" charset="-122"/>
+                <a:cs typeface="Calibri" pitchFamily="34" charset="-120"/>
+              </a:rPr>
+              <a:t>berhenti</a:t>
+            </a:r>
+            <a:r>
+              <a:rPr lang="en-US" sz="1550" dirty="0">
+                <a:solidFill>
+                  <a:srgbClr val="C7D8E6"/>
+                </a:solidFill>
+                <a:latin typeface="Calibri" pitchFamily="34" charset="0"/>
+                <a:ea typeface="Calibri" pitchFamily="34" charset="-122"/>
+                <a:cs typeface="Calibri" pitchFamily="34" charset="-120"/>
+              </a:rPr>
+              <a:t> </a:t>
+            </a:r>
+            <a:r>
+              <a:rPr lang="en-US" sz="1550" dirty="0" err="1">
+                <a:solidFill>
+                  <a:srgbClr val="C7D8E6"/>
+                </a:solidFill>
+                <a:latin typeface="Calibri" pitchFamily="34" charset="0"/>
+                <a:ea typeface="Calibri" pitchFamily="34" charset="-122"/>
+                <a:cs typeface="Calibri" pitchFamily="34" charset="-120"/>
+              </a:rPr>
+              <a:t>berlangganan</a:t>
+            </a:r>
+            <a:r>
+              <a:rPr lang="en-US" sz="1550" dirty="0">
+                <a:solidFill>
+                  <a:srgbClr val="C7D8E6"/>
+                </a:solidFill>
+                <a:latin typeface="Calibri" pitchFamily="34" charset="0"/>
+                <a:ea typeface="Calibri" pitchFamily="34" charset="-122"/>
+                <a:cs typeface="Calibri" pitchFamily="34" charset="-120"/>
+              </a:rPr>
+              <a:t>, </a:t>
+            </a:r>
+            <a:r>
+              <a:rPr lang="en-US" sz="1550" dirty="0" err="1">
+                <a:solidFill>
+                  <a:srgbClr val="C7D8E6"/>
+                </a:solidFill>
+                <a:latin typeface="Calibri" pitchFamily="34" charset="0"/>
+                <a:ea typeface="Calibri" pitchFamily="34" charset="-122"/>
+                <a:cs typeface="Calibri" pitchFamily="34" charset="-120"/>
+              </a:rPr>
+              <a:t>bukan</a:t>
+            </a:r>
+            <a:r>
+              <a:rPr lang="en-US" sz="1550" dirty="0">
+                <a:solidFill>
+                  <a:srgbClr val="C7D8E6"/>
+                </a:solidFill>
+                <a:latin typeface="Calibri" pitchFamily="34" charset="0"/>
+                <a:ea typeface="Calibri" pitchFamily="34" charset="-122"/>
+                <a:cs typeface="Calibri" pitchFamily="34" charset="-120"/>
+              </a:rPr>
+              <a:t> sesudahnya.</a:t>
             </a:r>
             <a:endParaRPr lang="en-US" sz="1550" dirty="0"/>
           </a:p>
@@ -7518,7 +7156,7 @@
         </p:nvSpPr>
         <p:spPr>
           <a:xfrm>
-            <a:off x="822960" y="3246120"/>
+            <a:off x="834390" y="3296920"/>
             <a:ext cx="640080" cy="640080"/>
           </a:xfrm>
           <a:prstGeom prst="ellipse">
@@ -7532,263 +7170,7 @@
       </p:sp>
       <p:pic>
         <p:nvPicPr>
-          <p:cNvPr id="7" name="Image 0" descr="/home/claude/churn_ppt/icons/warning.png">    </p:cNvPr>
-          <p:cNvPicPr>
-            <a:picLocks noChangeAspect="1"/>
-          </p:cNvPicPr>
-          <p:nvPr/>
-        </p:nvPicPr>
-        <p:blipFill>
-          <a:blip r:embed="rId1"/>
-          <a:stretch>
-            <a:fillRect/>
-          </a:stretch>
-        </p:blipFill>
-        <p:spPr>
-          <a:xfrm>
-            <a:off x="982980" y="3406140"/>
-            <a:ext cx="320040" cy="320040"/>
-          </a:xfrm>
-          <a:prstGeom prst="rect">
-            <a:avLst/>
-          </a:prstGeom>
-        </p:spPr>
-      </p:pic>
-      <p:sp>
-        <p:nvSpPr>
-          <p:cNvPr id="8" name="Text 5"/>
-          <p:cNvSpPr/>
-          <p:nvPr/>
-        </p:nvSpPr>
-        <p:spPr>
-          <a:xfrm>
-            <a:off x="1645920" y="3200400"/>
-            <a:ext cx="5669280" cy="1005840"/>
-          </a:xfrm>
-          <a:prstGeom prst="rect">
-            <a:avLst/>
-          </a:prstGeom>
-          <a:noFill/>
-          <a:ln/>
-        </p:spPr>
-        <p:txBody>
-          <a:bodyPr wrap="square" rtlCol="0" anchor="ctr"/>
-          <a:lstStyle/>
-          <a:p>
-            <a:pPr indent="0" marL="0">
-              <a:lnSpc>
-                <a:spcPts val="2000"/>
-              </a:lnSpc>
-              <a:buNone/>
-            </a:pPr>
-            <a:r>
-              <a:rPr lang="en-US" sz="1400" b="1" dirty="0">
-                <a:solidFill>
-                  <a:srgbClr val="FFFFFF"/>
-                </a:solidFill>
-                <a:latin typeface="Calibri" pitchFamily="34" charset="0"/>
-                <a:ea typeface="Calibri" pitchFamily="34" charset="-122"/>
-                <a:cs typeface="Calibri" pitchFamily="34" charset="-120"/>
-              </a:rPr>
-              <a:t>Tim bisnis ingin mengetahui pelanggan yang berpotensi churn dalam 3 bulan ke depan, agar retention dapat mengambil tindakan proaktif.</a:t>
-            </a:r>
-            <a:endParaRPr lang="en-US" sz="1400" dirty="0"/>
-          </a:p>
-        </p:txBody>
-      </p:sp>
-      <p:sp>
-        <p:nvSpPr>
-          <p:cNvPr id="9" name="Shape 6"/>
-          <p:cNvSpPr/>
-          <p:nvPr/>
-        </p:nvSpPr>
-        <p:spPr>
-          <a:xfrm>
-            <a:off x="7772400" y="1828800"/>
-            <a:ext cx="3931920" cy="4206240"/>
-          </a:xfrm>
-          <a:prstGeom prst="roundRect">
-            <a:avLst>
-              <a:gd name="adj" fmla="val 1860"/>
-            </a:avLst>
-          </a:prstGeom>
-          <a:solidFill>
-            <a:srgbClr val="1A3E60"/>
-          </a:solidFill>
-          <a:ln/>
-        </p:spPr>
-      </p:sp>
-      <p:sp>
-        <p:nvSpPr>
-          <p:cNvPr id="10" name="Shape 7"/>
-          <p:cNvSpPr/>
-          <p:nvPr/>
-        </p:nvSpPr>
-        <p:spPr>
-          <a:xfrm>
-            <a:off x="8092440" y="2148840"/>
-            <a:ext cx="502920" cy="502920"/>
-          </a:xfrm>
-          <a:prstGeom prst="ellipse">
-            <a:avLst/>
-          </a:prstGeom>
-          <a:solidFill>
-            <a:srgbClr val="E1562B"/>
-          </a:solidFill>
-          <a:ln/>
-        </p:spPr>
-      </p:sp>
-      <p:pic>
-        <p:nvPicPr>
-          <p:cNvPr id="11" name="Image 1" descr="/home/claude/churn_ppt/icons/times.png">    </p:cNvPr>
-          <p:cNvPicPr>
-            <a:picLocks noChangeAspect="1"/>
-          </p:cNvPicPr>
-          <p:nvPr/>
-        </p:nvPicPr>
-        <p:blipFill>
-          <a:blip r:embed="rId2"/>
-          <a:stretch>
-            <a:fillRect/>
-          </a:stretch>
-        </p:blipFill>
-        <p:spPr>
-          <a:xfrm>
-            <a:off x="8205597" y="2261997"/>
-            <a:ext cx="276606" cy="276606"/>
-          </a:xfrm>
-          <a:prstGeom prst="rect">
-            <a:avLst/>
-          </a:prstGeom>
-        </p:spPr>
-      </p:pic>
-      <p:sp>
-        <p:nvSpPr>
-          <p:cNvPr id="12" name="Text 8"/>
-          <p:cNvSpPr/>
-          <p:nvPr/>
-        </p:nvSpPr>
-        <p:spPr>
-          <a:xfrm>
-            <a:off x="8092440" y="2788920"/>
-            <a:ext cx="3291840" cy="365760"/>
-          </a:xfrm>
-          <a:prstGeom prst="rect">
-            <a:avLst/>
-          </a:prstGeom>
-          <a:noFill/>
-          <a:ln/>
-        </p:spPr>
-        <p:txBody>
-          <a:bodyPr wrap="square" rtlCol="0" anchor="ctr"/>
-          <a:lstStyle/>
-          <a:p>
-            <a:pPr indent="0" marL="0">
-              <a:buNone/>
-            </a:pPr>
-            <a:r>
-              <a:rPr lang="en-US" sz="1500" b="1" dirty="0">
-                <a:solidFill>
-                  <a:srgbClr val="FFFFFF"/>
-                </a:solidFill>
-                <a:latin typeface="Calibri" pitchFamily="34" charset="0"/>
-                <a:ea typeface="Calibri" pitchFamily="34" charset="-122"/>
-                <a:cs typeface="Calibri" pitchFamily="34" charset="-120"/>
-              </a:rPr>
-              <a:t>Tanpa Prediksi</a:t>
-            </a:r>
-            <a:endParaRPr lang="en-US" sz="1500" dirty="0"/>
-          </a:p>
-        </p:txBody>
-      </p:sp>
-      <p:sp>
-        <p:nvSpPr>
-          <p:cNvPr id="13" name="Text 9"/>
-          <p:cNvSpPr/>
-          <p:nvPr/>
-        </p:nvSpPr>
-        <p:spPr>
-          <a:xfrm>
-            <a:off x="8092440" y="3200400"/>
-            <a:ext cx="3291840" cy="1280160"/>
-          </a:xfrm>
-          <a:prstGeom prst="rect">
-            <a:avLst/>
-          </a:prstGeom>
-          <a:noFill/>
-          <a:ln/>
-        </p:spPr>
-        <p:txBody>
-          <a:bodyPr wrap="square" rtlCol="0" anchor="ctr"/>
-          <a:lstStyle/>
-          <a:p>
-            <a:pPr indent="0" marL="0">
-              <a:lnSpc>
-                <a:spcPts val="1800"/>
-              </a:lnSpc>
-              <a:buNone/>
-            </a:pPr>
-            <a:r>
-              <a:rPr lang="en-US" sz="1250" dirty="0">
-                <a:solidFill>
-                  <a:srgbClr val="C7D8E6"/>
-                </a:solidFill>
-                <a:latin typeface="Calibri" pitchFamily="34" charset="0"/>
-                <a:ea typeface="Calibri" pitchFamily="34" charset="-122"/>
-                <a:cs typeface="Calibri" pitchFamily="34" charset="-120"/>
-              </a:rPr>
-              <a:t>Tim retention baru bertindak setelah pelanggan mengajukan berhenti berlangganan — sudah terlambat untuk mempertahankan.</a:t>
-            </a:r>
-            <a:endParaRPr lang="en-US" sz="1250" dirty="0"/>
-          </a:p>
-        </p:txBody>
-      </p:sp>
-      <p:sp>
-        <p:nvSpPr>
-          <p:cNvPr id="14" name="Shape 10"/>
-          <p:cNvSpPr/>
-          <p:nvPr/>
-        </p:nvSpPr>
-        <p:spPr>
-          <a:xfrm>
-            <a:off x="8001000" y="4709160"/>
-            <a:ext cx="3474720" cy="0"/>
-          </a:xfrm>
-          <a:prstGeom prst="line">
-            <a:avLst/>
-          </a:prstGeom>
-          <a:noFill/>
-          <a:ln w="12700">
-            <a:solidFill>
-              <a:srgbClr val="3A5C7D"/>
-            </a:solidFill>
-            <a:prstDash val="solid"/>
-          </a:ln>
-        </p:spPr>
-      </p:sp>
-      <p:sp>
-        <p:nvSpPr>
-          <p:cNvPr id="15" name="Shape 11"/>
-          <p:cNvSpPr/>
-          <p:nvPr/>
-        </p:nvSpPr>
-        <p:spPr>
-          <a:xfrm>
-            <a:off x="8092440" y="4892040"/>
-            <a:ext cx="502920" cy="502920"/>
-          </a:xfrm>
-          <a:prstGeom prst="ellipse">
-            <a:avLst/>
-          </a:prstGeom>
-          <a:solidFill>
-            <a:srgbClr val="1C7A4E"/>
-          </a:solidFill>
-          <a:ln/>
-        </p:spPr>
-      </p:sp>
-      <p:pic>
-        <p:nvPicPr>
-          <p:cNvPr id="16" name="Image 2" descr="/home/claude/churn_ppt/icons/check.png">    </p:cNvPr>
+          <p:cNvPr id="7" name="Image 0" descr="/home/claude/churn_ppt/icons/warning.png"/>
           <p:cNvPicPr>
             <a:picLocks noChangeAspect="1"/>
           </p:cNvPicPr>
@@ -7802,7 +7184,115 @@
         </p:blipFill>
         <p:spPr>
           <a:xfrm>
-            <a:off x="8205597" y="5005197"/>
+            <a:off x="982980" y="3406140"/>
+            <a:ext cx="320040" cy="320040"/>
+          </a:xfrm>
+          <a:prstGeom prst="rect">
+            <a:avLst/>
+          </a:prstGeom>
+        </p:spPr>
+      </p:pic>
+      <p:sp>
+        <p:nvSpPr>
+          <p:cNvPr id="8" name="Text 5"/>
+          <p:cNvSpPr/>
+          <p:nvPr/>
+        </p:nvSpPr>
+        <p:spPr>
+          <a:xfrm>
+            <a:off x="1645920" y="3058160"/>
+            <a:ext cx="5669280" cy="1005840"/>
+          </a:xfrm>
+          <a:prstGeom prst="rect">
+            <a:avLst/>
+          </a:prstGeom>
+          <a:noFill/>
+          <a:ln/>
+        </p:spPr>
+        <p:txBody>
+          <a:bodyPr wrap="square" rtlCol="0" anchor="ctr"/>
+          <a:lstStyle/>
+          <a:p>
+            <a:pPr marL="0" indent="0">
+              <a:lnSpc>
+                <a:spcPts val="2000"/>
+              </a:lnSpc>
+              <a:buNone/>
+            </a:pPr>
+            <a:r>
+              <a:rPr lang="en-US" sz="1400" b="1" dirty="0">
+                <a:solidFill>
+                  <a:srgbClr val="FFFFFF"/>
+                </a:solidFill>
+                <a:latin typeface="Calibri" pitchFamily="34" charset="0"/>
+                <a:ea typeface="Calibri" pitchFamily="34" charset="-122"/>
+                <a:cs typeface="Calibri" pitchFamily="34" charset="-120"/>
+              </a:rPr>
+              <a:t>Tim bisnis ingin mengetahui pelanggan yang berpotensi churn dalam 3 bulan ke depan, agar retention dapat mengambil tindakan proaktif.</a:t>
+            </a:r>
+            <a:endParaRPr lang="en-US" sz="1400" dirty="0"/>
+          </a:p>
+        </p:txBody>
+      </p:sp>
+      <p:sp>
+        <p:nvSpPr>
+          <p:cNvPr id="9" name="Shape 6"/>
+          <p:cNvSpPr/>
+          <p:nvPr/>
+        </p:nvSpPr>
+        <p:spPr>
+          <a:xfrm>
+            <a:off x="7772400" y="1828800"/>
+            <a:ext cx="3931920" cy="4206240"/>
+          </a:xfrm>
+          <a:prstGeom prst="roundRect">
+            <a:avLst>
+              <a:gd name="adj" fmla="val 1860"/>
+            </a:avLst>
+          </a:prstGeom>
+          <a:solidFill>
+            <a:srgbClr val="1A3E60"/>
+          </a:solidFill>
+          <a:ln/>
+        </p:spPr>
+      </p:sp>
+      <p:sp>
+        <p:nvSpPr>
+          <p:cNvPr id="10" name="Shape 7"/>
+          <p:cNvSpPr/>
+          <p:nvPr/>
+        </p:nvSpPr>
+        <p:spPr>
+          <a:xfrm>
+            <a:off x="8092440" y="2148840"/>
+            <a:ext cx="502920" cy="502920"/>
+          </a:xfrm>
+          <a:prstGeom prst="ellipse">
+            <a:avLst/>
+          </a:prstGeom>
+          <a:solidFill>
+            <a:srgbClr val="E1562B"/>
+          </a:solidFill>
+          <a:ln/>
+        </p:spPr>
+      </p:sp>
+      <p:pic>
+        <p:nvPicPr>
+          <p:cNvPr id="11" name="Image 1" descr="/home/claude/churn_ppt/icons/times.png"/>
+          <p:cNvPicPr>
+            <a:picLocks noChangeAspect="1"/>
+          </p:cNvPicPr>
+          <p:nvPr/>
+        </p:nvPicPr>
+        <p:blipFill>
+          <a:blip r:embed="rId4"/>
+          <a:stretch>
+            <a:fillRect/>
+          </a:stretch>
+        </p:blipFill>
+        <p:spPr>
+          <a:xfrm>
+            <a:off x="8205597" y="2261997"/>
             <a:ext cx="276606" cy="276606"/>
           </a:xfrm>
           <a:prstGeom prst="rect">
@@ -7812,13 +7302,13 @@
       </p:pic>
       <p:sp>
         <p:nvSpPr>
-          <p:cNvPr id="17" name="Text 12"/>
-          <p:cNvSpPr/>
-          <p:nvPr/>
-        </p:nvSpPr>
-        <p:spPr>
-          <a:xfrm>
-            <a:off x="8092440" y="5532120"/>
+          <p:cNvPr id="12" name="Text 8"/>
+          <p:cNvSpPr/>
+          <p:nvPr/>
+        </p:nvSpPr>
+        <p:spPr>
+          <a:xfrm>
+            <a:off x="8092440" y="2687320"/>
             <a:ext cx="3291840" cy="365760"/>
           </a:xfrm>
           <a:prstGeom prst="rect">
@@ -7831,7 +7321,7 @@
           <a:bodyPr wrap="square" rtlCol="0" anchor="ctr"/>
           <a:lstStyle/>
           <a:p>
-            <a:pPr indent="0" marL="0">
+            <a:pPr marL="0" indent="0">
               <a:buNone/>
             </a:pPr>
             <a:r>
@@ -7843,7 +7333,7 @@
                 <a:ea typeface="Calibri" pitchFamily="34" charset="-122"/>
                 <a:cs typeface="Calibri" pitchFamily="34" charset="-120"/>
               </a:rPr>
-              <a:t>Dengan Prediksi</a:t>
+              <a:t>Tanpa Prediksi</a:t>
             </a:r>
             <a:endParaRPr lang="en-US" sz="1500" dirty="0"/>
           </a:p>
@@ -7851,26 +7341,26 @@
       </p:sp>
       <p:sp>
         <p:nvSpPr>
-          <p:cNvPr id="18" name="Text 13"/>
-          <p:cNvSpPr/>
-          <p:nvPr/>
-        </p:nvSpPr>
-        <p:spPr>
-          <a:xfrm>
-            <a:off x="8092440" y="5943600"/>
-            <a:ext cx="3291840" cy="1280160"/>
-          </a:xfrm>
-          <a:prstGeom prst="rect">
-            <a:avLst/>
-          </a:prstGeom>
-          <a:noFill/>
-          <a:ln/>
-        </p:spPr>
-        <p:txBody>
-          <a:bodyPr wrap="square" rtlCol="0" anchor="ctr"/>
-          <a:lstStyle/>
-          <a:p>
-            <a:pPr indent="0" marL="0">
+          <p:cNvPr id="13" name="Text 9"/>
+          <p:cNvSpPr/>
+          <p:nvPr/>
+        </p:nvSpPr>
+        <p:spPr>
+          <a:xfrm>
+            <a:off x="8092440" y="3007360"/>
+            <a:ext cx="3383280" cy="914399"/>
+          </a:xfrm>
+          <a:prstGeom prst="rect">
+            <a:avLst/>
+          </a:prstGeom>
+          <a:noFill/>
+          <a:ln/>
+        </p:spPr>
+        <p:txBody>
+          <a:bodyPr wrap="square" rtlCol="0" anchor="ctr"/>
+          <a:lstStyle/>
+          <a:p>
+            <a:pPr marL="0" indent="0">
               <a:lnSpc>
                 <a:spcPts val="1800"/>
               </a:lnSpc>
@@ -7885,6 +7375,220 @@
                 <a:ea typeface="Calibri" pitchFamily="34" charset="-122"/>
                 <a:cs typeface="Calibri" pitchFamily="34" charset="-120"/>
               </a:rPr>
+              <a:t>Tim retention baru bertindak setelah pelanggan mengajukan </a:t>
+            </a:r>
+            <a:r>
+              <a:rPr lang="en-US" sz="1250" dirty="0" err="1">
+                <a:solidFill>
+                  <a:srgbClr val="C7D8E6"/>
+                </a:solidFill>
+                <a:latin typeface="Calibri" pitchFamily="34" charset="0"/>
+                <a:ea typeface="Calibri" pitchFamily="34" charset="-122"/>
+                <a:cs typeface="Calibri" pitchFamily="34" charset="-120"/>
+              </a:rPr>
+              <a:t>berhenti</a:t>
+            </a:r>
+            <a:r>
+              <a:rPr lang="en-US" sz="1250" dirty="0">
+                <a:solidFill>
+                  <a:srgbClr val="C7D8E6"/>
+                </a:solidFill>
+                <a:latin typeface="Calibri" pitchFamily="34" charset="0"/>
+                <a:ea typeface="Calibri" pitchFamily="34" charset="-122"/>
+                <a:cs typeface="Calibri" pitchFamily="34" charset="-120"/>
+              </a:rPr>
+              <a:t> </a:t>
+            </a:r>
+            <a:r>
+              <a:rPr lang="en-US" sz="1250" dirty="0" err="1">
+                <a:solidFill>
+                  <a:srgbClr val="C7D8E6"/>
+                </a:solidFill>
+                <a:latin typeface="Calibri" pitchFamily="34" charset="0"/>
+                <a:ea typeface="Calibri" pitchFamily="34" charset="-122"/>
+                <a:cs typeface="Calibri" pitchFamily="34" charset="-120"/>
+              </a:rPr>
+              <a:t>berlangganan</a:t>
+            </a:r>
+            <a:r>
+              <a:rPr lang="en-US" sz="1250" dirty="0">
+                <a:solidFill>
+                  <a:srgbClr val="C7D8E6"/>
+                </a:solidFill>
+                <a:latin typeface="Calibri" pitchFamily="34" charset="0"/>
+                <a:ea typeface="Calibri" pitchFamily="34" charset="-122"/>
+                <a:cs typeface="Calibri" pitchFamily="34" charset="-120"/>
+              </a:rPr>
+              <a:t>. Yang </a:t>
+            </a:r>
+            <a:r>
+              <a:rPr lang="en-US" sz="1250" dirty="0" err="1">
+                <a:solidFill>
+                  <a:srgbClr val="C7D8E6"/>
+                </a:solidFill>
+                <a:latin typeface="Calibri" pitchFamily="34" charset="0"/>
+                <a:ea typeface="Calibri" pitchFamily="34" charset="-122"/>
+                <a:cs typeface="Calibri" pitchFamily="34" charset="-120"/>
+              </a:rPr>
+              <a:t>artinya</a:t>
+            </a:r>
+            <a:r>
+              <a:rPr lang="en-US" sz="1250" dirty="0">
+                <a:solidFill>
+                  <a:srgbClr val="C7D8E6"/>
+                </a:solidFill>
+                <a:latin typeface="Calibri" pitchFamily="34" charset="0"/>
+                <a:ea typeface="Calibri" pitchFamily="34" charset="-122"/>
+                <a:cs typeface="Calibri" pitchFamily="34" charset="-120"/>
+              </a:rPr>
+              <a:t> sudah terlambat untuk mempertahankan.</a:t>
+            </a:r>
+            <a:endParaRPr lang="en-US" sz="1250" dirty="0"/>
+          </a:p>
+        </p:txBody>
+      </p:sp>
+      <p:sp>
+        <p:nvSpPr>
+          <p:cNvPr id="14" name="Shape 10"/>
+          <p:cNvSpPr/>
+          <p:nvPr/>
+        </p:nvSpPr>
+        <p:spPr>
+          <a:xfrm>
+            <a:off x="8001000" y="3916680"/>
+            <a:ext cx="3474720" cy="0"/>
+          </a:xfrm>
+          <a:prstGeom prst="line">
+            <a:avLst/>
+          </a:prstGeom>
+          <a:noFill/>
+          <a:ln w="12700">
+            <a:solidFill>
+              <a:srgbClr val="3A5C7D"/>
+            </a:solidFill>
+            <a:prstDash val="solid"/>
+          </a:ln>
+        </p:spPr>
+      </p:sp>
+      <p:sp>
+        <p:nvSpPr>
+          <p:cNvPr id="15" name="Shape 11"/>
+          <p:cNvSpPr/>
+          <p:nvPr/>
+        </p:nvSpPr>
+        <p:spPr>
+          <a:xfrm>
+            <a:off x="8092440" y="4018280"/>
+            <a:ext cx="502920" cy="502920"/>
+          </a:xfrm>
+          <a:prstGeom prst="ellipse">
+            <a:avLst/>
+          </a:prstGeom>
+          <a:solidFill>
+            <a:srgbClr val="1C7A4E"/>
+          </a:solidFill>
+          <a:ln/>
+        </p:spPr>
+      </p:sp>
+      <p:pic>
+        <p:nvPicPr>
+          <p:cNvPr id="16" name="Image 2" descr="/home/claude/churn_ppt/icons/check.png"/>
+          <p:cNvPicPr>
+            <a:picLocks noChangeAspect="1"/>
+          </p:cNvPicPr>
+          <p:nvPr/>
+        </p:nvPicPr>
+        <p:blipFill>
+          <a:blip r:embed="rId5"/>
+          <a:stretch>
+            <a:fillRect/>
+          </a:stretch>
+        </p:blipFill>
+        <p:spPr>
+          <a:xfrm>
+            <a:off x="8205597" y="4131437"/>
+            <a:ext cx="276606" cy="276606"/>
+          </a:xfrm>
+          <a:prstGeom prst="rect">
+            <a:avLst/>
+          </a:prstGeom>
+        </p:spPr>
+      </p:pic>
+      <p:sp>
+        <p:nvSpPr>
+          <p:cNvPr id="17" name="Text 12"/>
+          <p:cNvSpPr/>
+          <p:nvPr/>
+        </p:nvSpPr>
+        <p:spPr>
+          <a:xfrm>
+            <a:off x="8092440" y="4526280"/>
+            <a:ext cx="3291840" cy="365760"/>
+          </a:xfrm>
+          <a:prstGeom prst="rect">
+            <a:avLst/>
+          </a:prstGeom>
+          <a:noFill/>
+          <a:ln/>
+        </p:spPr>
+        <p:txBody>
+          <a:bodyPr wrap="square" rtlCol="0" anchor="ctr"/>
+          <a:lstStyle/>
+          <a:p>
+            <a:pPr marL="0" indent="0">
+              <a:buNone/>
+            </a:pPr>
+            <a:r>
+              <a:rPr lang="en-US" sz="1500" b="1" dirty="0">
+                <a:solidFill>
+                  <a:srgbClr val="FFFFFF"/>
+                </a:solidFill>
+                <a:latin typeface="Calibri" pitchFamily="34" charset="0"/>
+                <a:ea typeface="Calibri" pitchFamily="34" charset="-122"/>
+                <a:cs typeface="Calibri" pitchFamily="34" charset="-120"/>
+              </a:rPr>
+              <a:t>Dengan Prediksi</a:t>
+            </a:r>
+            <a:endParaRPr lang="en-US" sz="1500" dirty="0"/>
+          </a:p>
+        </p:txBody>
+      </p:sp>
+      <p:sp>
+        <p:nvSpPr>
+          <p:cNvPr id="18" name="Text 13"/>
+          <p:cNvSpPr/>
+          <p:nvPr/>
+        </p:nvSpPr>
+        <p:spPr>
+          <a:xfrm>
+            <a:off x="8092440" y="4937760"/>
+            <a:ext cx="3291840" cy="965200"/>
+          </a:xfrm>
+          <a:prstGeom prst="rect">
+            <a:avLst/>
+          </a:prstGeom>
+          <a:noFill/>
+          <a:ln/>
+        </p:spPr>
+        <p:txBody>
+          <a:bodyPr wrap="square" rtlCol="0" anchor="ctr"/>
+          <a:lstStyle/>
+          <a:p>
+            <a:pPr marL="0" indent="0">
+              <a:lnSpc>
+                <a:spcPts val="1800"/>
+              </a:lnSpc>
+              <a:buNone/>
+            </a:pPr>
+            <a:r>
+              <a:rPr lang="en-US" sz="1250" dirty="0">
+                <a:solidFill>
+                  <a:srgbClr val="C7D8E6"/>
+                </a:solidFill>
+                <a:latin typeface="Calibri" pitchFamily="34" charset="0"/>
+                <a:ea typeface="Calibri" pitchFamily="34" charset="-122"/>
+                <a:cs typeface="Calibri" pitchFamily="34" charset="-120"/>
+              </a:rPr>
               <a:t>Model memberi peringatan dini 3 bulan sebelumnya, sehingga tim retention dapat menawarkan intervensi tepat sasaran sebelum pelanggan benar-benar berhenti.</a:t>
             </a:r>
             <a:endParaRPr lang="en-US" sz="1250" dirty="0"/>
@@ -7912,7 +7616,7 @@
           <a:bodyPr wrap="square" rtlCol="0" anchor="ctr"/>
           <a:lstStyle/>
           <a:p>
-            <a:pPr algn="l" indent="0" marL="0">
+            <a:pPr marL="0" indent="0" algn="l">
               <a:buNone/>
             </a:pPr>
             <a:r>
@@ -7951,7 +7655,7 @@
           <a:bodyPr wrap="square" rtlCol="0" anchor="ctr"/>
           <a:lstStyle/>
           <a:p>
-            <a:pPr algn="r" indent="0" marL="0">
+            <a:pPr marL="0" indent="0" algn="r">
               <a:buNone/>
             </a:pPr>
             <a:r>
@@ -7985,6 +7689,7 @@
         <a:solidFill>
           <a:srgbClr val="FFFFFF"/>
         </a:solidFill>
+        <a:effectLst/>
       </p:bgPr>
     </p:bg>
     <p:spTree>
@@ -8003,84 +7708,6 @@
       </p:grpSpPr>
       <p:sp>
         <p:nvSpPr>
-          <p:cNvPr id="2" name="Text 0"/>
-          <p:cNvSpPr/>
-          <p:nvPr/>
-        </p:nvSpPr>
-        <p:spPr>
-          <a:xfrm>
-            <a:off x="548640" y="457200"/>
-            <a:ext cx="1097280" cy="1097280"/>
-          </a:xfrm>
-          <a:prstGeom prst="rect">
-            <a:avLst/>
-          </a:prstGeom>
-          <a:noFill/>
-          <a:ln/>
-        </p:spPr>
-        <p:txBody>
-          <a:bodyPr wrap="square" rtlCol="0" anchor="ctr"/>
-          <a:lstStyle/>
-          <a:p>
-            <a:pPr indent="0" marL="0">
-              <a:buNone/>
-            </a:pPr>
-            <a:r>
-              <a:rPr lang="en-US" sz="5400" b="1" dirty="0">
-                <a:solidFill>
-                  <a:srgbClr val="EAF1F7"/>
-                </a:solidFill>
-                <a:latin typeface="Cambria" pitchFamily="34" charset="0"/>
-                <a:ea typeface="Cambria" pitchFamily="34" charset="-122"/>
-                <a:cs typeface="Cambria" pitchFamily="34" charset="-120"/>
-              </a:rPr>
-              <a:t>Q</a:t>
-            </a:r>
-            <a:endParaRPr lang="en-US" sz="5400" dirty="0"/>
-          </a:p>
-        </p:txBody>
-      </p:sp>
-      <p:sp>
-        <p:nvSpPr>
-          <p:cNvPr id="3" name="Text 1"/>
-          <p:cNvSpPr/>
-          <p:nvPr/>
-        </p:nvSpPr>
-        <p:spPr>
-          <a:xfrm>
-            <a:off x="822960" y="502920"/>
-            <a:ext cx="3657600" cy="365760"/>
-          </a:xfrm>
-          <a:prstGeom prst="rect">
-            <a:avLst/>
-          </a:prstGeom>
-          <a:noFill/>
-          <a:ln/>
-        </p:spPr>
-        <p:txBody>
-          <a:bodyPr wrap="square" rtlCol="0" anchor="ctr"/>
-          <a:lstStyle/>
-          <a:p>
-            <a:pPr indent="0" marL="0">
-              <a:buNone/>
-            </a:pPr>
-            <a:r>
-              <a:rPr lang="en-US" sz="1300" b="1" spc="200" kern="0" dirty="0">
-                <a:solidFill>
-                  <a:srgbClr val="E1562B"/>
-                </a:solidFill>
-                <a:latin typeface="Calibri" pitchFamily="34" charset="0"/>
-                <a:ea typeface="Calibri" pitchFamily="34" charset="-122"/>
-                <a:cs typeface="Calibri" pitchFamily="34" charset="-120"/>
-              </a:rPr>
-              <a:t>QUESTION</a:t>
-            </a:r>
-            <a:endParaRPr lang="en-US" sz="1300" dirty="0"/>
-          </a:p>
-        </p:txBody>
-      </p:sp>
-      <p:sp>
-        <p:nvSpPr>
           <p:cNvPr id="4" name="Text 2"/>
           <p:cNvSpPr/>
           <p:nvPr/>
@@ -8100,7 +7727,7 @@
           <a:bodyPr wrap="square" rtlCol="0" anchor="ctr"/>
           <a:lstStyle/>
           <a:p>
-            <a:pPr algn="l" indent="0" marL="0">
+            <a:pPr marL="0" indent="0" algn="l">
               <a:lnSpc>
                 <a:spcPts val="3600"/>
               </a:lnSpc>
@@ -8188,223 +7815,7 @@
       </p:sp>
       <p:pic>
         <p:nvPicPr>
-          <p:cNvPr id="8" name="Image 0" descr="/home/claude/churn_ppt/icons/target.png">    </p:cNvPr>
-          <p:cNvPicPr>
-            <a:picLocks noChangeAspect="1"/>
-          </p:cNvPicPr>
-          <p:nvPr/>
-        </p:nvPicPr>
-        <p:blipFill>
-          <a:blip r:embed="rId1"/>
-          <a:stretch>
-            <a:fillRect/>
-          </a:stretch>
-        </p:blipFill>
-        <p:spPr>
-          <a:xfrm>
-            <a:off x="1303020" y="3863340"/>
-            <a:ext cx="320040" cy="320040"/>
-          </a:xfrm>
-          <a:prstGeom prst="rect">
-            <a:avLst/>
-          </a:prstGeom>
-        </p:spPr>
-      </p:pic>
-      <p:sp>
-        <p:nvSpPr>
-          <p:cNvPr id="9" name="Text 6"/>
-          <p:cNvSpPr/>
-          <p:nvPr/>
-        </p:nvSpPr>
-        <p:spPr>
-          <a:xfrm>
-            <a:off x="1097280" y="4526280"/>
-            <a:ext cx="2834640" cy="1371600"/>
-          </a:xfrm>
-          <a:prstGeom prst="rect">
-            <a:avLst/>
-          </a:prstGeom>
-          <a:noFill/>
-          <a:ln/>
-        </p:spPr>
-        <p:txBody>
-          <a:bodyPr wrap="square" rtlCol="0" anchor="ctr"/>
-          <a:lstStyle/>
-          <a:p>
-            <a:pPr indent="0" marL="0">
-              <a:lnSpc>
-                <a:spcPts val="1900"/>
-              </a:lnSpc>
-              <a:buNone/>
-            </a:pPr>
-            <a:r>
-              <a:rPr lang="en-US" sz="1350" b="1" dirty="0">
-                <a:solidFill>
-                  <a:srgbClr val="1B2B3A"/>
-                </a:solidFill>
-                <a:latin typeface="Calibri" pitchFamily="34" charset="0"/>
-                <a:ea typeface="Calibri" pitchFamily="34" charset="-122"/>
-                <a:cs typeface="Calibri" pitchFamily="34" charset="-120"/>
-              </a:rPr>
-              <a:t>Fitur pelanggan mana yang paling memengaruhi keputusan churn?</a:t>
-            </a:r>
-            <a:endParaRPr lang="en-US" sz="1350" dirty="0"/>
-          </a:p>
-        </p:txBody>
-      </p:sp>
-      <p:sp>
-        <p:nvSpPr>
-          <p:cNvPr id="10" name="Shape 7"/>
-          <p:cNvSpPr/>
-          <p:nvPr/>
-        </p:nvSpPr>
-        <p:spPr>
-          <a:xfrm>
-            <a:off x="4526280" y="3383280"/>
-            <a:ext cx="3383280" cy="2651760"/>
-          </a:xfrm>
-          <a:prstGeom prst="roundRect">
-            <a:avLst>
-              <a:gd name="adj" fmla="val 2759"/>
-            </a:avLst>
-          </a:prstGeom>
-          <a:solidFill>
-            <a:srgbClr val="EAF1F7"/>
-          </a:solidFill>
-          <a:ln/>
-        </p:spPr>
-      </p:sp>
-      <p:sp>
-        <p:nvSpPr>
-          <p:cNvPr id="11" name="Shape 8"/>
-          <p:cNvSpPr/>
-          <p:nvPr/>
-        </p:nvSpPr>
-        <p:spPr>
-          <a:xfrm>
-            <a:off x="4846320" y="3703320"/>
-            <a:ext cx="640080" cy="640080"/>
-          </a:xfrm>
-          <a:prstGeom prst="ellipse">
-            <a:avLst/>
-          </a:prstGeom>
-          <a:solidFill>
-            <a:srgbClr val="12314F"/>
-          </a:solidFill>
-          <a:ln/>
-        </p:spPr>
-      </p:sp>
-      <p:pic>
-        <p:nvPicPr>
-          <p:cNvPr id="12" name="Image 1" descr="/home/claude/churn_ppt/icons/brain.png">    </p:cNvPr>
-          <p:cNvPicPr>
-            <a:picLocks noChangeAspect="1"/>
-          </p:cNvPicPr>
-          <p:nvPr/>
-        </p:nvPicPr>
-        <p:blipFill>
-          <a:blip r:embed="rId2"/>
-          <a:stretch>
-            <a:fillRect/>
-          </a:stretch>
-        </p:blipFill>
-        <p:spPr>
-          <a:xfrm>
-            <a:off x="5006340" y="3863340"/>
-            <a:ext cx="320040" cy="320040"/>
-          </a:xfrm>
-          <a:prstGeom prst="rect">
-            <a:avLst/>
-          </a:prstGeom>
-        </p:spPr>
-      </p:pic>
-      <p:sp>
-        <p:nvSpPr>
-          <p:cNvPr id="13" name="Text 9"/>
-          <p:cNvSpPr/>
-          <p:nvPr/>
-        </p:nvSpPr>
-        <p:spPr>
-          <a:xfrm>
-            <a:off x="4800600" y="4526280"/>
-            <a:ext cx="2834640" cy="1371600"/>
-          </a:xfrm>
-          <a:prstGeom prst="rect">
-            <a:avLst/>
-          </a:prstGeom>
-          <a:noFill/>
-          <a:ln/>
-        </p:spPr>
-        <p:txBody>
-          <a:bodyPr wrap="square" rtlCol="0" anchor="ctr"/>
-          <a:lstStyle/>
-          <a:p>
-            <a:pPr indent="0" marL="0">
-              <a:lnSpc>
-                <a:spcPts val="1900"/>
-              </a:lnSpc>
-              <a:buNone/>
-            </a:pPr>
-            <a:r>
-              <a:rPr lang="en-US" sz="1350" b="1" dirty="0">
-                <a:solidFill>
-                  <a:srgbClr val="1B2B3A"/>
-                </a:solidFill>
-                <a:latin typeface="Calibri" pitchFamily="34" charset="0"/>
-                <a:ea typeface="Calibri" pitchFamily="34" charset="-122"/>
-                <a:cs typeface="Calibri" pitchFamily="34" charset="-120"/>
-              </a:rPr>
-              <a:t>Model apa yang dapat memprediksi churn secara akurat &amp; andal?</a:t>
-            </a:r>
-            <a:endParaRPr lang="en-US" sz="1350" dirty="0"/>
-          </a:p>
-        </p:txBody>
-      </p:sp>
-      <p:sp>
-        <p:nvSpPr>
-          <p:cNvPr id="14" name="Shape 10"/>
-          <p:cNvSpPr/>
-          <p:nvPr/>
-        </p:nvSpPr>
-        <p:spPr>
-          <a:xfrm>
-            <a:off x="8229600" y="3383280"/>
-            <a:ext cx="3383280" cy="2651760"/>
-          </a:xfrm>
-          <a:prstGeom prst="roundRect">
-            <a:avLst>
-              <a:gd name="adj" fmla="val 2759"/>
-            </a:avLst>
-          </a:prstGeom>
-          <a:solidFill>
-            <a:srgbClr val="EAF1F7"/>
-          </a:solidFill>
-          <a:ln/>
-        </p:spPr>
-      </p:sp>
-      <p:sp>
-        <p:nvSpPr>
-          <p:cNvPr id="15" name="Shape 11"/>
-          <p:cNvSpPr/>
-          <p:nvPr/>
-        </p:nvSpPr>
-        <p:spPr>
-          <a:xfrm>
-            <a:off x="8549640" y="3703320"/>
-            <a:ext cx="640080" cy="640080"/>
-          </a:xfrm>
-          <a:prstGeom prst="ellipse">
-            <a:avLst/>
-          </a:prstGeom>
-          <a:solidFill>
-            <a:srgbClr val="12314F"/>
-          </a:solidFill>
-          <a:ln/>
-        </p:spPr>
-      </p:sp>
-      <p:pic>
-        <p:nvPicPr>
-          <p:cNvPr id="16" name="Image 2" descr="/home/claude/churn_ppt/icons/bulb.png">    </p:cNvPr>
+          <p:cNvPr id="8" name="Image 0" descr="/home/claude/churn_ppt/icons/target.png"/>
           <p:cNvPicPr>
             <a:picLocks noChangeAspect="1"/>
           </p:cNvPicPr>
@@ -8418,7 +7829,7 @@
         </p:blipFill>
         <p:spPr>
           <a:xfrm>
-            <a:off x="8709660" y="3863340"/>
+            <a:off x="1303020" y="3863340"/>
             <a:ext cx="320040" cy="320040"/>
           </a:xfrm>
           <a:prstGeom prst="rect">
@@ -8428,13 +7839,13 @@
       </p:pic>
       <p:sp>
         <p:nvSpPr>
-          <p:cNvPr id="17" name="Text 12"/>
-          <p:cNvSpPr/>
-          <p:nvPr/>
-        </p:nvSpPr>
-        <p:spPr>
-          <a:xfrm>
-            <a:off x="8503920" y="4526280"/>
+          <p:cNvPr id="9" name="Text 6"/>
+          <p:cNvSpPr/>
+          <p:nvPr/>
+        </p:nvSpPr>
+        <p:spPr>
+          <a:xfrm>
+            <a:off x="1097280" y="4526280"/>
             <a:ext cx="2834640" cy="1371600"/>
           </a:xfrm>
           <a:prstGeom prst="rect">
@@ -8447,7 +7858,7 @@
           <a:bodyPr wrap="square" rtlCol="0" anchor="ctr"/>
           <a:lstStyle/>
           <a:p>
-            <a:pPr indent="0" marL="0">
+            <a:pPr marL="0" indent="0">
               <a:lnSpc>
                 <a:spcPts val="1900"/>
               </a:lnSpc>
@@ -8462,6 +7873,222 @@
                 <a:ea typeface="Calibri" pitchFamily="34" charset="-122"/>
                 <a:cs typeface="Calibri" pitchFamily="34" charset="-120"/>
               </a:rPr>
+              <a:t>Fitur pelanggan mana yang paling memengaruhi keputusan churn?</a:t>
+            </a:r>
+            <a:endParaRPr lang="en-US" sz="1350" dirty="0"/>
+          </a:p>
+        </p:txBody>
+      </p:sp>
+      <p:sp>
+        <p:nvSpPr>
+          <p:cNvPr id="10" name="Shape 7"/>
+          <p:cNvSpPr/>
+          <p:nvPr/>
+        </p:nvSpPr>
+        <p:spPr>
+          <a:xfrm>
+            <a:off x="4526280" y="3383280"/>
+            <a:ext cx="3383280" cy="2651760"/>
+          </a:xfrm>
+          <a:prstGeom prst="roundRect">
+            <a:avLst>
+              <a:gd name="adj" fmla="val 2759"/>
+            </a:avLst>
+          </a:prstGeom>
+          <a:solidFill>
+            <a:srgbClr val="EAF1F7"/>
+          </a:solidFill>
+          <a:ln/>
+        </p:spPr>
+      </p:sp>
+      <p:sp>
+        <p:nvSpPr>
+          <p:cNvPr id="11" name="Shape 8"/>
+          <p:cNvSpPr/>
+          <p:nvPr/>
+        </p:nvSpPr>
+        <p:spPr>
+          <a:xfrm>
+            <a:off x="4846320" y="3703320"/>
+            <a:ext cx="640080" cy="640080"/>
+          </a:xfrm>
+          <a:prstGeom prst="ellipse">
+            <a:avLst/>
+          </a:prstGeom>
+          <a:solidFill>
+            <a:srgbClr val="12314F"/>
+          </a:solidFill>
+          <a:ln/>
+        </p:spPr>
+      </p:sp>
+      <p:pic>
+        <p:nvPicPr>
+          <p:cNvPr id="12" name="Image 1" descr="/home/claude/churn_ppt/icons/brain.png"/>
+          <p:cNvPicPr>
+            <a:picLocks noChangeAspect="1"/>
+          </p:cNvPicPr>
+          <p:nvPr/>
+        </p:nvPicPr>
+        <p:blipFill>
+          <a:blip r:embed="rId4"/>
+          <a:stretch>
+            <a:fillRect/>
+          </a:stretch>
+        </p:blipFill>
+        <p:spPr>
+          <a:xfrm>
+            <a:off x="5006340" y="3863340"/>
+            <a:ext cx="320040" cy="320040"/>
+          </a:xfrm>
+          <a:prstGeom prst="rect">
+            <a:avLst/>
+          </a:prstGeom>
+        </p:spPr>
+      </p:pic>
+      <p:sp>
+        <p:nvSpPr>
+          <p:cNvPr id="13" name="Text 9"/>
+          <p:cNvSpPr/>
+          <p:nvPr/>
+        </p:nvSpPr>
+        <p:spPr>
+          <a:xfrm>
+            <a:off x="4800600" y="4526280"/>
+            <a:ext cx="2834640" cy="1371600"/>
+          </a:xfrm>
+          <a:prstGeom prst="rect">
+            <a:avLst/>
+          </a:prstGeom>
+          <a:noFill/>
+          <a:ln/>
+        </p:spPr>
+        <p:txBody>
+          <a:bodyPr wrap="square" rtlCol="0" anchor="ctr"/>
+          <a:lstStyle/>
+          <a:p>
+            <a:pPr marL="0" indent="0">
+              <a:lnSpc>
+                <a:spcPts val="1900"/>
+              </a:lnSpc>
+              <a:buNone/>
+            </a:pPr>
+            <a:r>
+              <a:rPr lang="en-US" sz="1350" b="1" dirty="0">
+                <a:solidFill>
+                  <a:srgbClr val="1B2B3A"/>
+                </a:solidFill>
+                <a:latin typeface="Calibri" pitchFamily="34" charset="0"/>
+                <a:ea typeface="Calibri" pitchFamily="34" charset="-122"/>
+                <a:cs typeface="Calibri" pitchFamily="34" charset="-120"/>
+              </a:rPr>
+              <a:t>Model apa yang dapat memprediksi churn secara akurat &amp; andal?</a:t>
+            </a:r>
+            <a:endParaRPr lang="en-US" sz="1350" dirty="0"/>
+          </a:p>
+        </p:txBody>
+      </p:sp>
+      <p:sp>
+        <p:nvSpPr>
+          <p:cNvPr id="14" name="Shape 10"/>
+          <p:cNvSpPr/>
+          <p:nvPr/>
+        </p:nvSpPr>
+        <p:spPr>
+          <a:xfrm>
+            <a:off x="8229600" y="3383280"/>
+            <a:ext cx="3383280" cy="2651760"/>
+          </a:xfrm>
+          <a:prstGeom prst="roundRect">
+            <a:avLst>
+              <a:gd name="adj" fmla="val 2759"/>
+            </a:avLst>
+          </a:prstGeom>
+          <a:solidFill>
+            <a:srgbClr val="EAF1F7"/>
+          </a:solidFill>
+          <a:ln/>
+        </p:spPr>
+      </p:sp>
+      <p:sp>
+        <p:nvSpPr>
+          <p:cNvPr id="15" name="Shape 11"/>
+          <p:cNvSpPr/>
+          <p:nvPr/>
+        </p:nvSpPr>
+        <p:spPr>
+          <a:xfrm>
+            <a:off x="8549640" y="3703320"/>
+            <a:ext cx="640080" cy="640080"/>
+          </a:xfrm>
+          <a:prstGeom prst="ellipse">
+            <a:avLst/>
+          </a:prstGeom>
+          <a:solidFill>
+            <a:srgbClr val="12314F"/>
+          </a:solidFill>
+          <a:ln/>
+        </p:spPr>
+      </p:sp>
+      <p:pic>
+        <p:nvPicPr>
+          <p:cNvPr id="16" name="Image 2" descr="/home/claude/churn_ppt/icons/bulb.png"/>
+          <p:cNvPicPr>
+            <a:picLocks noChangeAspect="1"/>
+          </p:cNvPicPr>
+          <p:nvPr/>
+        </p:nvPicPr>
+        <p:blipFill>
+          <a:blip r:embed="rId5"/>
+          <a:stretch>
+            <a:fillRect/>
+          </a:stretch>
+        </p:blipFill>
+        <p:spPr>
+          <a:xfrm>
+            <a:off x="8709660" y="3863340"/>
+            <a:ext cx="320040" cy="320040"/>
+          </a:xfrm>
+          <a:prstGeom prst="rect">
+            <a:avLst/>
+          </a:prstGeom>
+        </p:spPr>
+      </p:pic>
+      <p:sp>
+        <p:nvSpPr>
+          <p:cNvPr id="17" name="Text 12"/>
+          <p:cNvSpPr/>
+          <p:nvPr/>
+        </p:nvSpPr>
+        <p:spPr>
+          <a:xfrm>
+            <a:off x="8503920" y="4526280"/>
+            <a:ext cx="2834640" cy="1371600"/>
+          </a:xfrm>
+          <a:prstGeom prst="rect">
+            <a:avLst/>
+          </a:prstGeom>
+          <a:noFill/>
+          <a:ln/>
+        </p:spPr>
+        <p:txBody>
+          <a:bodyPr wrap="square" rtlCol="0" anchor="ctr"/>
+          <a:lstStyle/>
+          <a:p>
+            <a:pPr marL="0" indent="0">
+              <a:lnSpc>
+                <a:spcPts val="1900"/>
+              </a:lnSpc>
+              <a:buNone/>
+            </a:pPr>
+            <a:r>
+              <a:rPr lang="en-US" sz="1350" b="1" dirty="0">
+                <a:solidFill>
+                  <a:srgbClr val="1B2B3A"/>
+                </a:solidFill>
+                <a:latin typeface="Calibri" pitchFamily="34" charset="0"/>
+                <a:ea typeface="Calibri" pitchFamily="34" charset="-122"/>
+                <a:cs typeface="Calibri" pitchFamily="34" charset="-120"/>
+              </a:rPr>
               <a:t>Tindakan bisnis apa yang bisa diambil dari hasil prediksi?</a:t>
             </a:r>
             <a:endParaRPr lang="en-US" sz="1350" dirty="0"/>
@@ -8489,7 +8116,7 @@
           <a:bodyPr wrap="square" rtlCol="0" anchor="ctr"/>
           <a:lstStyle/>
           <a:p>
-            <a:pPr algn="l" indent="0" marL="0">
+            <a:pPr marL="0" indent="0" algn="l">
               <a:buNone/>
             </a:pPr>
             <a:r>
@@ -8528,7 +8155,7 @@
           <a:bodyPr wrap="square" rtlCol="0" anchor="ctr"/>
           <a:lstStyle/>
           <a:p>
-            <a:pPr algn="r" indent="0" marL="0">
+            <a:pPr marL="0" indent="0" algn="r">
               <a:buNone/>
             </a:pPr>
             <a:r>
@@ -8562,6 +8189,7 @@
         <a:solidFill>
           <a:srgbClr val="12314F"/>
         </a:solidFill>
+        <a:effectLst/>
       </p:bgPr>
     </p:bg>
     <p:spTree>
@@ -8580,118 +8208,40 @@
       </p:grpSpPr>
       <p:sp>
         <p:nvSpPr>
-          <p:cNvPr id="2" name="Text 0"/>
-          <p:cNvSpPr/>
-          <p:nvPr/>
-        </p:nvSpPr>
-        <p:spPr>
-          <a:xfrm>
-            <a:off x="548640" y="457200"/>
-            <a:ext cx="1097280" cy="1097280"/>
-          </a:xfrm>
-          <a:prstGeom prst="rect">
-            <a:avLst/>
-          </a:prstGeom>
-          <a:noFill/>
-          <a:ln/>
-        </p:spPr>
-        <p:txBody>
-          <a:bodyPr wrap="square" rtlCol="0" anchor="ctr"/>
-          <a:lstStyle/>
-          <a:p>
-            <a:pPr indent="0" marL="0">
-              <a:buNone/>
-            </a:pPr>
-            <a:r>
-              <a:rPr lang="en-US" sz="5400" b="1" dirty="0">
-                <a:solidFill>
-                  <a:srgbClr val="1E4A73"/>
+          <p:cNvPr id="4" name="Text 2"/>
+          <p:cNvSpPr/>
+          <p:nvPr/>
+        </p:nvSpPr>
+        <p:spPr>
+          <a:xfrm>
+            <a:off x="822960" y="868680"/>
+            <a:ext cx="10332720" cy="731520"/>
+          </a:xfrm>
+          <a:prstGeom prst="rect">
+            <a:avLst/>
+          </a:prstGeom>
+          <a:noFill/>
+          <a:ln/>
+        </p:spPr>
+        <p:txBody>
+          <a:bodyPr wrap="square" rtlCol="0" anchor="ctr"/>
+          <a:lstStyle/>
+          <a:p>
+            <a:pPr marL="0" indent="0">
+              <a:lnSpc>
+                <a:spcPts val="3200"/>
+              </a:lnSpc>
+              <a:buNone/>
+            </a:pPr>
+            <a:r>
+              <a:rPr lang="en-US" sz="2700" b="1" dirty="0">
+                <a:solidFill>
+                  <a:srgbClr val="FFFFFF"/>
                 </a:solidFill>
                 <a:latin typeface="Cambria" pitchFamily="34" charset="0"/>
                 <a:ea typeface="Cambria" pitchFamily="34" charset="-122"/>
                 <a:cs typeface="Cambria" pitchFamily="34" charset="-120"/>
               </a:rPr>
-              <a:t>A</a:t>
-            </a:r>
-            <a:endParaRPr lang="en-US" sz="5400" dirty="0"/>
-          </a:p>
-        </p:txBody>
-      </p:sp>
-      <p:sp>
-        <p:nvSpPr>
-          <p:cNvPr id="3" name="Text 1"/>
-          <p:cNvSpPr/>
-          <p:nvPr/>
-        </p:nvSpPr>
-        <p:spPr>
-          <a:xfrm>
-            <a:off x="822960" y="502920"/>
-            <a:ext cx="3657600" cy="365760"/>
-          </a:xfrm>
-          <a:prstGeom prst="rect">
-            <a:avLst/>
-          </a:prstGeom>
-          <a:noFill/>
-          <a:ln/>
-        </p:spPr>
-        <p:txBody>
-          <a:bodyPr wrap="square" rtlCol="0" anchor="ctr"/>
-          <a:lstStyle/>
-          <a:p>
-            <a:pPr indent="0" marL="0">
-              <a:buNone/>
-            </a:pPr>
-            <a:r>
-              <a:rPr lang="en-US" sz="1300" b="1" spc="200" kern="0" dirty="0">
-                <a:solidFill>
-                  <a:srgbClr val="E1562B"/>
-                </a:solidFill>
-                <a:latin typeface="Calibri" pitchFamily="34" charset="0"/>
-                <a:ea typeface="Calibri" pitchFamily="34" charset="-122"/>
-                <a:cs typeface="Calibri" pitchFamily="34" charset="-120"/>
-              </a:rPr>
-              <a:t>ANSWER</a:t>
-            </a:r>
-            <a:endParaRPr lang="en-US" sz="1300" dirty="0"/>
-          </a:p>
-        </p:txBody>
-      </p:sp>
-      <p:sp>
-        <p:nvSpPr>
-          <p:cNvPr id="4" name="Text 2"/>
-          <p:cNvSpPr/>
-          <p:nvPr/>
-        </p:nvSpPr>
-        <p:spPr>
-          <a:xfrm>
-            <a:off x="822960" y="868680"/>
-            <a:ext cx="10332720" cy="731520"/>
-          </a:xfrm>
-          <a:prstGeom prst="rect">
-            <a:avLst/>
-          </a:prstGeom>
-          <a:noFill/>
-          <a:ln/>
-        </p:spPr>
-        <p:txBody>
-          <a:bodyPr wrap="square" rtlCol="0" anchor="ctr"/>
-          <a:lstStyle/>
-          <a:p>
-            <a:pPr indent="0" marL="0">
-              <a:lnSpc>
-                <a:spcPts val="3200"/>
-              </a:lnSpc>
-              <a:buNone/>
-            </a:pPr>
-            <a:r>
-              <a:rPr lang="en-US" sz="2700" b="1" dirty="0">
-                <a:solidFill>
-                  <a:srgbClr val="FFFFFF"/>
-                </a:solidFill>
-                <a:latin typeface="Cambria" pitchFamily="34" charset="0"/>
-                <a:ea typeface="Cambria" pitchFamily="34" charset="-122"/>
-                <a:cs typeface="Cambria" pitchFamily="34" charset="-120"/>
-              </a:rPr>
               <a:t>Model Klasifikasi XGBoost untuk Prediksi Churn Proaktif</a:t>
             </a:r>
             <a:endParaRPr lang="en-US" sz="2700" dirty="0"/>
@@ -8719,7 +8269,7 @@
           <a:bodyPr wrap="square" rtlCol="0" anchor="ctr"/>
           <a:lstStyle/>
           <a:p>
-            <a:pPr indent="0" marL="0">
+            <a:pPr marL="0" indent="0">
               <a:lnSpc>
                 <a:spcPts val="2000"/>
               </a:lnSpc>
@@ -8734,7 +8284,7 @@
                 <a:ea typeface="Calibri" pitchFamily="34" charset="-122"/>
                 <a:cs typeface="Calibri" pitchFamily="34" charset="-120"/>
               </a:rPr>
-              <a:t>Alur analisis dibangun end-to-end: dari eksplorasi data, rekayasa fitur, hingga pemodelan XGBoost yang dituning agar mampu mengenali pola pelanggan berisiko churn secara proaktif.</a:t>
+              <a:t>Alur analisis dibangun end-to-end: dari eksplorasi data, feature engineering, hingga pemodelan XGBoost yang dituning agar mampu mengenali pola pelanggan berisiko churn secara proaktif.</a:t>
             </a:r>
             <a:endParaRPr lang="en-US" sz="1400" dirty="0"/>
           </a:p>
@@ -8784,379 +8334,7 @@
       </p:sp>
       <p:pic>
         <p:nvPicPr>
-          <p:cNvPr id="8" name="Image 0" descr="/home/claude/churn_ppt/icons/database.png">    </p:cNvPr>
-          <p:cNvPicPr>
-            <a:picLocks noChangeAspect="1"/>
-          </p:cNvPicPr>
-          <p:nvPr/>
-        </p:nvPicPr>
-        <p:blipFill>
-          <a:blip r:embed="rId1"/>
-          <a:stretch>
-            <a:fillRect/>
-          </a:stretch>
-        </p:blipFill>
-        <p:spPr>
-          <a:xfrm>
-            <a:off x="1716786" y="3166110"/>
-            <a:ext cx="297180" cy="297180"/>
-          </a:xfrm>
-          <a:prstGeom prst="rect">
-            <a:avLst/>
-          </a:prstGeom>
-        </p:spPr>
-      </p:pic>
-      <p:sp>
-        <p:nvSpPr>
-          <p:cNvPr id="9" name="Text 6"/>
-          <p:cNvSpPr/>
-          <p:nvPr/>
-        </p:nvSpPr>
-        <p:spPr>
-          <a:xfrm>
-            <a:off x="932688" y="3886200"/>
-            <a:ext cx="1865376" cy="457200"/>
-          </a:xfrm>
-          <a:prstGeom prst="rect">
-            <a:avLst/>
-          </a:prstGeom>
-          <a:noFill/>
-          <a:ln/>
-        </p:spPr>
-        <p:txBody>
-          <a:bodyPr wrap="square" rtlCol="0" anchor="ctr"/>
-          <a:lstStyle/>
-          <a:p>
-            <a:pPr algn="ctr" indent="0" marL="0">
-              <a:buNone/>
-            </a:pPr>
-            <a:r>
-              <a:rPr lang="en-US" sz="1350" b="1" dirty="0">
-                <a:solidFill>
-                  <a:srgbClr val="FFFFFF"/>
-                </a:solidFill>
-                <a:latin typeface="Calibri" pitchFamily="34" charset="0"/>
-                <a:ea typeface="Calibri" pitchFamily="34" charset="-122"/>
-                <a:cs typeface="Calibri" pitchFamily="34" charset="-120"/>
-              </a:rPr>
-              <a:t>Dataset</a:t>
-            </a:r>
-            <a:endParaRPr lang="en-US" sz="1350" dirty="0"/>
-          </a:p>
-        </p:txBody>
-      </p:sp>
-      <p:sp>
-        <p:nvSpPr>
-          <p:cNvPr id="10" name="Text 7"/>
-          <p:cNvSpPr/>
-          <p:nvPr/>
-        </p:nvSpPr>
-        <p:spPr>
-          <a:xfrm>
-            <a:off x="932688" y="4434840"/>
-            <a:ext cx="1865376" cy="822960"/>
-          </a:xfrm>
-          <a:prstGeom prst="rect">
-            <a:avLst/>
-          </a:prstGeom>
-          <a:noFill/>
-          <a:ln/>
-        </p:spPr>
-        <p:txBody>
-          <a:bodyPr wrap="square" rtlCol="0" anchor="ctr"/>
-          <a:lstStyle/>
-          <a:p>
-            <a:pPr algn="ctr" indent="0" marL="0">
-              <a:lnSpc>
-                <a:spcPts val="1400"/>
-              </a:lnSpc>
-              <a:buNone/>
-            </a:pPr>
-            <a:r>
-              <a:rPr lang="en-US" sz="1050" dirty="0">
-                <a:solidFill>
-                  <a:srgbClr val="AFC5D8"/>
-                </a:solidFill>
-                <a:latin typeface="Calibri" pitchFamily="34" charset="0"/>
-                <a:ea typeface="Calibri" pitchFamily="34" charset="-122"/>
-                <a:cs typeface="Calibri" pitchFamily="34" charset="-120"/>
-              </a:rPr>
-              <a:t>1.200 pelanggan, 11 fitur</a:t>
-            </a:r>
-            <a:endParaRPr lang="en-US" sz="1050" dirty="0"/>
-          </a:p>
-        </p:txBody>
-      </p:sp>
-      <p:sp>
-        <p:nvSpPr>
-          <p:cNvPr id="11" name="Text 8"/>
-          <p:cNvSpPr/>
-          <p:nvPr/>
-        </p:nvSpPr>
-        <p:spPr>
-          <a:xfrm>
-            <a:off x="2907792" y="3657600"/>
-            <a:ext cx="182880" cy="457200"/>
-          </a:xfrm>
-          <a:prstGeom prst="rect">
-            <a:avLst/>
-          </a:prstGeom>
-          <a:noFill/>
-          <a:ln/>
-        </p:spPr>
-        <p:txBody>
-          <a:bodyPr wrap="square" rtlCol="0" anchor="ctr"/>
-          <a:lstStyle/>
-          <a:p>
-            <a:pPr algn="ctr" indent="0" marL="0">
-              <a:buNone/>
-            </a:pPr>
-            <a:r>
-              <a:rPr lang="en-US" sz="1600" dirty="0">
-                <a:solidFill>
-                  <a:srgbClr val="E1562B"/>
-                </a:solidFill>
-                <a:latin typeface="Calibri" pitchFamily="34" charset="0"/>
-                <a:ea typeface="Calibri" pitchFamily="34" charset="-122"/>
-                <a:cs typeface="Calibri" pitchFamily="34" charset="-120"/>
-              </a:rPr>
-              <a:t>→</a:t>
-            </a:r>
-            <a:endParaRPr lang="en-US" sz="1600" dirty="0"/>
-          </a:p>
-        </p:txBody>
-      </p:sp>
-      <p:sp>
-        <p:nvSpPr>
-          <p:cNvPr id="12" name="Shape 9"/>
-          <p:cNvSpPr/>
-          <p:nvPr/>
-        </p:nvSpPr>
-        <p:spPr>
-          <a:xfrm>
-            <a:off x="3044952" y="2743200"/>
-            <a:ext cx="2084832" cy="2651760"/>
-          </a:xfrm>
-          <a:prstGeom prst="roundRect">
-            <a:avLst>
-              <a:gd name="adj" fmla="val 3509"/>
-            </a:avLst>
-          </a:prstGeom>
-          <a:solidFill>
-            <a:srgbClr val="1A3E60"/>
-          </a:solidFill>
-          <a:ln/>
-        </p:spPr>
-      </p:sp>
-      <p:sp>
-        <p:nvSpPr>
-          <p:cNvPr id="13" name="Shape 10"/>
-          <p:cNvSpPr/>
-          <p:nvPr/>
-        </p:nvSpPr>
-        <p:spPr>
-          <a:xfrm>
-            <a:off x="3790188" y="3017520"/>
-            <a:ext cx="594360" cy="594360"/>
-          </a:xfrm>
-          <a:prstGeom prst="ellipse">
-            <a:avLst/>
-          </a:prstGeom>
-          <a:solidFill>
-            <a:srgbClr val="E1562B"/>
-          </a:solidFill>
-          <a:ln/>
-        </p:spPr>
-      </p:sp>
-      <p:pic>
-        <p:nvPicPr>
-          <p:cNvPr id="14" name="Image 1" descr="/home/claude/churn_ppt/icons/search.png">    </p:cNvPr>
-          <p:cNvPicPr>
-            <a:picLocks noChangeAspect="1"/>
-          </p:cNvPicPr>
-          <p:nvPr/>
-        </p:nvPicPr>
-        <p:blipFill>
-          <a:blip r:embed="rId2"/>
-          <a:stretch>
-            <a:fillRect/>
-          </a:stretch>
-        </p:blipFill>
-        <p:spPr>
-          <a:xfrm>
-            <a:off x="3938778" y="3166110"/>
-            <a:ext cx="297180" cy="297180"/>
-          </a:xfrm>
-          <a:prstGeom prst="rect">
-            <a:avLst/>
-          </a:prstGeom>
-        </p:spPr>
-      </p:pic>
-      <p:sp>
-        <p:nvSpPr>
-          <p:cNvPr id="15" name="Text 11"/>
-          <p:cNvSpPr/>
-          <p:nvPr/>
-        </p:nvSpPr>
-        <p:spPr>
-          <a:xfrm>
-            <a:off x="3154680" y="3886200"/>
-            <a:ext cx="1865376" cy="457200"/>
-          </a:xfrm>
-          <a:prstGeom prst="rect">
-            <a:avLst/>
-          </a:prstGeom>
-          <a:noFill/>
-          <a:ln/>
-        </p:spPr>
-        <p:txBody>
-          <a:bodyPr wrap="square" rtlCol="0" anchor="ctr"/>
-          <a:lstStyle/>
-          <a:p>
-            <a:pPr algn="ctr" indent="0" marL="0">
-              <a:buNone/>
-            </a:pPr>
-            <a:r>
-              <a:rPr lang="en-US" sz="1350" b="1" dirty="0">
-                <a:solidFill>
-                  <a:srgbClr val="FFFFFF"/>
-                </a:solidFill>
-                <a:latin typeface="Calibri" pitchFamily="34" charset="0"/>
-                <a:ea typeface="Calibri" pitchFamily="34" charset="-122"/>
-                <a:cs typeface="Calibri" pitchFamily="34" charset="-120"/>
-              </a:rPr>
-              <a:t>EDA</a:t>
-            </a:r>
-            <a:endParaRPr lang="en-US" sz="1350" dirty="0"/>
-          </a:p>
-        </p:txBody>
-      </p:sp>
-      <p:sp>
-        <p:nvSpPr>
-          <p:cNvPr id="16" name="Text 12"/>
-          <p:cNvSpPr/>
-          <p:nvPr/>
-        </p:nvSpPr>
-        <p:spPr>
-          <a:xfrm>
-            <a:off x="3154680" y="4434840"/>
-            <a:ext cx="1865376" cy="822960"/>
-          </a:xfrm>
-          <a:prstGeom prst="rect">
-            <a:avLst/>
-          </a:prstGeom>
-          <a:noFill/>
-          <a:ln/>
-        </p:spPr>
-        <p:txBody>
-          <a:bodyPr wrap="square" rtlCol="0" anchor="ctr"/>
-          <a:lstStyle/>
-          <a:p>
-            <a:pPr algn="ctr" indent="0" marL="0">
-              <a:lnSpc>
-                <a:spcPts val="1400"/>
-              </a:lnSpc>
-              <a:buNone/>
-            </a:pPr>
-            <a:r>
-              <a:rPr lang="en-US" sz="1050" dirty="0">
-                <a:solidFill>
-                  <a:srgbClr val="AFC5D8"/>
-                </a:solidFill>
-                <a:latin typeface="Calibri" pitchFamily="34" charset="0"/>
-                <a:ea typeface="Calibri" pitchFamily="34" charset="-122"/>
-                <a:cs typeface="Calibri" pitchFamily="34" charset="-120"/>
-              </a:rPr>
-              <a:t>Pola &amp; distribusi churn</a:t>
-            </a:r>
-            <a:endParaRPr lang="en-US" sz="1050" dirty="0"/>
-          </a:p>
-        </p:txBody>
-      </p:sp>
-      <p:sp>
-        <p:nvSpPr>
-          <p:cNvPr id="17" name="Text 13"/>
-          <p:cNvSpPr/>
-          <p:nvPr/>
-        </p:nvSpPr>
-        <p:spPr>
-          <a:xfrm>
-            <a:off x="5129784" y="3657600"/>
-            <a:ext cx="182880" cy="457200"/>
-          </a:xfrm>
-          <a:prstGeom prst="rect">
-            <a:avLst/>
-          </a:prstGeom>
-          <a:noFill/>
-          <a:ln/>
-        </p:spPr>
-        <p:txBody>
-          <a:bodyPr wrap="square" rtlCol="0" anchor="ctr"/>
-          <a:lstStyle/>
-          <a:p>
-            <a:pPr algn="ctr" indent="0" marL="0">
-              <a:buNone/>
-            </a:pPr>
-            <a:r>
-              <a:rPr lang="en-US" sz="1600" dirty="0">
-                <a:solidFill>
-                  <a:srgbClr val="E1562B"/>
-                </a:solidFill>
-                <a:latin typeface="Calibri" pitchFamily="34" charset="0"/>
-                <a:ea typeface="Calibri" pitchFamily="34" charset="-122"/>
-                <a:cs typeface="Calibri" pitchFamily="34" charset="-120"/>
-              </a:rPr>
-              <a:t>→</a:t>
-            </a:r>
-            <a:endParaRPr lang="en-US" sz="1600" dirty="0"/>
-          </a:p>
-        </p:txBody>
-      </p:sp>
-      <p:sp>
-        <p:nvSpPr>
-          <p:cNvPr id="18" name="Shape 14"/>
-          <p:cNvSpPr/>
-          <p:nvPr/>
-        </p:nvSpPr>
-        <p:spPr>
-          <a:xfrm>
-            <a:off x="5266944" y="2743200"/>
-            <a:ext cx="2084832" cy="2651760"/>
-          </a:xfrm>
-          <a:prstGeom prst="roundRect">
-            <a:avLst>
-              <a:gd name="adj" fmla="val 3509"/>
-            </a:avLst>
-          </a:prstGeom>
-          <a:solidFill>
-            <a:srgbClr val="1A3E60"/>
-          </a:solidFill>
-          <a:ln/>
-        </p:spPr>
-      </p:sp>
-      <p:sp>
-        <p:nvSpPr>
-          <p:cNvPr id="19" name="Shape 15"/>
-          <p:cNvSpPr/>
-          <p:nvPr/>
-        </p:nvSpPr>
-        <p:spPr>
-          <a:xfrm>
-            <a:off x="6012180" y="3017520"/>
-            <a:ext cx="594360" cy="594360"/>
-          </a:xfrm>
-          <a:prstGeom prst="ellipse">
-            <a:avLst/>
-          </a:prstGeom>
-          <a:solidFill>
-            <a:srgbClr val="E1562B"/>
-          </a:solidFill>
-          <a:ln/>
-        </p:spPr>
-      </p:sp>
-      <p:pic>
-        <p:nvPicPr>
-          <p:cNvPr id="20" name="Image 2" descr="/home/claude/churn_ppt/icons/cogs.png">    </p:cNvPr>
+          <p:cNvPr id="8" name="Image 0" descr="/home/claude/churn_ppt/icons/database.png"/>
           <p:cNvPicPr>
             <a:picLocks noChangeAspect="1"/>
           </p:cNvPicPr>
@@ -9170,7 +8348,7 @@
         </p:blipFill>
         <p:spPr>
           <a:xfrm>
-            <a:off x="6160770" y="3166110"/>
+            <a:off x="1716786" y="3166110"/>
             <a:ext cx="297180" cy="297180"/>
           </a:xfrm>
           <a:prstGeom prst="rect">
@@ -9180,13 +8358,13 @@
       </p:pic>
       <p:sp>
         <p:nvSpPr>
-          <p:cNvPr id="21" name="Text 16"/>
-          <p:cNvSpPr/>
-          <p:nvPr/>
-        </p:nvSpPr>
-        <p:spPr>
-          <a:xfrm>
-            <a:off x="5376672" y="3886200"/>
+          <p:cNvPr id="9" name="Text 6"/>
+          <p:cNvSpPr/>
+          <p:nvPr/>
+        </p:nvSpPr>
+        <p:spPr>
+          <a:xfrm>
+            <a:off x="932688" y="3886200"/>
             <a:ext cx="1865376" cy="457200"/>
           </a:xfrm>
           <a:prstGeom prst="rect">
@@ -9199,7 +8377,7 @@
           <a:bodyPr wrap="square" rtlCol="0" anchor="ctr"/>
           <a:lstStyle/>
           <a:p>
-            <a:pPr algn="ctr" indent="0" marL="0">
+            <a:pPr marL="0" indent="0" algn="ctr">
               <a:buNone/>
             </a:pPr>
             <a:r>
@@ -9211,7 +8389,7 @@
                 <a:ea typeface="Calibri" pitchFamily="34" charset="-122"/>
                 <a:cs typeface="Calibri" pitchFamily="34" charset="-120"/>
               </a:rPr>
-              <a:t>Feature Eng.</a:t>
+              <a:t>Dataset</a:t>
             </a:r>
             <a:endParaRPr lang="en-US" sz="1350" dirty="0"/>
           </a:p>
@@ -9219,13 +8397,13 @@
       </p:sp>
       <p:sp>
         <p:nvSpPr>
-          <p:cNvPr id="22" name="Text 17"/>
-          <p:cNvSpPr/>
-          <p:nvPr/>
-        </p:nvSpPr>
-        <p:spPr>
-          <a:xfrm>
-            <a:off x="5376672" y="4434840"/>
+          <p:cNvPr id="10" name="Text 7"/>
+          <p:cNvSpPr/>
+          <p:nvPr/>
+        </p:nvSpPr>
+        <p:spPr>
+          <a:xfrm>
+            <a:off x="932688" y="4434840"/>
             <a:ext cx="1865376" cy="822960"/>
           </a:xfrm>
           <a:prstGeom prst="rect">
@@ -9238,7 +8416,7 @@
           <a:bodyPr wrap="square" rtlCol="0" anchor="ctr"/>
           <a:lstStyle/>
           <a:p>
-            <a:pPr algn="ctr" indent="0" marL="0">
+            <a:pPr marL="0" indent="0" algn="ctr">
               <a:lnSpc>
                 <a:spcPts val="1400"/>
               </a:lnSpc>
@@ -9253,7 +8431,7 @@
                 <a:ea typeface="Calibri" pitchFamily="34" charset="-122"/>
                 <a:cs typeface="Calibri" pitchFamily="34" charset="-120"/>
               </a:rPr>
-              <a:t>3 fitur turunan baru</a:t>
+              <a:t>1.200 pelanggan, 11 fitur</a:t>
             </a:r>
             <a:endParaRPr lang="en-US" sz="1050" dirty="0"/>
           </a:p>
@@ -9261,13 +8439,13 @@
       </p:sp>
       <p:sp>
         <p:nvSpPr>
-          <p:cNvPr id="23" name="Text 18"/>
-          <p:cNvSpPr/>
-          <p:nvPr/>
-        </p:nvSpPr>
-        <p:spPr>
-          <a:xfrm>
-            <a:off x="7351776" y="3657600"/>
+          <p:cNvPr id="11" name="Text 8"/>
+          <p:cNvSpPr/>
+          <p:nvPr/>
+        </p:nvSpPr>
+        <p:spPr>
+          <a:xfrm>
+            <a:off x="2907792" y="3657600"/>
             <a:ext cx="182880" cy="457200"/>
           </a:xfrm>
           <a:prstGeom prst="rect">
@@ -9280,7 +8458,7 @@
           <a:bodyPr wrap="square" rtlCol="0" anchor="ctr"/>
           <a:lstStyle/>
           <a:p>
-            <a:pPr algn="ctr" indent="0" marL="0">
+            <a:pPr marL="0" indent="0" algn="ctr">
               <a:buNone/>
             </a:pPr>
             <a:r>
@@ -9300,13 +8478,13 @@
       </p:sp>
       <p:sp>
         <p:nvSpPr>
-          <p:cNvPr id="24" name="Shape 19"/>
-          <p:cNvSpPr/>
-          <p:nvPr/>
-        </p:nvSpPr>
-        <p:spPr>
-          <a:xfrm>
-            <a:off x="7488936" y="2743200"/>
+          <p:cNvPr id="12" name="Shape 9"/>
+          <p:cNvSpPr/>
+          <p:nvPr/>
+        </p:nvSpPr>
+        <p:spPr>
+          <a:xfrm>
+            <a:off x="3044952" y="2743200"/>
             <a:ext cx="2084832" cy="2651760"/>
           </a:xfrm>
           <a:prstGeom prst="roundRect">
@@ -9322,13 +8500,13 @@
       </p:sp>
       <p:sp>
         <p:nvSpPr>
-          <p:cNvPr id="25" name="Shape 20"/>
-          <p:cNvSpPr/>
-          <p:nvPr/>
-        </p:nvSpPr>
-        <p:spPr>
-          <a:xfrm>
-            <a:off x="8234172" y="3017520"/>
+          <p:cNvPr id="13" name="Shape 10"/>
+          <p:cNvSpPr/>
+          <p:nvPr/>
+        </p:nvSpPr>
+        <p:spPr>
+          <a:xfrm>
+            <a:off x="3790188" y="3017520"/>
             <a:ext cx="594360" cy="594360"/>
           </a:xfrm>
           <a:prstGeom prst="ellipse">
@@ -9342,7 +8520,7 @@
       </p:sp>
       <p:pic>
         <p:nvPicPr>
-          <p:cNvPr id="26" name="Image 3" descr="/home/claude/churn_ppt/icons/brain.png">    </p:cNvPr>
+          <p:cNvPr id="14" name="Image 1" descr="/home/claude/churn_ppt/icons/search.png"/>
           <p:cNvPicPr>
             <a:picLocks noChangeAspect="1"/>
           </p:cNvPicPr>
@@ -9356,7 +8534,7 @@
         </p:blipFill>
         <p:spPr>
           <a:xfrm>
-            <a:off x="8382762" y="3166110"/>
+            <a:off x="3938778" y="3166110"/>
             <a:ext cx="297180" cy="297180"/>
           </a:xfrm>
           <a:prstGeom prst="rect">
@@ -9366,13 +8544,13 @@
       </p:pic>
       <p:sp>
         <p:nvSpPr>
-          <p:cNvPr id="27" name="Text 21"/>
-          <p:cNvSpPr/>
-          <p:nvPr/>
-        </p:nvSpPr>
-        <p:spPr>
-          <a:xfrm>
-            <a:off x="7598664" y="3886200"/>
+          <p:cNvPr id="15" name="Text 11"/>
+          <p:cNvSpPr/>
+          <p:nvPr/>
+        </p:nvSpPr>
+        <p:spPr>
+          <a:xfrm>
+            <a:off x="3154680" y="3886200"/>
             <a:ext cx="1865376" cy="457200"/>
           </a:xfrm>
           <a:prstGeom prst="rect">
@@ -9385,7 +8563,7 @@
           <a:bodyPr wrap="square" rtlCol="0" anchor="ctr"/>
           <a:lstStyle/>
           <a:p>
-            <a:pPr algn="ctr" indent="0" marL="0">
+            <a:pPr marL="0" indent="0" algn="ctr">
               <a:buNone/>
             </a:pPr>
             <a:r>
@@ -9397,7 +8575,7 @@
                 <a:ea typeface="Calibri" pitchFamily="34" charset="-122"/>
                 <a:cs typeface="Calibri" pitchFamily="34" charset="-120"/>
               </a:rPr>
-              <a:t>XGBoost + Tuning</a:t>
+              <a:t>EDA</a:t>
             </a:r>
             <a:endParaRPr lang="en-US" sz="1350" dirty="0"/>
           </a:p>
@@ -9405,13 +8583,13 @@
       </p:sp>
       <p:sp>
         <p:nvSpPr>
-          <p:cNvPr id="28" name="Text 22"/>
-          <p:cNvSpPr/>
-          <p:nvPr/>
-        </p:nvSpPr>
-        <p:spPr>
-          <a:xfrm>
-            <a:off x="7598664" y="4434840"/>
+          <p:cNvPr id="16" name="Text 12"/>
+          <p:cNvSpPr/>
+          <p:nvPr/>
+        </p:nvSpPr>
+        <p:spPr>
+          <a:xfrm>
+            <a:off x="3154680" y="4434840"/>
             <a:ext cx="1865376" cy="822960"/>
           </a:xfrm>
           <a:prstGeom prst="rect">
@@ -9424,7 +8602,7 @@
           <a:bodyPr wrap="square" rtlCol="0" anchor="ctr"/>
           <a:lstStyle/>
           <a:p>
-            <a:pPr algn="ctr" indent="0" marL="0">
+            <a:pPr marL="0" indent="0" algn="ctr">
               <a:lnSpc>
                 <a:spcPts val="1400"/>
               </a:lnSpc>
@@ -9439,7 +8617,7 @@
                 <a:ea typeface="Calibri" pitchFamily="34" charset="-122"/>
                 <a:cs typeface="Calibri" pitchFamily="34" charset="-120"/>
               </a:rPr>
-              <a:t>GridSearchCV, 5-fold CV</a:t>
+              <a:t>Pola &amp; distribusi churn</a:t>
             </a:r>
             <a:endParaRPr lang="en-US" sz="1050" dirty="0"/>
           </a:p>
@@ -9447,13 +8625,13 @@
       </p:sp>
       <p:sp>
         <p:nvSpPr>
-          <p:cNvPr id="29" name="Text 23"/>
-          <p:cNvSpPr/>
-          <p:nvPr/>
-        </p:nvSpPr>
-        <p:spPr>
-          <a:xfrm>
-            <a:off x="9573768" y="3657600"/>
+          <p:cNvPr id="17" name="Text 13"/>
+          <p:cNvSpPr/>
+          <p:nvPr/>
+        </p:nvSpPr>
+        <p:spPr>
+          <a:xfrm>
+            <a:off x="5129784" y="3657600"/>
             <a:ext cx="182880" cy="457200"/>
           </a:xfrm>
           <a:prstGeom prst="rect">
@@ -9466,7 +8644,7 @@
           <a:bodyPr wrap="square" rtlCol="0" anchor="ctr"/>
           <a:lstStyle/>
           <a:p>
-            <a:pPr algn="ctr" indent="0" marL="0">
+            <a:pPr marL="0" indent="0" algn="ctr">
               <a:buNone/>
             </a:pPr>
             <a:r>
@@ -9486,13 +8664,13 @@
       </p:sp>
       <p:sp>
         <p:nvSpPr>
-          <p:cNvPr id="30" name="Shape 24"/>
-          <p:cNvSpPr/>
-          <p:nvPr/>
-        </p:nvSpPr>
-        <p:spPr>
-          <a:xfrm>
-            <a:off x="9710928" y="2743200"/>
+          <p:cNvPr id="18" name="Shape 14"/>
+          <p:cNvSpPr/>
+          <p:nvPr/>
+        </p:nvSpPr>
+        <p:spPr>
+          <a:xfrm>
+            <a:off x="5266944" y="2743200"/>
             <a:ext cx="2084832" cy="2651760"/>
           </a:xfrm>
           <a:prstGeom prst="roundRect">
@@ -9508,13 +8686,13 @@
       </p:sp>
       <p:sp>
         <p:nvSpPr>
-          <p:cNvPr id="31" name="Shape 25"/>
-          <p:cNvSpPr/>
-          <p:nvPr/>
-        </p:nvSpPr>
-        <p:spPr>
-          <a:xfrm>
-            <a:off x="10456164" y="3017520"/>
+          <p:cNvPr id="19" name="Shape 15"/>
+          <p:cNvSpPr/>
+          <p:nvPr/>
+        </p:nvSpPr>
+        <p:spPr>
+          <a:xfrm>
+            <a:off x="6012180" y="3017520"/>
             <a:ext cx="594360" cy="594360"/>
           </a:xfrm>
           <a:prstGeom prst="ellipse">
@@ -9528,7 +8706,7 @@
       </p:sp>
       <p:pic>
         <p:nvPicPr>
-          <p:cNvPr id="32" name="Image 4" descr="/home/claude/churn_ppt/icons/chartbar.png">    </p:cNvPr>
+          <p:cNvPr id="20" name="Image 2" descr="/home/claude/churn_ppt/icons/cogs.png"/>
           <p:cNvPicPr>
             <a:picLocks noChangeAspect="1"/>
           </p:cNvPicPr>
@@ -9542,7 +8720,7 @@
         </p:blipFill>
         <p:spPr>
           <a:xfrm>
-            <a:off x="10604754" y="3166110"/>
+            <a:off x="6160770" y="3166110"/>
             <a:ext cx="297180" cy="297180"/>
           </a:xfrm>
           <a:prstGeom prst="rect">
@@ -9552,13 +8730,13 @@
       </p:pic>
       <p:sp>
         <p:nvSpPr>
-          <p:cNvPr id="33" name="Text 26"/>
-          <p:cNvSpPr/>
-          <p:nvPr/>
-        </p:nvSpPr>
-        <p:spPr>
-          <a:xfrm>
-            <a:off x="9820656" y="3886200"/>
+          <p:cNvPr id="21" name="Text 16"/>
+          <p:cNvSpPr/>
+          <p:nvPr/>
+        </p:nvSpPr>
+        <p:spPr>
+          <a:xfrm>
+            <a:off x="5376672" y="3886200"/>
             <a:ext cx="1865376" cy="457200"/>
           </a:xfrm>
           <a:prstGeom prst="rect">
@@ -9571,7 +8749,7 @@
           <a:bodyPr wrap="square" rtlCol="0" anchor="ctr"/>
           <a:lstStyle/>
           <a:p>
-            <a:pPr algn="ctr" indent="0" marL="0">
+            <a:pPr marL="0" indent="0" algn="ctr">
               <a:buNone/>
             </a:pPr>
             <a:r>
@@ -9583,7 +8761,7 @@
                 <a:ea typeface="Calibri" pitchFamily="34" charset="-122"/>
                 <a:cs typeface="Calibri" pitchFamily="34" charset="-120"/>
               </a:rPr>
-              <a:t>Evaluasi &amp; Insight</a:t>
+              <a:t>Feature Eng.</a:t>
             </a:r>
             <a:endParaRPr lang="en-US" sz="1350" dirty="0"/>
           </a:p>
@@ -9591,13 +8769,13 @@
       </p:sp>
       <p:sp>
         <p:nvSpPr>
-          <p:cNvPr id="34" name="Text 27"/>
-          <p:cNvSpPr/>
-          <p:nvPr/>
-        </p:nvSpPr>
-        <p:spPr>
-          <a:xfrm>
-            <a:off x="9820656" y="4434840"/>
+          <p:cNvPr id="22" name="Text 17"/>
+          <p:cNvSpPr/>
+          <p:nvPr/>
+        </p:nvSpPr>
+        <p:spPr>
+          <a:xfrm>
+            <a:off x="5376672" y="4434840"/>
             <a:ext cx="1865376" cy="822960"/>
           </a:xfrm>
           <a:prstGeom prst="rect">
@@ -9610,7 +8788,7 @@
           <a:bodyPr wrap="square" rtlCol="0" anchor="ctr"/>
           <a:lstStyle/>
           <a:p>
-            <a:pPr algn="ctr" indent="0" marL="0">
+            <a:pPr marL="0" indent="0" algn="ctr">
               <a:lnSpc>
                 <a:spcPts val="1400"/>
               </a:lnSpc>
@@ -9625,6 +8803,378 @@
                 <a:ea typeface="Calibri" pitchFamily="34" charset="-122"/>
                 <a:cs typeface="Calibri" pitchFamily="34" charset="-120"/>
               </a:rPr>
+              <a:t>3 fitur turunan baru</a:t>
+            </a:r>
+            <a:endParaRPr lang="en-US" sz="1050" dirty="0"/>
+          </a:p>
+        </p:txBody>
+      </p:sp>
+      <p:sp>
+        <p:nvSpPr>
+          <p:cNvPr id="23" name="Text 18"/>
+          <p:cNvSpPr/>
+          <p:nvPr/>
+        </p:nvSpPr>
+        <p:spPr>
+          <a:xfrm>
+            <a:off x="7351776" y="3657600"/>
+            <a:ext cx="182880" cy="457200"/>
+          </a:xfrm>
+          <a:prstGeom prst="rect">
+            <a:avLst/>
+          </a:prstGeom>
+          <a:noFill/>
+          <a:ln/>
+        </p:spPr>
+        <p:txBody>
+          <a:bodyPr wrap="square" rtlCol="0" anchor="ctr"/>
+          <a:lstStyle/>
+          <a:p>
+            <a:pPr marL="0" indent="0" algn="ctr">
+              <a:buNone/>
+            </a:pPr>
+            <a:r>
+              <a:rPr lang="en-US" sz="1600" dirty="0">
+                <a:solidFill>
+                  <a:srgbClr val="E1562B"/>
+                </a:solidFill>
+                <a:latin typeface="Calibri" pitchFamily="34" charset="0"/>
+                <a:ea typeface="Calibri" pitchFamily="34" charset="-122"/>
+                <a:cs typeface="Calibri" pitchFamily="34" charset="-120"/>
+              </a:rPr>
+              <a:t>→</a:t>
+            </a:r>
+            <a:endParaRPr lang="en-US" sz="1600" dirty="0"/>
+          </a:p>
+        </p:txBody>
+      </p:sp>
+      <p:sp>
+        <p:nvSpPr>
+          <p:cNvPr id="24" name="Shape 19"/>
+          <p:cNvSpPr/>
+          <p:nvPr/>
+        </p:nvSpPr>
+        <p:spPr>
+          <a:xfrm>
+            <a:off x="7488936" y="2743200"/>
+            <a:ext cx="2084832" cy="2651760"/>
+          </a:xfrm>
+          <a:prstGeom prst="roundRect">
+            <a:avLst>
+              <a:gd name="adj" fmla="val 3509"/>
+            </a:avLst>
+          </a:prstGeom>
+          <a:solidFill>
+            <a:srgbClr val="1A3E60"/>
+          </a:solidFill>
+          <a:ln/>
+        </p:spPr>
+      </p:sp>
+      <p:sp>
+        <p:nvSpPr>
+          <p:cNvPr id="25" name="Shape 20"/>
+          <p:cNvSpPr/>
+          <p:nvPr/>
+        </p:nvSpPr>
+        <p:spPr>
+          <a:xfrm>
+            <a:off x="8234172" y="3017520"/>
+            <a:ext cx="594360" cy="594360"/>
+          </a:xfrm>
+          <a:prstGeom prst="ellipse">
+            <a:avLst/>
+          </a:prstGeom>
+          <a:solidFill>
+            <a:srgbClr val="E1562B"/>
+          </a:solidFill>
+          <a:ln/>
+        </p:spPr>
+      </p:sp>
+      <p:pic>
+        <p:nvPicPr>
+          <p:cNvPr id="26" name="Image 3" descr="/home/claude/churn_ppt/icons/brain.png"/>
+          <p:cNvPicPr>
+            <a:picLocks noChangeAspect="1"/>
+          </p:cNvPicPr>
+          <p:nvPr/>
+        </p:nvPicPr>
+        <p:blipFill>
+          <a:blip r:embed="rId6"/>
+          <a:stretch>
+            <a:fillRect/>
+          </a:stretch>
+        </p:blipFill>
+        <p:spPr>
+          <a:xfrm>
+            <a:off x="8382762" y="3166110"/>
+            <a:ext cx="297180" cy="297180"/>
+          </a:xfrm>
+          <a:prstGeom prst="rect">
+            <a:avLst/>
+          </a:prstGeom>
+        </p:spPr>
+      </p:pic>
+      <p:sp>
+        <p:nvSpPr>
+          <p:cNvPr id="27" name="Text 21"/>
+          <p:cNvSpPr/>
+          <p:nvPr/>
+        </p:nvSpPr>
+        <p:spPr>
+          <a:xfrm>
+            <a:off x="7598664" y="3886200"/>
+            <a:ext cx="1865376" cy="457200"/>
+          </a:xfrm>
+          <a:prstGeom prst="rect">
+            <a:avLst/>
+          </a:prstGeom>
+          <a:noFill/>
+          <a:ln/>
+        </p:spPr>
+        <p:txBody>
+          <a:bodyPr wrap="square" rtlCol="0" anchor="ctr"/>
+          <a:lstStyle/>
+          <a:p>
+            <a:pPr marL="0" indent="0" algn="ctr">
+              <a:buNone/>
+            </a:pPr>
+            <a:r>
+              <a:rPr lang="en-US" sz="1350" b="1" dirty="0">
+                <a:solidFill>
+                  <a:srgbClr val="FFFFFF"/>
+                </a:solidFill>
+                <a:latin typeface="Calibri" pitchFamily="34" charset="0"/>
+                <a:ea typeface="Calibri" pitchFamily="34" charset="-122"/>
+                <a:cs typeface="Calibri" pitchFamily="34" charset="-120"/>
+              </a:rPr>
+              <a:t>XGBoost + Tuning</a:t>
+            </a:r>
+            <a:endParaRPr lang="en-US" sz="1350" dirty="0"/>
+          </a:p>
+        </p:txBody>
+      </p:sp>
+      <p:sp>
+        <p:nvSpPr>
+          <p:cNvPr id="28" name="Text 22"/>
+          <p:cNvSpPr/>
+          <p:nvPr/>
+        </p:nvSpPr>
+        <p:spPr>
+          <a:xfrm>
+            <a:off x="7598664" y="4434840"/>
+            <a:ext cx="1865376" cy="822960"/>
+          </a:xfrm>
+          <a:prstGeom prst="rect">
+            <a:avLst/>
+          </a:prstGeom>
+          <a:noFill/>
+          <a:ln/>
+        </p:spPr>
+        <p:txBody>
+          <a:bodyPr wrap="square" rtlCol="0" anchor="ctr"/>
+          <a:lstStyle/>
+          <a:p>
+            <a:pPr marL="0" indent="0" algn="ctr">
+              <a:lnSpc>
+                <a:spcPts val="1400"/>
+              </a:lnSpc>
+              <a:buNone/>
+            </a:pPr>
+            <a:r>
+              <a:rPr lang="en-US" sz="1050" dirty="0">
+                <a:solidFill>
+                  <a:srgbClr val="AFC5D8"/>
+                </a:solidFill>
+                <a:latin typeface="Calibri" pitchFamily="34" charset="0"/>
+                <a:ea typeface="Calibri" pitchFamily="34" charset="-122"/>
+                <a:cs typeface="Calibri" pitchFamily="34" charset="-120"/>
+              </a:rPr>
+              <a:t>GridSearchCV, 5-fold CV</a:t>
+            </a:r>
+            <a:endParaRPr lang="en-US" sz="1050" dirty="0"/>
+          </a:p>
+        </p:txBody>
+      </p:sp>
+      <p:sp>
+        <p:nvSpPr>
+          <p:cNvPr id="29" name="Text 23"/>
+          <p:cNvSpPr/>
+          <p:nvPr/>
+        </p:nvSpPr>
+        <p:spPr>
+          <a:xfrm>
+            <a:off x="9573768" y="3657600"/>
+            <a:ext cx="182880" cy="457200"/>
+          </a:xfrm>
+          <a:prstGeom prst="rect">
+            <a:avLst/>
+          </a:prstGeom>
+          <a:noFill/>
+          <a:ln/>
+        </p:spPr>
+        <p:txBody>
+          <a:bodyPr wrap="square" rtlCol="0" anchor="ctr"/>
+          <a:lstStyle/>
+          <a:p>
+            <a:pPr marL="0" indent="0" algn="ctr">
+              <a:buNone/>
+            </a:pPr>
+            <a:r>
+              <a:rPr lang="en-US" sz="1600" dirty="0">
+                <a:solidFill>
+                  <a:srgbClr val="E1562B"/>
+                </a:solidFill>
+                <a:latin typeface="Calibri" pitchFamily="34" charset="0"/>
+                <a:ea typeface="Calibri" pitchFamily="34" charset="-122"/>
+                <a:cs typeface="Calibri" pitchFamily="34" charset="-120"/>
+              </a:rPr>
+              <a:t>→</a:t>
+            </a:r>
+            <a:endParaRPr lang="en-US" sz="1600" dirty="0"/>
+          </a:p>
+        </p:txBody>
+      </p:sp>
+      <p:sp>
+        <p:nvSpPr>
+          <p:cNvPr id="30" name="Shape 24"/>
+          <p:cNvSpPr/>
+          <p:nvPr/>
+        </p:nvSpPr>
+        <p:spPr>
+          <a:xfrm>
+            <a:off x="9710928" y="2743200"/>
+            <a:ext cx="2084832" cy="2651760"/>
+          </a:xfrm>
+          <a:prstGeom prst="roundRect">
+            <a:avLst>
+              <a:gd name="adj" fmla="val 3509"/>
+            </a:avLst>
+          </a:prstGeom>
+          <a:solidFill>
+            <a:srgbClr val="1A3E60"/>
+          </a:solidFill>
+          <a:ln/>
+        </p:spPr>
+      </p:sp>
+      <p:sp>
+        <p:nvSpPr>
+          <p:cNvPr id="31" name="Shape 25"/>
+          <p:cNvSpPr/>
+          <p:nvPr/>
+        </p:nvSpPr>
+        <p:spPr>
+          <a:xfrm>
+            <a:off x="10456164" y="3017520"/>
+            <a:ext cx="594360" cy="594360"/>
+          </a:xfrm>
+          <a:prstGeom prst="ellipse">
+            <a:avLst/>
+          </a:prstGeom>
+          <a:solidFill>
+            <a:srgbClr val="E1562B"/>
+          </a:solidFill>
+          <a:ln/>
+        </p:spPr>
+      </p:sp>
+      <p:pic>
+        <p:nvPicPr>
+          <p:cNvPr id="32" name="Image 4" descr="/home/claude/churn_ppt/icons/chartbar.png"/>
+          <p:cNvPicPr>
+            <a:picLocks noChangeAspect="1"/>
+          </p:cNvPicPr>
+          <p:nvPr/>
+        </p:nvPicPr>
+        <p:blipFill>
+          <a:blip r:embed="rId7"/>
+          <a:stretch>
+            <a:fillRect/>
+          </a:stretch>
+        </p:blipFill>
+        <p:spPr>
+          <a:xfrm>
+            <a:off x="10604754" y="3166110"/>
+            <a:ext cx="297180" cy="297180"/>
+          </a:xfrm>
+          <a:prstGeom prst="rect">
+            <a:avLst/>
+          </a:prstGeom>
+        </p:spPr>
+      </p:pic>
+      <p:sp>
+        <p:nvSpPr>
+          <p:cNvPr id="33" name="Text 26"/>
+          <p:cNvSpPr/>
+          <p:nvPr/>
+        </p:nvSpPr>
+        <p:spPr>
+          <a:xfrm>
+            <a:off x="9820656" y="3886200"/>
+            <a:ext cx="1865376" cy="457200"/>
+          </a:xfrm>
+          <a:prstGeom prst="rect">
+            <a:avLst/>
+          </a:prstGeom>
+          <a:noFill/>
+          <a:ln/>
+        </p:spPr>
+        <p:txBody>
+          <a:bodyPr wrap="square" rtlCol="0" anchor="ctr"/>
+          <a:lstStyle/>
+          <a:p>
+            <a:pPr marL="0" indent="0" algn="ctr">
+              <a:buNone/>
+            </a:pPr>
+            <a:r>
+              <a:rPr lang="en-US" sz="1350" b="1" dirty="0">
+                <a:solidFill>
+                  <a:srgbClr val="FFFFFF"/>
+                </a:solidFill>
+                <a:latin typeface="Calibri" pitchFamily="34" charset="0"/>
+                <a:ea typeface="Calibri" pitchFamily="34" charset="-122"/>
+                <a:cs typeface="Calibri" pitchFamily="34" charset="-120"/>
+              </a:rPr>
+              <a:t>Evaluasi &amp; Insight</a:t>
+            </a:r>
+            <a:endParaRPr lang="en-US" sz="1350" dirty="0"/>
+          </a:p>
+        </p:txBody>
+      </p:sp>
+      <p:sp>
+        <p:nvSpPr>
+          <p:cNvPr id="34" name="Text 27"/>
+          <p:cNvSpPr/>
+          <p:nvPr/>
+        </p:nvSpPr>
+        <p:spPr>
+          <a:xfrm>
+            <a:off x="9820656" y="4434840"/>
+            <a:ext cx="1865376" cy="822960"/>
+          </a:xfrm>
+          <a:prstGeom prst="rect">
+            <a:avLst/>
+          </a:prstGeom>
+          <a:noFill/>
+          <a:ln/>
+        </p:spPr>
+        <p:txBody>
+          <a:bodyPr wrap="square" rtlCol="0" anchor="ctr"/>
+          <a:lstStyle/>
+          <a:p>
+            <a:pPr marL="0" indent="0" algn="ctr">
+              <a:lnSpc>
+                <a:spcPts val="1400"/>
+              </a:lnSpc>
+              <a:buNone/>
+            </a:pPr>
+            <a:r>
+              <a:rPr lang="en-US" sz="1050" dirty="0">
+                <a:solidFill>
+                  <a:srgbClr val="AFC5D8"/>
+                </a:solidFill>
+                <a:latin typeface="Calibri" pitchFamily="34" charset="0"/>
+                <a:ea typeface="Calibri" pitchFamily="34" charset="-122"/>
+                <a:cs typeface="Calibri" pitchFamily="34" charset="-120"/>
+              </a:rPr>
               <a:t>Rekomendasi bisnis</a:t>
             </a:r>
             <a:endParaRPr lang="en-US" sz="1050" dirty="0"/>
@@ -9652,7 +9202,7 @@
           <a:bodyPr wrap="square" rtlCol="0" anchor="ctr"/>
           <a:lstStyle/>
           <a:p>
-            <a:pPr algn="l" indent="0" marL="0">
+            <a:pPr marL="0" indent="0" algn="l">
               <a:buNone/>
             </a:pPr>
             <a:r>
@@ -9691,7 +9241,7 @@
           <a:bodyPr wrap="square" rtlCol="0" anchor="ctr"/>
           <a:lstStyle/>
           <a:p>
-            <a:pPr algn="r" indent="0" marL="0">
+            <a:pPr marL="0" indent="0" algn="r">
               <a:buNone/>
             </a:pPr>
             <a:r>
@@ -9725,6 +9275,7 @@
         <a:solidFill>
           <a:srgbClr val="FFFFFF"/>
         </a:solidFill>
+        <a:effectLst/>
       </p:bgPr>
     </p:bg>
     <p:spTree>
@@ -9762,7 +9313,7 @@
           <a:bodyPr wrap="square" rtlCol="0" anchor="ctr"/>
           <a:lstStyle/>
           <a:p>
-            <a:pPr indent="0" marL="0">
+            <a:pPr marL="0" indent="0">
               <a:buNone/>
             </a:pPr>
             <a:r>
@@ -9801,7 +9352,7 @@
           <a:bodyPr wrap="square" rtlCol="0" anchor="ctr"/>
           <a:lstStyle/>
           <a:p>
-            <a:pPr indent="0" marL="0">
+            <a:pPr marL="0" indent="0">
               <a:lnSpc>
                 <a:spcPts val="1800"/>
               </a:lnSpc>
@@ -9863,7 +9414,7 @@
           <a:bodyPr wrap="square" rtlCol="0" anchor="ctr"/>
           <a:lstStyle/>
           <a:p>
-            <a:pPr indent="0" marL="0">
+            <a:pPr marL="0" indent="0">
               <a:buNone/>
             </a:pPr>
             <a:r>
@@ -9922,7 +9473,7 @@
           <a:bodyPr wrap="square" rtlCol="0" anchor="ctr"/>
           <a:lstStyle/>
           <a:p>
-            <a:pPr indent="0" marL="0">
+            <a:pPr marL="0" indent="0">
               <a:buNone/>
             </a:pPr>
             <a:r>
@@ -9981,7 +9532,7 @@
           <a:bodyPr wrap="square" rtlCol="0" anchor="ctr"/>
           <a:lstStyle/>
           <a:p>
-            <a:pPr indent="0" marL="0">
+            <a:pPr marL="0" indent="0">
               <a:buNone/>
             </a:pPr>
             <a:r>
@@ -10040,7 +9591,7 @@
           <a:bodyPr wrap="square" rtlCol="0" anchor="ctr"/>
           <a:lstStyle/>
           <a:p>
-            <a:pPr indent="0" marL="0">
+            <a:pPr marL="0" indent="0">
               <a:buNone/>
             </a:pPr>
             <a:r>
@@ -10099,7 +9650,7 @@
           <a:bodyPr wrap="square" rtlCol="0" anchor="ctr"/>
           <a:lstStyle/>
           <a:p>
-            <a:pPr indent="0" marL="0">
+            <a:pPr marL="0" indent="0">
               <a:buNone/>
             </a:pPr>
             <a:r>
@@ -10158,7 +9709,7 @@
           <a:bodyPr wrap="square" rtlCol="0" anchor="ctr"/>
           <a:lstStyle/>
           <a:p>
-            <a:pPr indent="0" marL="0">
+            <a:pPr marL="0" indent="0">
               <a:buNone/>
             </a:pPr>
             <a:r>
@@ -10217,7 +9768,7 @@
           <a:bodyPr wrap="square" rtlCol="0" anchor="ctr"/>
           <a:lstStyle/>
           <a:p>
-            <a:pPr indent="0" marL="0">
+            <a:pPr marL="0" indent="0">
               <a:buNone/>
             </a:pPr>
             <a:r>
@@ -10276,7 +9827,7 @@
           <a:bodyPr wrap="square" rtlCol="0" anchor="ctr"/>
           <a:lstStyle/>
           <a:p>
-            <a:pPr indent="0" marL="0">
+            <a:pPr marL="0" indent="0">
               <a:buNone/>
             </a:pPr>
             <a:r>
@@ -10335,7 +9886,7 @@
           <a:bodyPr wrap="square" rtlCol="0" anchor="ctr"/>
           <a:lstStyle/>
           <a:p>
-            <a:pPr indent="0" marL="0">
+            <a:pPr marL="0" indent="0">
               <a:buNone/>
             </a:pPr>
             <a:r>
@@ -10394,7 +9945,7 @@
           <a:bodyPr wrap="square" rtlCol="0" anchor="ctr"/>
           <a:lstStyle/>
           <a:p>
-            <a:pPr indent="0" marL="0">
+            <a:pPr marL="0" indent="0">
               <a:buNone/>
             </a:pPr>
             <a:r>
@@ -10453,7 +10004,7 @@
           <a:bodyPr wrap="square" rtlCol="0" anchor="ctr"/>
           <a:lstStyle/>
           <a:p>
-            <a:pPr indent="0" marL="0">
+            <a:pPr marL="0" indent="0">
               <a:buNone/>
             </a:pPr>
             <a:r>
@@ -10512,7 +10063,7 @@
           <a:bodyPr wrap="square" rtlCol="0" anchor="ctr"/>
           <a:lstStyle/>
           <a:p>
-            <a:pPr indent="0" marL="0">
+            <a:pPr marL="0" indent="0">
               <a:buNone/>
             </a:pPr>
             <a:r>
@@ -10573,11 +10124,11 @@
           <a:bodyPr wrap="square" rtlCol="0" anchor="ctr"/>
           <a:lstStyle/>
           <a:p>
-            <a:pPr indent="0" marL="0">
-              <a:buNone/>
-            </a:pPr>
-            <a:r>
-              <a:rPr lang="en-US" sz="1050" b="1" spc="150" kern="0" dirty="0">
+            <a:pPr marL="0" indent="0">
+              <a:buNone/>
+            </a:pPr>
+            <a:r>
+              <a:rPr lang="en-US" sz="1050" b="1" kern="0" spc="150" dirty="0">
                 <a:solidFill>
                   <a:srgbClr val="8FA7BE"/>
                 </a:solidFill>
@@ -10612,7 +10163,7 @@
           <a:bodyPr wrap="square" rtlCol="0" anchor="ctr"/>
           <a:lstStyle/>
           <a:p>
-            <a:pPr indent="0" marL="0">
+            <a:pPr marL="0" indent="0">
               <a:buNone/>
             </a:pPr>
             <a:r>
@@ -10651,7 +10202,7 @@
           <a:bodyPr wrap="square" rtlCol="0" anchor="ctr"/>
           <a:lstStyle/>
           <a:p>
-            <a:pPr indent="0" marL="0">
+            <a:pPr marL="0" indent="0">
               <a:buNone/>
             </a:pPr>
             <a:r>
@@ -10712,7 +10263,7 @@
           <a:bodyPr wrap="square" rtlCol="0" anchor="ctr"/>
           <a:lstStyle/>
           <a:p>
-            <a:pPr indent="0" marL="0">
+            <a:pPr marL="0" indent="0">
               <a:buNone/>
             </a:pPr>
             <a:r>
@@ -10751,7 +10302,7 @@
           <a:bodyPr wrap="square" rtlCol="0" anchor="ctr"/>
           <a:lstStyle/>
           <a:p>
-            <a:pPr indent="0" marL="0">
+            <a:pPr marL="0" indent="0">
               <a:buNone/>
             </a:pPr>
             <a:r>
@@ -10835,7 +10386,7 @@
           <a:bodyPr wrap="square" rtlCol="0" anchor="ctr"/>
           <a:lstStyle/>
           <a:p>
-            <a:pPr indent="0" marL="0">
+            <a:pPr marL="0" indent="0">
               <a:lnSpc>
                 <a:spcPts val="1300"/>
               </a:lnSpc>
@@ -10877,7 +10428,7 @@
           <a:bodyPr wrap="square" rtlCol="0" anchor="ctr"/>
           <a:lstStyle/>
           <a:p>
-            <a:pPr algn="l" indent="0" marL="0">
+            <a:pPr marL="0" indent="0" algn="l">
               <a:buNone/>
             </a:pPr>
             <a:r>
@@ -10916,7 +10467,7 @@
           <a:bodyPr wrap="square" rtlCol="0" anchor="ctr"/>
           <a:lstStyle/>
           <a:p>
-            <a:pPr algn="r" indent="0" marL="0">
+            <a:pPr marL="0" indent="0" algn="r">
               <a:buNone/>
             </a:pPr>
             <a:r>
@@ -10950,6 +10501,7 @@
         <a:solidFill>
           <a:srgbClr val="FFFFFF"/>
         </a:solidFill>
+        <a:effectLst/>
       </p:bgPr>
     </p:bg>
     <p:spTree>
@@ -10987,7 +10539,7 @@
           <a:bodyPr wrap="square" rtlCol="0" anchor="ctr"/>
           <a:lstStyle/>
           <a:p>
-            <a:pPr indent="0" marL="0">
+            <a:pPr marL="0" indent="0">
               <a:buNone/>
             </a:pPr>
             <a:r>
@@ -11026,7 +10578,7 @@
           <a:bodyPr wrap="square" rtlCol="0" anchor="ctr"/>
           <a:lstStyle/>
           <a:p>
-            <a:pPr indent="0" marL="0">
+            <a:pPr marL="0" indent="0">
               <a:buNone/>
             </a:pPr>
             <a:r>
@@ -11046,7 +10598,7 @@
       </p:sp>
       <p:graphicFrame>
         <p:nvGraphicFramePr>
-          <p:cNvPr id="4" name="Chart 0" descr=""/>
+          <p:cNvPr id="4" name="Chart 0"/>
           <p:cNvGraphicFramePr/>
           <p:nvPr/>
         </p:nvGraphicFramePr>
@@ -11054,15 +10606,15 @@
           <a:off x="548640" y="1554480"/>
           <a:ext cx="5394960" cy="2377440"/>
         </p:xfrm>
-        <a:graphic xmlns:a="http://schemas.openxmlformats.org/drawingml/2006/main">
+        <a:graphic>
           <a:graphicData uri="http://schemas.openxmlformats.org/drawingml/2006/chart">
-            <c:chart xmlns:c="http://schemas.openxmlformats.org/drawingml/2006/chart" r:id="rId1"/>
+            <c:chart xmlns:c="http://schemas.openxmlformats.org/drawingml/2006/chart" xmlns:r="http://schemas.openxmlformats.org/officeDocument/2006/relationships" r:id="rId3"/>
           </a:graphicData>
         </a:graphic>
       </p:graphicFrame>
       <p:graphicFrame>
         <p:nvGraphicFramePr>
-          <p:cNvPr id="5" name="Chart 1" descr=""/>
+          <p:cNvPr id="5" name="Chart 1"/>
           <p:cNvGraphicFramePr/>
           <p:nvPr/>
         </p:nvGraphicFramePr>
@@ -11070,9 +10622,9 @@
           <a:off x="6217920" y="1554480"/>
           <a:ext cx="5394960" cy="2377440"/>
         </p:xfrm>
-        <a:graphic xmlns:a="http://schemas.openxmlformats.org/drawingml/2006/main">
+        <a:graphic>
           <a:graphicData uri="http://schemas.openxmlformats.org/drawingml/2006/chart">
-            <c:chart xmlns:c="http://schemas.openxmlformats.org/drawingml/2006/chart" r:id="rId2"/>
+            <c:chart xmlns:c="http://schemas.openxmlformats.org/drawingml/2006/chart" xmlns:r="http://schemas.openxmlformats.org/officeDocument/2006/relationships" r:id="rId4"/>
           </a:graphicData>
         </a:graphic>
       </p:graphicFrame>
@@ -11120,14 +10672,14 @@
       </p:sp>
       <p:pic>
         <p:nvPicPr>
-          <p:cNvPr id="8" name="Image 0" descr="/home/claude/churn_ppt/icons/contract.png">    </p:cNvPr>
+          <p:cNvPr id="8" name="Image 0" descr="/home/claude/churn_ppt/icons/contract.png"/>
           <p:cNvPicPr>
             <a:picLocks noChangeAspect="1"/>
           </p:cNvPicPr>
           <p:nvPr/>
         </p:nvPicPr>
         <p:blipFill>
-          <a:blip r:embed="rId3"/>
+          <a:blip r:embed="rId5"/>
           <a:stretch>
             <a:fillRect/>
           </a:stretch>
@@ -11163,7 +10715,7 @@
           <a:bodyPr wrap="square" rtlCol="0" anchor="ctr"/>
           <a:lstStyle/>
           <a:p>
-            <a:pPr indent="0" marL="0">
+            <a:pPr marL="0" indent="0">
               <a:lnSpc>
                 <a:spcPts val="1700"/>
               </a:lnSpc>
@@ -11178,7 +10730,51 @@
                 <a:ea typeface="Calibri" pitchFamily="34" charset="-122"/>
                 <a:cs typeface="Calibri" pitchFamily="34" charset="-120"/>
               </a:rPr>
-              <a:t>Pelanggan Monthly memiliki churn rate hampir 2x lipat dibanding Annual — komitmen jangka pendek membuat pelanggan lebih mudah berpindah ke kompetitor.</a:t>
+              <a:t>Pelanggan Monthly memiliki churn rate hampir 2x lipat </a:t>
+            </a:r>
+            <a:r>
+              <a:rPr lang="en-US" sz="1200" dirty="0" err="1">
+                <a:solidFill>
+                  <a:srgbClr val="1B2B3A"/>
+                </a:solidFill>
+                <a:latin typeface="Calibri" pitchFamily="34" charset="0"/>
+                <a:ea typeface="Calibri" pitchFamily="34" charset="-122"/>
+                <a:cs typeface="Calibri" pitchFamily="34" charset="-120"/>
+              </a:rPr>
+              <a:t>dibanding</a:t>
+            </a:r>
+            <a:r>
+              <a:rPr lang="en-US" sz="1200" dirty="0">
+                <a:solidFill>
+                  <a:srgbClr val="1B2B3A"/>
+                </a:solidFill>
+                <a:latin typeface="Calibri" pitchFamily="34" charset="0"/>
+                <a:ea typeface="Calibri" pitchFamily="34" charset="-122"/>
+                <a:cs typeface="Calibri" pitchFamily="34" charset="-120"/>
+              </a:rPr>
+              <a:t> Annual, </a:t>
+            </a:r>
+            <a:r>
+              <a:rPr lang="en-US" sz="1200" dirty="0" err="1">
+                <a:solidFill>
+                  <a:srgbClr val="1B2B3A"/>
+                </a:solidFill>
+                <a:latin typeface="Calibri" pitchFamily="34" charset="0"/>
+                <a:ea typeface="Calibri" pitchFamily="34" charset="-122"/>
+                <a:cs typeface="Calibri" pitchFamily="34" charset="-120"/>
+              </a:rPr>
+              <a:t>artinya</a:t>
+            </a:r>
+            <a:r>
+              <a:rPr lang="en-US" sz="1200" dirty="0">
+                <a:solidFill>
+                  <a:srgbClr val="1B2B3A"/>
+                </a:solidFill>
+                <a:latin typeface="Calibri" pitchFamily="34" charset="0"/>
+                <a:ea typeface="Calibri" pitchFamily="34" charset="-122"/>
+                <a:cs typeface="Calibri" pitchFamily="34" charset="-120"/>
+              </a:rPr>
+              <a:t> komitmen jangka pendek membuat pelanggan lebih mudah berpindah ke kompetitor.</a:t>
             </a:r>
             <a:endParaRPr lang="en-US" sz="1200" dirty="0"/>
           </a:p>
@@ -11206,14 +10802,14 @@
       </p:sp>
       <p:pic>
         <p:nvPicPr>
-          <p:cNvPr id="11" name="Image 1" descr="/home/claude/churn_ppt/icons/creditcard.png">    </p:cNvPr>
+          <p:cNvPr id="11" name="Image 1" descr="/home/claude/churn_ppt/icons/creditcard.png"/>
           <p:cNvPicPr>
             <a:picLocks noChangeAspect="1"/>
           </p:cNvPicPr>
           <p:nvPr/>
         </p:nvPicPr>
         <p:blipFill>
-          <a:blip r:embed="rId4"/>
+          <a:blip r:embed="rId6"/>
           <a:stretch>
             <a:fillRect/>
           </a:stretch>
@@ -11249,7 +10845,7 @@
           <a:bodyPr wrap="square" rtlCol="0" anchor="ctr"/>
           <a:lstStyle/>
           <a:p>
-            <a:pPr indent="0" marL="0">
+            <a:pPr marL="0" indent="0">
               <a:lnSpc>
                 <a:spcPts val="1700"/>
               </a:lnSpc>
@@ -11264,7 +10860,51 @@
                 <a:ea typeface="Calibri" pitchFamily="34" charset="-122"/>
                 <a:cs typeface="Calibri" pitchFamily="34" charset="-120"/>
               </a:rPr>
-              <a:t>Pelanggan tanpa Autopay lebih rentan churn — proses pembayaran manual berpotensi menimbulkan hambatan yang meningkatkan risiko berhenti berlangganan.</a:t>
+              <a:t>Pelanggan tanpa Autopay lebih </a:t>
+            </a:r>
+            <a:r>
+              <a:rPr lang="en-US" sz="1200" dirty="0" err="1">
+                <a:solidFill>
+                  <a:srgbClr val="1B2B3A"/>
+                </a:solidFill>
+                <a:latin typeface="Calibri" pitchFamily="34" charset="0"/>
+                <a:ea typeface="Calibri" pitchFamily="34" charset="-122"/>
+                <a:cs typeface="Calibri" pitchFamily="34" charset="-120"/>
+              </a:rPr>
+              <a:t>rentan</a:t>
+            </a:r>
+            <a:r>
+              <a:rPr lang="en-US" sz="1200" dirty="0">
+                <a:solidFill>
+                  <a:srgbClr val="1B2B3A"/>
+                </a:solidFill>
+                <a:latin typeface="Calibri" pitchFamily="34" charset="0"/>
+                <a:ea typeface="Calibri" pitchFamily="34" charset="-122"/>
+                <a:cs typeface="Calibri" pitchFamily="34" charset="-120"/>
+              </a:rPr>
+              <a:t> churn, </a:t>
+            </a:r>
+            <a:r>
+              <a:rPr lang="en-US" sz="1200" dirty="0" err="1">
+                <a:solidFill>
+                  <a:srgbClr val="1B2B3A"/>
+                </a:solidFill>
+                <a:latin typeface="Calibri" pitchFamily="34" charset="0"/>
+                <a:ea typeface="Calibri" pitchFamily="34" charset="-122"/>
+                <a:cs typeface="Calibri" pitchFamily="34" charset="-120"/>
+              </a:rPr>
+              <a:t>artinya</a:t>
+            </a:r>
+            <a:r>
+              <a:rPr lang="en-US" sz="1200" dirty="0">
+                <a:solidFill>
+                  <a:srgbClr val="1B2B3A"/>
+                </a:solidFill>
+                <a:latin typeface="Calibri" pitchFamily="34" charset="0"/>
+                <a:ea typeface="Calibri" pitchFamily="34" charset="-122"/>
+                <a:cs typeface="Calibri" pitchFamily="34" charset="-120"/>
+              </a:rPr>
+              <a:t> proses pembayaran manual berpotensi menimbulkan hambatan yang meningkatkan risiko berhenti berlangganan.</a:t>
             </a:r>
             <a:endParaRPr lang="en-US" sz="1200" dirty="0"/>
           </a:p>
@@ -11291,7 +10931,7 @@
           <a:bodyPr wrap="square" rtlCol="0" anchor="ctr"/>
           <a:lstStyle/>
           <a:p>
-            <a:pPr algn="l" indent="0" marL="0">
+            <a:pPr marL="0" indent="0" algn="l">
               <a:buNone/>
             </a:pPr>
             <a:r>
@@ -11330,7 +10970,7 @@
           <a:bodyPr wrap="square" rtlCol="0" anchor="ctr"/>
           <a:lstStyle/>
           <a:p>
-            <a:pPr algn="r" indent="0" marL="0">
+            <a:pPr marL="0" indent="0" algn="r">
               <a:buNone/>
             </a:pPr>
             <a:r>
@@ -11364,6 +11004,7 @@
         <a:solidFill>
           <a:srgbClr val="12314F"/>
         </a:solidFill>
+        <a:effectLst/>
       </p:bgPr>
     </p:bg>
     <p:spTree>
@@ -11401,7 +11042,7 @@
           <a:bodyPr wrap="square" rtlCol="0" anchor="ctr"/>
           <a:lstStyle/>
           <a:p>
-            <a:pPr indent="0" marL="0">
+            <a:pPr marL="0" indent="0">
               <a:buNone/>
             </a:pPr>
             <a:r>
@@ -11440,7 +11081,7 @@
           <a:bodyPr wrap="square" rtlCol="0" anchor="ctr"/>
           <a:lstStyle/>
           <a:p>
-            <a:pPr indent="0" marL="0">
+            <a:pPr marL="0" indent="0">
               <a:buNone/>
             </a:pPr>
             <a:r>
@@ -11502,379 +11143,7 @@
       </p:sp>
       <p:pic>
         <p:nvPicPr>
-          <p:cNvPr id="6" name="Image 0" descr="/home/claude/churn_ppt/icons/cogs.png">    </p:cNvPr>
-          <p:cNvPicPr>
-            <a:picLocks noChangeAspect="1"/>
-          </p:cNvPicPr>
-          <p:nvPr/>
-        </p:nvPicPr>
-        <p:blipFill>
-          <a:blip r:embed="rId1"/>
-          <a:stretch>
-            <a:fillRect/>
-          </a:stretch>
-        </p:blipFill>
-        <p:spPr>
-          <a:xfrm>
-            <a:off x="936117" y="2170557"/>
-            <a:ext cx="276606" cy="276606"/>
-          </a:xfrm>
-          <a:prstGeom prst="rect">
-            <a:avLst/>
-          </a:prstGeom>
-        </p:spPr>
-      </p:pic>
-      <p:sp>
-        <p:nvSpPr>
-          <p:cNvPr id="7" name="Text 4"/>
-          <p:cNvSpPr/>
-          <p:nvPr/>
-        </p:nvSpPr>
-        <p:spPr>
-          <a:xfrm>
-            <a:off x="1508760" y="1828800"/>
-            <a:ext cx="2926080" cy="365760"/>
-          </a:xfrm>
-          <a:prstGeom prst="rect">
-            <a:avLst/>
-          </a:prstGeom>
-          <a:noFill/>
-          <a:ln/>
-        </p:spPr>
-        <p:txBody>
-          <a:bodyPr wrap="square" rtlCol="0" anchor="ctr"/>
-          <a:lstStyle/>
-          <a:p>
-            <a:pPr indent="0" marL="0">
-              <a:buNone/>
-            </a:pPr>
-            <a:r>
-              <a:rPr lang="en-US" sz="1350" b="1" dirty="0">
-                <a:solidFill>
-                  <a:srgbClr val="FFFFFF"/>
-                </a:solidFill>
-                <a:latin typeface="Calibri" pitchFamily="34" charset="0"/>
-                <a:ea typeface="Calibri" pitchFamily="34" charset="-122"/>
-                <a:cs typeface="Calibri" pitchFamily="34" charset="-120"/>
-              </a:rPr>
-              <a:t>charge_per_mbps</a:t>
-            </a:r>
-            <a:endParaRPr lang="en-US" sz="1350" dirty="0"/>
-          </a:p>
-        </p:txBody>
-      </p:sp>
-      <p:sp>
-        <p:nvSpPr>
-          <p:cNvPr id="8" name="Text 5"/>
-          <p:cNvSpPr/>
-          <p:nvPr/>
-        </p:nvSpPr>
-        <p:spPr>
-          <a:xfrm>
-            <a:off x="1508760" y="2240280"/>
-            <a:ext cx="2926080" cy="548640"/>
-          </a:xfrm>
-          <a:prstGeom prst="rect">
-            <a:avLst/>
-          </a:prstGeom>
-          <a:noFill/>
-          <a:ln/>
-        </p:spPr>
-        <p:txBody>
-          <a:bodyPr wrap="square" rtlCol="0" anchor="ctr"/>
-          <a:lstStyle/>
-          <a:p>
-            <a:pPr indent="0" marL="0">
-              <a:buNone/>
-            </a:pPr>
-            <a:r>
-              <a:rPr lang="en-US" sz="1000" dirty="0">
-                <a:solidFill>
-                  <a:srgbClr val="8FA7BE"/>
-                </a:solidFill>
-                <a:latin typeface="Courier New" pitchFamily="34" charset="0"/>
-                <a:ea typeface="Courier New" pitchFamily="34" charset="-122"/>
-                <a:cs typeface="Courier New" pitchFamily="34" charset="-120"/>
-              </a:rPr>
-              <a:t>monthly_charge / speed_mbps</a:t>
-            </a:r>
-            <a:endParaRPr lang="en-US" sz="1000" dirty="0"/>
-          </a:p>
-        </p:txBody>
-      </p:sp>
-      <p:sp>
-        <p:nvSpPr>
-          <p:cNvPr id="9" name="Text 6"/>
-          <p:cNvSpPr/>
-          <p:nvPr/>
-        </p:nvSpPr>
-        <p:spPr>
-          <a:xfrm>
-            <a:off x="4663440" y="1828800"/>
-            <a:ext cx="6675120" cy="960120"/>
-          </a:xfrm>
-          <a:prstGeom prst="rect">
-            <a:avLst/>
-          </a:prstGeom>
-          <a:noFill/>
-          <a:ln/>
-        </p:spPr>
-        <p:txBody>
-          <a:bodyPr wrap="square" rtlCol="0" anchor="ctr"/>
-          <a:lstStyle/>
-          <a:p>
-            <a:pPr indent="0" marL="0">
-              <a:lnSpc>
-                <a:spcPts val="1700"/>
-              </a:lnSpc>
-              <a:buNone/>
-            </a:pPr>
-            <a:r>
-              <a:rPr lang="en-US" sz="1250" dirty="0">
-                <a:solidFill>
-                  <a:srgbClr val="C7D8E6"/>
-                </a:solidFill>
-                <a:latin typeface="Calibri" pitchFamily="34" charset="0"/>
-                <a:ea typeface="Calibri" pitchFamily="34" charset="-122"/>
-                <a:cs typeface="Calibri" pitchFamily="34" charset="-120"/>
-              </a:rPr>
-              <a:t>Mengukur value for money — biaya per unit kecepatan.</a:t>
-            </a:r>
-            <a:endParaRPr lang="en-US" sz="1250" dirty="0"/>
-          </a:p>
-        </p:txBody>
-      </p:sp>
-      <p:sp>
-        <p:nvSpPr>
-          <p:cNvPr id="10" name="Shape 7"/>
-          <p:cNvSpPr/>
-          <p:nvPr/>
-        </p:nvSpPr>
-        <p:spPr>
-          <a:xfrm>
-            <a:off x="548640" y="3108960"/>
-            <a:ext cx="11064240" cy="1234440"/>
-          </a:xfrm>
-          <a:prstGeom prst="roundRect">
-            <a:avLst>
-              <a:gd name="adj" fmla="val 5926"/>
-            </a:avLst>
-          </a:prstGeom>
-          <a:solidFill>
-            <a:srgbClr val="1A3E60"/>
-          </a:solidFill>
-          <a:ln/>
-        </p:spPr>
-      </p:sp>
-      <p:sp>
-        <p:nvSpPr>
-          <p:cNvPr id="11" name="Shape 8"/>
-          <p:cNvSpPr/>
-          <p:nvPr/>
-        </p:nvSpPr>
-        <p:spPr>
-          <a:xfrm>
-            <a:off x="822960" y="3474720"/>
-            <a:ext cx="502920" cy="502920"/>
-          </a:xfrm>
-          <a:prstGeom prst="ellipse">
-            <a:avLst/>
-          </a:prstGeom>
-          <a:solidFill>
-            <a:srgbClr val="E1562B"/>
-          </a:solidFill>
-          <a:ln/>
-        </p:spPr>
-      </p:sp>
-      <p:pic>
-        <p:nvPicPr>
-          <p:cNvPr id="12" name="Image 1" descr="/home/claude/churn_ppt/icons/cogs.png">    </p:cNvPr>
-          <p:cNvPicPr>
-            <a:picLocks noChangeAspect="1"/>
-          </p:cNvPicPr>
-          <p:nvPr/>
-        </p:nvPicPr>
-        <p:blipFill>
-          <a:blip r:embed="rId2"/>
-          <a:stretch>
-            <a:fillRect/>
-          </a:stretch>
-        </p:blipFill>
-        <p:spPr>
-          <a:xfrm>
-            <a:off x="936117" y="3587877"/>
-            <a:ext cx="276606" cy="276606"/>
-          </a:xfrm>
-          <a:prstGeom prst="rect">
-            <a:avLst/>
-          </a:prstGeom>
-        </p:spPr>
-      </p:pic>
-      <p:sp>
-        <p:nvSpPr>
-          <p:cNvPr id="13" name="Text 9"/>
-          <p:cNvSpPr/>
-          <p:nvPr/>
-        </p:nvSpPr>
-        <p:spPr>
-          <a:xfrm>
-            <a:off x="1508760" y="3246120"/>
-            <a:ext cx="2926080" cy="365760"/>
-          </a:xfrm>
-          <a:prstGeom prst="rect">
-            <a:avLst/>
-          </a:prstGeom>
-          <a:noFill/>
-          <a:ln/>
-        </p:spPr>
-        <p:txBody>
-          <a:bodyPr wrap="square" rtlCol="0" anchor="ctr"/>
-          <a:lstStyle/>
-          <a:p>
-            <a:pPr indent="0" marL="0">
-              <a:buNone/>
-            </a:pPr>
-            <a:r>
-              <a:rPr lang="en-US" sz="1350" b="1" dirty="0">
-                <a:solidFill>
-                  <a:srgbClr val="FFFFFF"/>
-                </a:solidFill>
-                <a:latin typeface="Calibri" pitchFamily="34" charset="0"/>
-                <a:ea typeface="Calibri" pitchFamily="34" charset="-122"/>
-                <a:cs typeface="Calibri" pitchFamily="34" charset="-120"/>
-              </a:rPr>
-              <a:t>downtime_per_tenure</a:t>
-            </a:r>
-            <a:endParaRPr lang="en-US" sz="1350" dirty="0"/>
-          </a:p>
-        </p:txBody>
-      </p:sp>
-      <p:sp>
-        <p:nvSpPr>
-          <p:cNvPr id="14" name="Text 10"/>
-          <p:cNvSpPr/>
-          <p:nvPr/>
-        </p:nvSpPr>
-        <p:spPr>
-          <a:xfrm>
-            <a:off x="1508760" y="3657600"/>
-            <a:ext cx="2926080" cy="548640"/>
-          </a:xfrm>
-          <a:prstGeom prst="rect">
-            <a:avLst/>
-          </a:prstGeom>
-          <a:noFill/>
-          <a:ln/>
-        </p:spPr>
-        <p:txBody>
-          <a:bodyPr wrap="square" rtlCol="0" anchor="ctr"/>
-          <a:lstStyle/>
-          <a:p>
-            <a:pPr indent="0" marL="0">
-              <a:buNone/>
-            </a:pPr>
-            <a:r>
-              <a:rPr lang="en-US" sz="1000" dirty="0">
-                <a:solidFill>
-                  <a:srgbClr val="8FA7BE"/>
-                </a:solidFill>
-                <a:latin typeface="Courier New" pitchFamily="34" charset="0"/>
-                <a:ea typeface="Courier New" pitchFamily="34" charset="-122"/>
-                <a:cs typeface="Courier New" pitchFamily="34" charset="-120"/>
-              </a:rPr>
-              <a:t>downtime_hours / (tenure_months + 1)</a:t>
-            </a:r>
-            <a:endParaRPr lang="en-US" sz="1000" dirty="0"/>
-          </a:p>
-        </p:txBody>
-      </p:sp>
-      <p:sp>
-        <p:nvSpPr>
-          <p:cNvPr id="15" name="Text 11"/>
-          <p:cNvSpPr/>
-          <p:nvPr/>
-        </p:nvSpPr>
-        <p:spPr>
-          <a:xfrm>
-            <a:off x="4663440" y="3246120"/>
-            <a:ext cx="6675120" cy="960120"/>
-          </a:xfrm>
-          <a:prstGeom prst="rect">
-            <a:avLst/>
-          </a:prstGeom>
-          <a:noFill/>
-          <a:ln/>
-        </p:spPr>
-        <p:txBody>
-          <a:bodyPr wrap="square" rtlCol="0" anchor="ctr"/>
-          <a:lstStyle/>
-          <a:p>
-            <a:pPr indent="0" marL="0">
-              <a:lnSpc>
-                <a:spcPts val="1700"/>
-              </a:lnSpc>
-              <a:buNone/>
-            </a:pPr>
-            <a:r>
-              <a:rPr lang="en-US" sz="1250" dirty="0">
-                <a:solidFill>
-                  <a:srgbClr val="C7D8E6"/>
-                </a:solidFill>
-                <a:latin typeface="Calibri" pitchFamily="34" charset="0"/>
-                <a:ea typeface="Calibri" pitchFamily="34" charset="-122"/>
-                <a:cs typeface="Calibri" pitchFamily="34" charset="-120"/>
-              </a:rPr>
-              <a:t>Gangguan layanan relatif terhadap lama berlangganan.</a:t>
-            </a:r>
-            <a:endParaRPr lang="en-US" sz="1250" dirty="0"/>
-          </a:p>
-        </p:txBody>
-      </p:sp>
-      <p:sp>
-        <p:nvSpPr>
-          <p:cNvPr id="16" name="Shape 12"/>
-          <p:cNvSpPr/>
-          <p:nvPr/>
-        </p:nvSpPr>
-        <p:spPr>
-          <a:xfrm>
-            <a:off x="548640" y="4526280"/>
-            <a:ext cx="11064240" cy="1234440"/>
-          </a:xfrm>
-          <a:prstGeom prst="roundRect">
-            <a:avLst>
-              <a:gd name="adj" fmla="val 5926"/>
-            </a:avLst>
-          </a:prstGeom>
-          <a:solidFill>
-            <a:srgbClr val="1A3E60"/>
-          </a:solidFill>
-          <a:ln/>
-        </p:spPr>
-      </p:sp>
-      <p:sp>
-        <p:nvSpPr>
-          <p:cNvPr id="17" name="Shape 13"/>
-          <p:cNvSpPr/>
-          <p:nvPr/>
-        </p:nvSpPr>
-        <p:spPr>
-          <a:xfrm>
-            <a:off x="822960" y="4892040"/>
-            <a:ext cx="502920" cy="502920"/>
-          </a:xfrm>
-          <a:prstGeom prst="ellipse">
-            <a:avLst/>
-          </a:prstGeom>
-          <a:solidFill>
-            <a:srgbClr val="E1562B"/>
-          </a:solidFill>
-          <a:ln/>
-        </p:spPr>
-      </p:sp>
-      <p:pic>
-        <p:nvPicPr>
-          <p:cNvPr id="18" name="Image 2" descr="/home/claude/churn_ppt/icons/cogs.png">    </p:cNvPr>
+          <p:cNvPr id="6" name="Image 0" descr="/home/claude/churn_ppt/icons/cogs.png"/>
           <p:cNvPicPr>
             <a:picLocks noChangeAspect="1"/>
           </p:cNvPicPr>
@@ -11888,7 +11157,7 @@
         </p:blipFill>
         <p:spPr>
           <a:xfrm>
-            <a:off x="936117" y="5005197"/>
+            <a:off x="936117" y="2170557"/>
             <a:ext cx="276606" cy="276606"/>
           </a:xfrm>
           <a:prstGeom prst="rect">
@@ -11898,13 +11167,13 @@
       </p:pic>
       <p:sp>
         <p:nvSpPr>
-          <p:cNvPr id="19" name="Text 14"/>
-          <p:cNvSpPr/>
-          <p:nvPr/>
-        </p:nvSpPr>
-        <p:spPr>
-          <a:xfrm>
-            <a:off x="1508760" y="4663440"/>
+          <p:cNvPr id="7" name="Text 4"/>
+          <p:cNvSpPr/>
+          <p:nvPr/>
+        </p:nvSpPr>
+        <p:spPr>
+          <a:xfrm>
+            <a:off x="1508760" y="1828800"/>
             <a:ext cx="2926080" cy="365760"/>
           </a:xfrm>
           <a:prstGeom prst="rect">
@@ -11917,7 +11186,7 @@
           <a:bodyPr wrap="square" rtlCol="0" anchor="ctr"/>
           <a:lstStyle/>
           <a:p>
-            <a:pPr indent="0" marL="0">
+            <a:pPr marL="0" indent="0">
               <a:buNone/>
             </a:pPr>
             <a:r>
@@ -11929,7 +11198,7 @@
                 <a:ea typeface="Calibri" pitchFamily="34" charset="-122"/>
                 <a:cs typeface="Calibri" pitchFamily="34" charset="-120"/>
               </a:rPr>
-              <a:t>support_per_tenure</a:t>
+              <a:t>charge_per_mbps</a:t>
             </a:r>
             <a:endParaRPr lang="en-US" sz="1350" dirty="0"/>
           </a:p>
@@ -11937,13 +11206,13 @@
       </p:sp>
       <p:sp>
         <p:nvSpPr>
-          <p:cNvPr id="20" name="Text 15"/>
-          <p:cNvSpPr/>
-          <p:nvPr/>
-        </p:nvSpPr>
-        <p:spPr>
-          <a:xfrm>
-            <a:off x="1508760" y="5074920"/>
+          <p:cNvPr id="8" name="Text 5"/>
+          <p:cNvSpPr/>
+          <p:nvPr/>
+        </p:nvSpPr>
+        <p:spPr>
+          <a:xfrm>
+            <a:off x="1508760" y="2240280"/>
             <a:ext cx="2926080" cy="548640"/>
           </a:xfrm>
           <a:prstGeom prst="rect">
@@ -11956,7 +11225,7 @@
           <a:bodyPr wrap="square" rtlCol="0" anchor="ctr"/>
           <a:lstStyle/>
           <a:p>
-            <a:pPr indent="0" marL="0">
+            <a:pPr marL="0" indent="0">
               <a:buNone/>
             </a:pPr>
             <a:r>
@@ -11968,7 +11237,7 @@
                 <a:ea typeface="Courier New" pitchFamily="34" charset="-122"/>
                 <a:cs typeface="Courier New" pitchFamily="34" charset="-120"/>
               </a:rPr>
-              <a:t>support_calls / (tenure_months + 1)</a:t>
+              <a:t>monthly_charge / speed_mbps</a:t>
             </a:r>
             <a:endParaRPr lang="en-US" sz="1000" dirty="0"/>
           </a:p>
@@ -11976,13 +11245,13 @@
       </p:sp>
       <p:sp>
         <p:nvSpPr>
-          <p:cNvPr id="21" name="Text 16"/>
-          <p:cNvSpPr/>
-          <p:nvPr/>
-        </p:nvSpPr>
-        <p:spPr>
-          <a:xfrm>
-            <a:off x="4663440" y="4663440"/>
+          <p:cNvPr id="9" name="Text 6"/>
+          <p:cNvSpPr/>
+          <p:nvPr/>
+        </p:nvSpPr>
+        <p:spPr>
+          <a:xfrm>
+            <a:off x="4663440" y="1828800"/>
             <a:ext cx="6675120" cy="960120"/>
           </a:xfrm>
           <a:prstGeom prst="rect">
@@ -11995,7 +11264,7 @@
           <a:bodyPr wrap="square" rtlCol="0" anchor="ctr"/>
           <a:lstStyle/>
           <a:p>
-            <a:pPr indent="0" marL="0">
+            <a:pPr marL="0" indent="0">
               <a:lnSpc>
                 <a:spcPts val="1700"/>
               </a:lnSpc>
@@ -12010,6 +11279,378 @@
                 <a:ea typeface="Calibri" pitchFamily="34" charset="-122"/>
                 <a:cs typeface="Calibri" pitchFamily="34" charset="-120"/>
               </a:rPr>
+              <a:t>Mengukur value for money — biaya per unit kecepatan.</a:t>
+            </a:r>
+            <a:endParaRPr lang="en-US" sz="1250" dirty="0"/>
+          </a:p>
+        </p:txBody>
+      </p:sp>
+      <p:sp>
+        <p:nvSpPr>
+          <p:cNvPr id="10" name="Shape 7"/>
+          <p:cNvSpPr/>
+          <p:nvPr/>
+        </p:nvSpPr>
+        <p:spPr>
+          <a:xfrm>
+            <a:off x="548640" y="3108960"/>
+            <a:ext cx="11064240" cy="1234440"/>
+          </a:xfrm>
+          <a:prstGeom prst="roundRect">
+            <a:avLst>
+              <a:gd name="adj" fmla="val 5926"/>
+            </a:avLst>
+          </a:prstGeom>
+          <a:solidFill>
+            <a:srgbClr val="1A3E60"/>
+          </a:solidFill>
+          <a:ln/>
+        </p:spPr>
+      </p:sp>
+      <p:sp>
+        <p:nvSpPr>
+          <p:cNvPr id="11" name="Shape 8"/>
+          <p:cNvSpPr/>
+          <p:nvPr/>
+        </p:nvSpPr>
+        <p:spPr>
+          <a:xfrm>
+            <a:off x="822960" y="3474720"/>
+            <a:ext cx="502920" cy="502920"/>
+          </a:xfrm>
+          <a:prstGeom prst="ellipse">
+            <a:avLst/>
+          </a:prstGeom>
+          <a:solidFill>
+            <a:srgbClr val="E1562B"/>
+          </a:solidFill>
+          <a:ln/>
+        </p:spPr>
+      </p:sp>
+      <p:pic>
+        <p:nvPicPr>
+          <p:cNvPr id="12" name="Image 1" descr="/home/claude/churn_ppt/icons/cogs.png"/>
+          <p:cNvPicPr>
+            <a:picLocks noChangeAspect="1"/>
+          </p:cNvPicPr>
+          <p:nvPr/>
+        </p:nvPicPr>
+        <p:blipFill>
+          <a:blip r:embed="rId3"/>
+          <a:stretch>
+            <a:fillRect/>
+          </a:stretch>
+        </p:blipFill>
+        <p:spPr>
+          <a:xfrm>
+            <a:off x="936117" y="3587877"/>
+            <a:ext cx="276606" cy="276606"/>
+          </a:xfrm>
+          <a:prstGeom prst="rect">
+            <a:avLst/>
+          </a:prstGeom>
+        </p:spPr>
+      </p:pic>
+      <p:sp>
+        <p:nvSpPr>
+          <p:cNvPr id="13" name="Text 9"/>
+          <p:cNvSpPr/>
+          <p:nvPr/>
+        </p:nvSpPr>
+        <p:spPr>
+          <a:xfrm>
+            <a:off x="1508760" y="3246120"/>
+            <a:ext cx="2926080" cy="365760"/>
+          </a:xfrm>
+          <a:prstGeom prst="rect">
+            <a:avLst/>
+          </a:prstGeom>
+          <a:noFill/>
+          <a:ln/>
+        </p:spPr>
+        <p:txBody>
+          <a:bodyPr wrap="square" rtlCol="0" anchor="ctr"/>
+          <a:lstStyle/>
+          <a:p>
+            <a:pPr marL="0" indent="0">
+              <a:buNone/>
+            </a:pPr>
+            <a:r>
+              <a:rPr lang="en-US" sz="1350" b="1" dirty="0">
+                <a:solidFill>
+                  <a:srgbClr val="FFFFFF"/>
+                </a:solidFill>
+                <a:latin typeface="Calibri" pitchFamily="34" charset="0"/>
+                <a:ea typeface="Calibri" pitchFamily="34" charset="-122"/>
+                <a:cs typeface="Calibri" pitchFamily="34" charset="-120"/>
+              </a:rPr>
+              <a:t>downtime_per_tenure</a:t>
+            </a:r>
+            <a:endParaRPr lang="en-US" sz="1350" dirty="0"/>
+          </a:p>
+        </p:txBody>
+      </p:sp>
+      <p:sp>
+        <p:nvSpPr>
+          <p:cNvPr id="14" name="Text 10"/>
+          <p:cNvSpPr/>
+          <p:nvPr/>
+        </p:nvSpPr>
+        <p:spPr>
+          <a:xfrm>
+            <a:off x="1508760" y="3657600"/>
+            <a:ext cx="2926080" cy="548640"/>
+          </a:xfrm>
+          <a:prstGeom prst="rect">
+            <a:avLst/>
+          </a:prstGeom>
+          <a:noFill/>
+          <a:ln/>
+        </p:spPr>
+        <p:txBody>
+          <a:bodyPr wrap="square" rtlCol="0" anchor="ctr"/>
+          <a:lstStyle/>
+          <a:p>
+            <a:pPr marL="0" indent="0">
+              <a:buNone/>
+            </a:pPr>
+            <a:r>
+              <a:rPr lang="en-US" sz="1000" dirty="0">
+                <a:solidFill>
+                  <a:srgbClr val="8FA7BE"/>
+                </a:solidFill>
+                <a:latin typeface="Courier New" pitchFamily="34" charset="0"/>
+                <a:ea typeface="Courier New" pitchFamily="34" charset="-122"/>
+                <a:cs typeface="Courier New" pitchFamily="34" charset="-120"/>
+              </a:rPr>
+              <a:t>downtime_hours / (tenure_months + 1)</a:t>
+            </a:r>
+            <a:endParaRPr lang="en-US" sz="1000" dirty="0"/>
+          </a:p>
+        </p:txBody>
+      </p:sp>
+      <p:sp>
+        <p:nvSpPr>
+          <p:cNvPr id="15" name="Text 11"/>
+          <p:cNvSpPr/>
+          <p:nvPr/>
+        </p:nvSpPr>
+        <p:spPr>
+          <a:xfrm>
+            <a:off x="4663440" y="3246120"/>
+            <a:ext cx="6675120" cy="960120"/>
+          </a:xfrm>
+          <a:prstGeom prst="rect">
+            <a:avLst/>
+          </a:prstGeom>
+          <a:noFill/>
+          <a:ln/>
+        </p:spPr>
+        <p:txBody>
+          <a:bodyPr wrap="square" rtlCol="0" anchor="ctr"/>
+          <a:lstStyle/>
+          <a:p>
+            <a:pPr marL="0" indent="0">
+              <a:lnSpc>
+                <a:spcPts val="1700"/>
+              </a:lnSpc>
+              <a:buNone/>
+            </a:pPr>
+            <a:r>
+              <a:rPr lang="en-US" sz="1250" dirty="0">
+                <a:solidFill>
+                  <a:srgbClr val="C7D8E6"/>
+                </a:solidFill>
+                <a:latin typeface="Calibri" pitchFamily="34" charset="0"/>
+                <a:ea typeface="Calibri" pitchFamily="34" charset="-122"/>
+                <a:cs typeface="Calibri" pitchFamily="34" charset="-120"/>
+              </a:rPr>
+              <a:t>Gangguan layanan relatif terhadap lama berlangganan.</a:t>
+            </a:r>
+            <a:endParaRPr lang="en-US" sz="1250" dirty="0"/>
+          </a:p>
+        </p:txBody>
+      </p:sp>
+      <p:sp>
+        <p:nvSpPr>
+          <p:cNvPr id="16" name="Shape 12"/>
+          <p:cNvSpPr/>
+          <p:nvPr/>
+        </p:nvSpPr>
+        <p:spPr>
+          <a:xfrm>
+            <a:off x="548640" y="4526280"/>
+            <a:ext cx="11064240" cy="1234440"/>
+          </a:xfrm>
+          <a:prstGeom prst="roundRect">
+            <a:avLst>
+              <a:gd name="adj" fmla="val 5926"/>
+            </a:avLst>
+          </a:prstGeom>
+          <a:solidFill>
+            <a:srgbClr val="1A3E60"/>
+          </a:solidFill>
+          <a:ln/>
+        </p:spPr>
+      </p:sp>
+      <p:sp>
+        <p:nvSpPr>
+          <p:cNvPr id="17" name="Shape 13"/>
+          <p:cNvSpPr/>
+          <p:nvPr/>
+        </p:nvSpPr>
+        <p:spPr>
+          <a:xfrm>
+            <a:off x="822960" y="4892040"/>
+            <a:ext cx="502920" cy="502920"/>
+          </a:xfrm>
+          <a:prstGeom prst="ellipse">
+            <a:avLst/>
+          </a:prstGeom>
+          <a:solidFill>
+            <a:srgbClr val="E1562B"/>
+          </a:solidFill>
+          <a:ln/>
+        </p:spPr>
+      </p:sp>
+      <p:pic>
+        <p:nvPicPr>
+          <p:cNvPr id="18" name="Image 2" descr="/home/claude/churn_ppt/icons/cogs.png"/>
+          <p:cNvPicPr>
+            <a:picLocks noChangeAspect="1"/>
+          </p:cNvPicPr>
+          <p:nvPr/>
+        </p:nvPicPr>
+        <p:blipFill>
+          <a:blip r:embed="rId3"/>
+          <a:stretch>
+            <a:fillRect/>
+          </a:stretch>
+        </p:blipFill>
+        <p:spPr>
+          <a:xfrm>
+            <a:off x="936117" y="5005197"/>
+            <a:ext cx="276606" cy="276606"/>
+          </a:xfrm>
+          <a:prstGeom prst="rect">
+            <a:avLst/>
+          </a:prstGeom>
+        </p:spPr>
+      </p:pic>
+      <p:sp>
+        <p:nvSpPr>
+          <p:cNvPr id="19" name="Text 14"/>
+          <p:cNvSpPr/>
+          <p:nvPr/>
+        </p:nvSpPr>
+        <p:spPr>
+          <a:xfrm>
+            <a:off x="1508760" y="4663440"/>
+            <a:ext cx="2926080" cy="365760"/>
+          </a:xfrm>
+          <a:prstGeom prst="rect">
+            <a:avLst/>
+          </a:prstGeom>
+          <a:noFill/>
+          <a:ln/>
+        </p:spPr>
+        <p:txBody>
+          <a:bodyPr wrap="square" rtlCol="0" anchor="ctr"/>
+          <a:lstStyle/>
+          <a:p>
+            <a:pPr marL="0" indent="0">
+              <a:buNone/>
+            </a:pPr>
+            <a:r>
+              <a:rPr lang="en-US" sz="1350" b="1" dirty="0">
+                <a:solidFill>
+                  <a:srgbClr val="FFFFFF"/>
+                </a:solidFill>
+                <a:latin typeface="Calibri" pitchFamily="34" charset="0"/>
+                <a:ea typeface="Calibri" pitchFamily="34" charset="-122"/>
+                <a:cs typeface="Calibri" pitchFamily="34" charset="-120"/>
+              </a:rPr>
+              <a:t>support_per_tenure</a:t>
+            </a:r>
+            <a:endParaRPr lang="en-US" sz="1350" dirty="0"/>
+          </a:p>
+        </p:txBody>
+      </p:sp>
+      <p:sp>
+        <p:nvSpPr>
+          <p:cNvPr id="20" name="Text 15"/>
+          <p:cNvSpPr/>
+          <p:nvPr/>
+        </p:nvSpPr>
+        <p:spPr>
+          <a:xfrm>
+            <a:off x="1508760" y="5074920"/>
+            <a:ext cx="2926080" cy="548640"/>
+          </a:xfrm>
+          <a:prstGeom prst="rect">
+            <a:avLst/>
+          </a:prstGeom>
+          <a:noFill/>
+          <a:ln/>
+        </p:spPr>
+        <p:txBody>
+          <a:bodyPr wrap="square" rtlCol="0" anchor="ctr"/>
+          <a:lstStyle/>
+          <a:p>
+            <a:pPr marL="0" indent="0">
+              <a:buNone/>
+            </a:pPr>
+            <a:r>
+              <a:rPr lang="en-US" sz="1000" dirty="0">
+                <a:solidFill>
+                  <a:srgbClr val="8FA7BE"/>
+                </a:solidFill>
+                <a:latin typeface="Courier New" pitchFamily="34" charset="0"/>
+                <a:ea typeface="Courier New" pitchFamily="34" charset="-122"/>
+                <a:cs typeface="Courier New" pitchFamily="34" charset="-120"/>
+              </a:rPr>
+              <a:t>support_calls / (tenure_months + 1)</a:t>
+            </a:r>
+            <a:endParaRPr lang="en-US" sz="1000" dirty="0"/>
+          </a:p>
+        </p:txBody>
+      </p:sp>
+      <p:sp>
+        <p:nvSpPr>
+          <p:cNvPr id="21" name="Text 16"/>
+          <p:cNvSpPr/>
+          <p:nvPr/>
+        </p:nvSpPr>
+        <p:spPr>
+          <a:xfrm>
+            <a:off x="4663440" y="4663440"/>
+            <a:ext cx="6675120" cy="960120"/>
+          </a:xfrm>
+          <a:prstGeom prst="rect">
+            <a:avLst/>
+          </a:prstGeom>
+          <a:noFill/>
+          <a:ln/>
+        </p:spPr>
+        <p:txBody>
+          <a:bodyPr wrap="square" rtlCol="0" anchor="ctr"/>
+          <a:lstStyle/>
+          <a:p>
+            <a:pPr marL="0" indent="0">
+              <a:lnSpc>
+                <a:spcPts val="1700"/>
+              </a:lnSpc>
+              <a:buNone/>
+            </a:pPr>
+            <a:r>
+              <a:rPr lang="en-US" sz="1250" dirty="0">
+                <a:solidFill>
+                  <a:srgbClr val="C7D8E6"/>
+                </a:solidFill>
+                <a:latin typeface="Calibri" pitchFamily="34" charset="0"/>
+                <a:ea typeface="Calibri" pitchFamily="34" charset="-122"/>
+                <a:cs typeface="Calibri" pitchFamily="34" charset="-120"/>
+              </a:rPr>
               <a:t>Intensitas keluhan pelanggan secara proporsional.</a:t>
             </a:r>
             <a:endParaRPr lang="en-US" sz="1250" dirty="0"/>
@@ -12037,7 +11678,7 @@
           <a:bodyPr wrap="square" rtlCol="0" anchor="ctr"/>
           <a:lstStyle/>
           <a:p>
-            <a:pPr algn="l" indent="0" marL="0">
+            <a:pPr marL="0" indent="0" algn="l">
               <a:buNone/>
             </a:pPr>
             <a:r>
@@ -12076,7 +11717,7 @@
           <a:bodyPr wrap="square" rtlCol="0" anchor="ctr"/>
           <a:lstStyle/>
           <a:p>
-            <a:pPr algn="r" indent="0" marL="0">
+            <a:pPr marL="0" indent="0" algn="r">
               <a:buNone/>
             </a:pPr>
             <a:r>
@@ -12110,6 +11751,7 @@
         <a:solidFill>
           <a:srgbClr val="FFFFFF"/>
         </a:solidFill>
+        <a:effectLst/>
       </p:bgPr>
     </p:bg>
     <p:spTree>
@@ -12147,7 +11789,7 @@
           <a:bodyPr wrap="square" rtlCol="0" anchor="ctr"/>
           <a:lstStyle/>
           <a:p>
-            <a:pPr indent="0" marL="0">
+            <a:pPr marL="0" indent="0">
               <a:buNone/>
             </a:pPr>
             <a:r>
@@ -12209,14 +11851,14 @@
       </p:sp>
       <p:pic>
         <p:nvPicPr>
-          <p:cNvPr id="5" name="Image 0" descr="/home/claude/churn_ppt/icons/brain.png">    </p:cNvPr>
+          <p:cNvPr id="5" name="Image 0" descr="/home/claude/churn_ppt/icons/brain.png"/>
           <p:cNvPicPr>
             <a:picLocks noChangeAspect="1"/>
           </p:cNvPicPr>
           <p:nvPr/>
         </p:nvPicPr>
         <p:blipFill>
-          <a:blip r:embed="rId1"/>
+          <a:blip r:embed="rId3"/>
           <a:stretch>
             <a:fillRect/>
           </a:stretch>
@@ -12252,7 +11894,7 @@
           <a:bodyPr wrap="square" rtlCol="0" anchor="ctr"/>
           <a:lstStyle/>
           <a:p>
-            <a:pPr indent="0" marL="0">
+            <a:pPr marL="0" indent="0">
               <a:buNone/>
             </a:pPr>
             <a:r>
@@ -12311,7 +11953,7 @@
           <a:bodyPr wrap="square" rtlCol="0" anchor="ctr"/>
           <a:lstStyle/>
           <a:p>
-            <a:pPr indent="0" marL="0">
+            <a:pPr marL="0" indent="0">
               <a:buNone/>
             </a:pPr>
             <a:r>
@@ -12370,7 +12012,7 @@
           <a:bodyPr wrap="square" rtlCol="0" anchor="ctr"/>
           <a:lstStyle/>
           <a:p>
-            <a:pPr indent="0" marL="0">
+            <a:pPr marL="0" indent="0">
               <a:buNone/>
             </a:pPr>
             <a:r>
@@ -12429,7 +12071,7 @@
           <a:bodyPr wrap="square" rtlCol="0" anchor="ctr"/>
           <a:lstStyle/>
           <a:p>
-            <a:pPr indent="0" marL="0">
+            <a:pPr marL="0" indent="0">
               <a:buNone/>
             </a:pPr>
             <a:r>
@@ -12488,7 +12130,7 @@
           <a:bodyPr wrap="square" rtlCol="0" anchor="ctr"/>
           <a:lstStyle/>
           <a:p>
-            <a:pPr indent="0" marL="0">
+            <a:pPr marL="0" indent="0">
               <a:buNone/>
             </a:pPr>
             <a:r>
@@ -12547,7 +12189,7 @@
           <a:bodyPr wrap="square" rtlCol="0" anchor="ctr"/>
           <a:lstStyle/>
           <a:p>
-            <a:pPr indent="0" marL="0">
+            <a:pPr marL="0" indent="0">
               <a:buNone/>
             </a:pPr>
             <a:r>
@@ -12609,14 +12251,14 @@
       </p:sp>
       <p:pic>
         <p:nvPicPr>
-          <p:cNvPr id="19" name="Image 1" descr="/home/claude/churn_ppt/icons/target.png">    </p:cNvPr>
+          <p:cNvPr id="19" name="Image 1" descr="/home/claude/churn_ppt/icons/target.png"/>
           <p:cNvPicPr>
             <a:picLocks noChangeAspect="1"/>
           </p:cNvPicPr>
           <p:nvPr/>
         </p:nvPicPr>
         <p:blipFill>
-          <a:blip r:embed="rId2"/>
+          <a:blip r:embed="rId4"/>
           <a:stretch>
             <a:fillRect/>
           </a:stretch>
@@ -12652,7 +12294,7 @@
           <a:bodyPr wrap="square" rtlCol="0" anchor="ctr"/>
           <a:lstStyle/>
           <a:p>
-            <a:pPr indent="0" marL="0">
+            <a:pPr marL="0" indent="0">
               <a:buNone/>
             </a:pPr>
             <a:r>
@@ -12691,7 +12333,7 @@
           <a:bodyPr wrap="square" rtlCol="0" anchor="ctr"/>
           <a:lstStyle/>
           <a:p>
-            <a:pPr indent="0" marL="0">
+            <a:pPr marL="0" indent="0">
               <a:buNone/>
             </a:pPr>
             <a:r>
@@ -12752,7 +12394,7 @@
           <a:bodyPr wrap="square" rtlCol="0" anchor="ctr"/>
           <a:lstStyle/>
           <a:p>
-            <a:pPr indent="0" marL="0">
+            <a:pPr marL="0" indent="0">
               <a:buNone/>
             </a:pPr>
             <a:r>
@@ -12791,7 +12433,7 @@
           <a:bodyPr wrap="square" rtlCol="0" anchor="ctr"/>
           <a:lstStyle/>
           <a:p>
-            <a:pPr indent="0" marL="0">
+            <a:pPr marL="0" indent="0">
               <a:buNone/>
             </a:pPr>
             <a:r>
@@ -12830,7 +12472,7 @@
           <a:bodyPr wrap="square" rtlCol="0" anchor="ctr"/>
           <a:lstStyle/>
           <a:p>
-            <a:pPr indent="0" marL="0">
+            <a:pPr marL="0" indent="0">
               <a:lnSpc>
                 <a:spcPts val="1300"/>
               </a:lnSpc>
@@ -12894,7 +12536,7 @@
           <a:bodyPr wrap="square" rtlCol="0" anchor="ctr"/>
           <a:lstStyle/>
           <a:p>
-            <a:pPr indent="0" marL="0">
+            <a:pPr marL="0" indent="0">
               <a:buNone/>
             </a:pPr>
             <a:r>
@@ -12933,7 +12575,7 @@
           <a:bodyPr wrap="square" rtlCol="0" anchor="ctr"/>
           <a:lstStyle/>
           <a:p>
-            <a:pPr indent="0" marL="0">
+            <a:pPr marL="0" indent="0">
               <a:buNone/>
             </a:pPr>
             <a:r>
@@ -12972,7 +12614,7 @@
           <a:bodyPr wrap="square" rtlCol="0" anchor="ctr"/>
           <a:lstStyle/>
           <a:p>
-            <a:pPr indent="0" marL="0">
+            <a:pPr marL="0" indent="0">
               <a:lnSpc>
                 <a:spcPts val="1300"/>
               </a:lnSpc>
@@ -13036,7 +12678,7 @@
           <a:bodyPr wrap="square" rtlCol="0" anchor="ctr"/>
           <a:lstStyle/>
           <a:p>
-            <a:pPr indent="0" marL="0">
+            <a:pPr marL="0" indent="0">
               <a:buNone/>
             </a:pPr>
             <a:r>
@@ -13075,7 +12717,7 @@
           <a:bodyPr wrap="square" rtlCol="0" anchor="ctr"/>
           <a:lstStyle/>
           <a:p>
-            <a:pPr indent="0" marL="0">
+            <a:pPr marL="0" indent="0">
               <a:buNone/>
             </a:pPr>
             <a:r>
@@ -13114,7 +12756,7 @@
           <a:bodyPr wrap="square" rtlCol="0" anchor="ctr"/>
           <a:lstStyle/>
           <a:p>
-            <a:pPr indent="0" marL="0">
+            <a:pPr marL="0" indent="0">
               <a:lnSpc>
                 <a:spcPts val="1300"/>
               </a:lnSpc>
@@ -13156,7 +12798,7 @@
           <a:bodyPr wrap="square" rtlCol="0" anchor="ctr"/>
           <a:lstStyle/>
           <a:p>
-            <a:pPr indent="0" marL="0">
+            <a:pPr marL="0" indent="0">
               <a:lnSpc>
                 <a:spcPts val="1300"/>
               </a:lnSpc>
@@ -13198,7 +12840,7 @@
           <a:bodyPr wrap="square" rtlCol="0" anchor="ctr"/>
           <a:lstStyle/>
           <a:p>
-            <a:pPr algn="l" indent="0" marL="0">
+            <a:pPr marL="0" indent="0" algn="l">
               <a:buNone/>
             </a:pPr>
             <a:r>
@@ -13237,7 +12879,7 @@
           <a:bodyPr wrap="square" rtlCol="0" anchor="ctr"/>
           <a:lstStyle/>
           <a:p>
-            <a:pPr algn="r" indent="0" marL="0">
+            <a:pPr marL="0" indent="0" algn="r">
               <a:buNone/>
             </a:pPr>
             <a:r>
@@ -13556,4 +13198,299 @@
     </a:ext>
   </a:extLst>
 </a:theme>
+</file>
+
+<file path=ppt/theme/theme2.xml><?xml version="1.0" encoding="utf-8"?>
+<a:theme xmlns:a="http://schemas.openxmlformats.org/drawingml/2006/main" name="Office Theme">
+  <a:themeElements>
+    <a:clrScheme name="Office">
+      <a:dk1>
+        <a:sysClr val="windowText" lastClr="000000"/>
+      </a:dk1>
+      <a:lt1>
+        <a:sysClr val="window" lastClr="FFFFFF"/>
+      </a:lt1>
+      <a:dk2>
+        <a:srgbClr val="44546A"/>
+      </a:dk2>
+      <a:lt2>
+        <a:srgbClr val="E7E6E6"/>
+      </a:lt2>
+      <a:accent1>
+        <a:srgbClr val="4472C4"/>
+      </a:accent1>
+      <a:accent2>
+        <a:srgbClr val="ED7D31"/>
+      </a:accent2>
+      <a:accent3>
+        <a:srgbClr val="A5A5A5"/>
+      </a:accent3>
+      <a:accent4>
+        <a:srgbClr val="FFC000"/>
+      </a:accent4>
+      <a:accent5>
+        <a:srgbClr val="5B9BD5"/>
+      </a:accent5>
+      <a:accent6>
+        <a:srgbClr val="70AD47"/>
+      </a:accent6>
+      <a:hlink>
+        <a:srgbClr val="0563C1"/>
+      </a:hlink>
+      <a:folHlink>
+        <a:srgbClr val="954F72"/>
+      </a:folHlink>
+    </a:clrScheme>
+    <a:fontScheme name="Office">
+      <a:majorFont>
+        <a:latin typeface="Calibri Light" panose="020F0302020204030204"/>
+        <a:ea typeface=""/>
+        <a:cs typeface=""/>
+        <a:font script="Jpan" typeface="游ゴシック Light"/>
+        <a:font script="Hang" typeface="맑은 고딕"/>
+        <a:font script="Hans" typeface="等线 Light"/>
+        <a:font script="Hant" typeface="新細明體"/>
+        <a:font script="Arab" typeface="Times New Roman"/>
+        <a:font script="Hebr" typeface="Times New Roman"/>
+        <a:font script="Thai" typeface="Angsana New"/>
+        <a:font script="Ethi" typeface="Nyala"/>
+        <a:font script="Beng" typeface="Vrinda"/>
+        <a:font script="Gujr" typeface="Shruti"/>
+        <a:font script="Khmr" typeface="MoolBoran"/>
+        <a:font script="Knda" typeface="Tunga"/>
+        <a:font script="Guru" typeface="Raavi"/>
+        <a:font script="Cans" typeface="Euphemia"/>
+        <a:font script="Cher" typeface="Plantagenet Cherokee"/>
+        <a:font script="Yiii" typeface="Microsoft Yi Baiti"/>
+        <a:font script="Tibt" typeface="Microsoft Himalaya"/>
+        <a:font script="Thaa" typeface="MV Boli"/>
+        <a:font script="Deva" typeface="Mangal"/>
+        <a:font script="Telu" typeface="Gautami"/>
+        <a:font script="Taml" typeface="Latha"/>
+        <a:font script="Syrc" typeface="Estrangelo Edessa"/>
+        <a:font script="Orya" typeface="Kalinga"/>
+        <a:font script="Mlym" typeface="Kartika"/>
+        <a:font script="Laoo" typeface="DokChampa"/>
+        <a:font script="Sinh" typeface="Iskoola Pota"/>
+        <a:font script="Mong" typeface="Mongolian Baiti"/>
+        <a:font script="Viet" typeface="Times New Roman"/>
+        <a:font script="Uigh" typeface="Microsoft Uighur"/>
+        <a:font script="Geor" typeface="Sylfaen"/>
+        <a:font script="Armn" typeface="Arial"/>
+        <a:font script="Bugi" typeface="Leelawadee UI"/>
+        <a:font script="Bopo" typeface="Microsoft JhengHei"/>
+        <a:font script="Java" typeface="Javanese Text"/>
+        <a:font script="Lisu" typeface="Segoe UI"/>
+        <a:font script="Mymr" typeface="Myanmar Text"/>
+        <a:font script="Nkoo" typeface="Ebrima"/>
+        <a:font script="Olck" typeface="Nirmala UI"/>
+        <a:font script="Osma" typeface="Ebrima"/>
+        <a:font script="Phag" typeface="Phagspa"/>
+        <a:font script="Syrn" typeface="Estrangelo Edessa"/>
+        <a:font script="Syrj" typeface="Estrangelo Edessa"/>
+        <a:font script="Syre" typeface="Estrangelo Edessa"/>
+        <a:font script="Sora" typeface="Nirmala UI"/>
+        <a:font script="Tale" typeface="Microsoft Tai Le"/>
+        <a:font script="Talu" typeface="Microsoft New Tai Lue"/>
+        <a:font script="Tfng" typeface="Ebrima"/>
+      </a:majorFont>
+      <a:minorFont>
+        <a:latin typeface="Calibri" panose="020F0502020204030204"/>
+        <a:ea typeface=""/>
+        <a:cs typeface=""/>
+        <a:font script="Jpan" typeface="游ゴシック"/>
+        <a:font script="Hang" typeface="맑은 고딕"/>
+        <a:font script="Hans" typeface="等线"/>
+        <a:font script="Hant" typeface="新細明體"/>
+        <a:font script="Arab" typeface="Arial"/>
+        <a:font script="Hebr" typeface="Arial"/>
+        <a:font script="Thai" typeface="Cordia New"/>
+        <a:font script="Ethi" typeface="Nyala"/>
+        <a:font script="Beng" typeface="Vrinda"/>
+        <a:font script="Gujr" typeface="Shruti"/>
+        <a:font script="Khmr" typeface="DaunPenh"/>
+        <a:font script="Knda" typeface="Tunga"/>
+        <a:font script="Guru" typeface="Raavi"/>
+        <a:font script="Cans" typeface="Euphemia"/>
+        <a:font script="Cher" typeface="Plantagenet Cherokee"/>
+        <a:font script="Yiii" typeface="Microsoft Yi Baiti"/>
+        <a:font script="Tibt" typeface="Microsoft Himalaya"/>
+        <a:font script="Thaa" typeface="MV Boli"/>
+        <a:font script="Deva" typeface="Mangal"/>
+        <a:font script="Telu" typeface="Gautami"/>
+        <a:font script="Taml" typeface="Latha"/>
+        <a:font script="Syrc" typeface="Estrangelo Edessa"/>
+        <a:font script="Orya" typeface="Kalinga"/>
+        <a:font script="Mlym" typeface="Kartika"/>
+        <a:font script="Laoo" typeface="DokChampa"/>
+        <a:font script="Sinh" typeface="Iskoola Pota"/>
+        <a:font script="Mong" typeface="Mongolian Baiti"/>
+        <a:font script="Viet" typeface="Arial"/>
+        <a:font script="Uigh" typeface="Microsoft Uighur"/>
+        <a:font script="Geor" typeface="Sylfaen"/>
+        <a:font script="Armn" typeface="Arial"/>
+        <a:font script="Bugi" typeface="Leelawadee UI"/>
+        <a:font script="Bopo" typeface="Microsoft JhengHei"/>
+        <a:font script="Java" typeface="Javanese Text"/>
+        <a:font script="Lisu" typeface="Segoe UI"/>
+        <a:font script="Mymr" typeface="Myanmar Text"/>
+        <a:font script="Nkoo" typeface="Ebrima"/>
+        <a:font script="Olck" typeface="Nirmala UI"/>
+        <a:font script="Osma" typeface="Ebrima"/>
+        <a:font script="Phag" typeface="Phagspa"/>
+        <a:font script="Syrn" typeface="Estrangelo Edessa"/>
+        <a:font script="Syrj" typeface="Estrangelo Edessa"/>
+        <a:font script="Syre" typeface="Estrangelo Edessa"/>
+        <a:font script="Sora" typeface="Nirmala UI"/>
+        <a:font script="Tale" typeface="Microsoft Tai Le"/>
+        <a:font script="Talu" typeface="Microsoft New Tai Lue"/>
+        <a:font script="Tfng" typeface="Ebrima"/>
+      </a:minorFont>
+    </a:fontScheme>
+    <a:fmtScheme name="Office">
+      <a:fillStyleLst>
+        <a:solidFill>
+          <a:schemeClr val="phClr"/>
+        </a:solidFill>
+        <a:gradFill rotWithShape="1">
+          <a:gsLst>
+            <a:gs pos="0">
+              <a:schemeClr val="phClr">
+                <a:lumMod val="110000"/>
+                <a:satMod val="105000"/>
+                <a:tint val="67000"/>
+              </a:schemeClr>
+            </a:gs>
+            <a:gs pos="50000">
+              <a:schemeClr val="phClr">
+                <a:lumMod val="105000"/>
+                <a:satMod val="103000"/>
+                <a:tint val="73000"/>
+              </a:schemeClr>
+            </a:gs>
+            <a:gs pos="100000">
+              <a:schemeClr val="phClr">
+                <a:lumMod val="105000"/>
+                <a:satMod val="109000"/>
+                <a:tint val="81000"/>
+              </a:schemeClr>
+            </a:gs>
+          </a:gsLst>
+          <a:lin ang="5400000" scaled="0"/>
+        </a:gradFill>
+        <a:gradFill rotWithShape="1">
+          <a:gsLst>
+            <a:gs pos="0">
+              <a:schemeClr val="phClr">
+                <a:satMod val="103000"/>
+                <a:lumMod val="102000"/>
+                <a:tint val="94000"/>
+              </a:schemeClr>
+            </a:gs>
+            <a:gs pos="50000">
+              <a:schemeClr val="phClr">
+                <a:satMod val="110000"/>
+                <a:lumMod val="100000"/>
+                <a:shade val="100000"/>
+              </a:schemeClr>
+            </a:gs>
+            <a:gs pos="100000">
+              <a:schemeClr val="phClr">
+                <a:lumMod val="99000"/>
+                <a:satMod val="120000"/>
+                <a:shade val="78000"/>
+              </a:schemeClr>
+            </a:gs>
+          </a:gsLst>
+          <a:lin ang="5400000" scaled="0"/>
+        </a:gradFill>
+      </a:fillStyleLst>
+      <a:lnStyleLst>
+        <a:ln w="6350" cap="flat" cmpd="sng" algn="ctr">
+          <a:solidFill>
+            <a:schemeClr val="phClr"/>
+          </a:solidFill>
+          <a:prstDash val="solid"/>
+          <a:miter lim="800000"/>
+        </a:ln>
+        <a:ln w="12700" cap="flat" cmpd="sng" algn="ctr">
+          <a:solidFill>
+            <a:schemeClr val="phClr"/>
+          </a:solidFill>
+          <a:prstDash val="solid"/>
+          <a:miter lim="800000"/>
+        </a:ln>
+        <a:ln w="19050" cap="flat" cmpd="sng" algn="ctr">
+          <a:solidFill>
+            <a:schemeClr val="phClr"/>
+          </a:solidFill>
+          <a:prstDash val="solid"/>
+          <a:miter lim="800000"/>
+        </a:ln>
+      </a:lnStyleLst>
+      <a:effectStyleLst>
+        <a:effectStyle>
+          <a:effectLst/>
+        </a:effectStyle>
+        <a:effectStyle>
+          <a:effectLst/>
+        </a:effectStyle>
+        <a:effectStyle>
+          <a:effectLst>
+            <a:outerShdw blurRad="57150" dist="19050" dir="5400000" algn="ctr" rotWithShape="0">
+              <a:srgbClr val="000000">
+                <a:alpha val="63000"/>
+              </a:srgbClr>
+            </a:outerShdw>
+          </a:effectLst>
+        </a:effectStyle>
+      </a:effectStyleLst>
+      <a:bgFillStyleLst>
+        <a:solidFill>
+          <a:schemeClr val="phClr"/>
+        </a:solidFill>
+        <a:solidFill>
+          <a:schemeClr val="phClr">
+            <a:tint val="95000"/>
+            <a:satMod val="170000"/>
+          </a:schemeClr>
+        </a:solidFill>
+        <a:gradFill rotWithShape="1">
+          <a:gsLst>
+            <a:gs pos="0">
+              <a:schemeClr val="phClr">
+                <a:tint val="93000"/>
+                <a:satMod val="150000"/>
+                <a:shade val="98000"/>
+                <a:lumMod val="102000"/>
+              </a:schemeClr>
+            </a:gs>
+            <a:gs pos="50000">
+              <a:schemeClr val="phClr">
+                <a:tint val="98000"/>
+                <a:satMod val="130000"/>
+                <a:shade val="90000"/>
+                <a:lumMod val="103000"/>
+              </a:schemeClr>
+            </a:gs>
+            <a:gs pos="100000">
+              <a:schemeClr val="phClr">
+                <a:shade val="63000"/>
+                <a:satMod val="120000"/>
+              </a:schemeClr>
+            </a:gs>
+          </a:gsLst>
+          <a:lin ang="5400000" scaled="0"/>
+        </a:gradFill>
+      </a:bgFillStyleLst>
+    </a:fmtScheme>
+  </a:themeElements>
+  <a:objectDefaults/>
+  <a:extraClrSchemeLst/>
+  <a:extLst>
+    <a:ext uri="{05A4C25C-085E-4340-85A3-A5531E510DB2}">
+      <thm15:themeFamily xmlns:thm15="http://schemas.microsoft.com/office/thememl/2012/main" name="Office Theme" id="{62F939B6-93AF-4DB8-9C6B-D6C7DFDC589F}" vid="{4A3C46E8-61CC-4603-A589-7422A47A8E4A}"/>
+    </a:ext>
+  </a:extLst>
+</a:theme>
 </file>